--- a/exports/pptx/lessons/middle-module-04-doshas/day-04-qualities-sort.pptx
+++ b/exports/pptx/lessons/middle-module-04-doshas/day-04-qualities-sort.pptx
@@ -18,9 +18,14 @@
     <p:sldId id="266" r:id="rId12"/>
     <p:sldId id="267" r:id="rId13"/>
     <p:sldId id="268" r:id="rId14"/>
+    <p:sldId id="269" r:id="rId15"/>
+    <p:sldId id="270" r:id="rId16"/>
+    <p:sldId id="271" r:id="rId17"/>
+    <p:sldId id="272" r:id="rId18"/>
+    <p:sldId id="273" r:id="rId19"/>
   </p:sldIdLst>
   <p:notesMasterIdLst>
-    <p:notesMasterId r:id="rId15"/>
+    <p:notesMasterId r:id="rId20"/>
   </p:notesMasterIdLst>
   <p:sldSz cx="9144000" cy="5143500"/>
   <p:notesSz cx="5143500" cy="9144000"/>
@@ -890,6 +895,446 @@
             <a:fld id="{F7021451-1387-4CA6-816F-3879F97B5CBC}" type="slidenum">
               <a:rPr lang="en-US"/>
               <a:t>13</a:t>
+            </a:fld>
+            <a:endParaRPr lang="en-US"/>
+          </a:p>
+        </p:txBody>
+      </p:sp>
+    </p:spTree>
+    <p:extLst>
+      <p:ext uri="{BB962C8B-B14F-4D97-AF65-F5344CB8AC3E}">
+        <p14:creationId xmlns:p14="http://schemas.microsoft.com/office/powerpoint/2010/main" val="1024086991"/>
+      </p:ext>
+    </p:extLst>
+  </p:cSld>
+  <p:clrMapOvr>
+    <a:masterClrMapping/>
+  </p:clrMapOvr>
+</p:notes>
+</file>
+
+<file path=ppt/notesSlides/notesSlide14.xml><?xml version="1.0" encoding="utf-8"?>
+<p:notes xmlns:a="http://schemas.openxmlformats.org/drawingml/2006/main" xmlns:r="http://schemas.openxmlformats.org/officeDocument/2006/relationships" xmlns:p="http://schemas.openxmlformats.org/presentationml/2006/main">
+  <p:cSld>
+    <p:spTree>
+      <p:nvGrpSpPr>
+        <p:cNvPr id="1" name=""/>
+        <p:cNvGrpSpPr/>
+        <p:nvPr/>
+      </p:nvGrpSpPr>
+      <p:grpSpPr>
+        <a:xfrm>
+          <a:off x="0" y="0"/>
+          <a:ext cx="0" cy="0"/>
+          <a:chOff x="0" y="0"/>
+          <a:chExt cx="0" cy="0"/>
+        </a:xfrm>
+      </p:grpSpPr>
+      <p:sp>
+        <p:nvSpPr>
+          <p:cNvPr id="2" name="Slide Image Placeholder 1"/>
+          <p:cNvSpPr>
+            <a:spLocks noGrp="1" noRot="1" noChangeAspect="1"/>
+          </p:cNvSpPr>
+          <p:nvPr>
+            <p:ph type="sldImg"/>
+          </p:nvPr>
+        </p:nvSpPr>
+        <p:spPr/>
+      </p:sp>
+      <p:sp>
+        <p:nvSpPr>
+          <p:cNvPr id="3" name="Notes Placeholder 2"/>
+          <p:cNvSpPr>
+            <a:spLocks noGrp="1"/>
+          </p:cNvSpPr>
+          <p:nvPr>
+            <p:ph type="body" idx="1"/>
+          </p:nvPr>
+        </p:nvSpPr>
+        <p:spPr/>
+        <p:txBody>
+          <a:bodyPr/>
+          <a:lstStyle/>
+          <a:p>
+            <a:r>
+              <a:rPr lang="en-US" dirty="0"/>
+              <a:t/>
+            </a:r>
+            <a:endParaRPr lang="en-US" dirty="0"/>
+          </a:p>
+        </p:txBody>
+      </p:sp>
+      <p:sp>
+        <p:nvSpPr>
+          <p:cNvPr id="4" name="Slide Number Placeholder 3"/>
+          <p:cNvSpPr>
+            <a:spLocks noGrp="1"/>
+          </p:cNvSpPr>
+          <p:nvPr>
+            <p:ph type="sldNum" sz="quarter" idx="10"/>
+          </p:nvPr>
+        </p:nvSpPr>
+        <p:spPr/>
+        <p:txBody>
+          <a:bodyPr/>
+          <a:lstStyle/>
+          <a:p>
+            <a:fld id="{F7021451-1387-4CA6-816F-3879F97B5CBC}" type="slidenum">
+              <a:rPr lang="en-US"/>
+              <a:t>14</a:t>
+            </a:fld>
+            <a:endParaRPr lang="en-US"/>
+          </a:p>
+        </p:txBody>
+      </p:sp>
+    </p:spTree>
+    <p:extLst>
+      <p:ext uri="{BB962C8B-B14F-4D97-AF65-F5344CB8AC3E}">
+        <p14:creationId xmlns:p14="http://schemas.microsoft.com/office/powerpoint/2010/main" val="1024086991"/>
+      </p:ext>
+    </p:extLst>
+  </p:cSld>
+  <p:clrMapOvr>
+    <a:masterClrMapping/>
+  </p:clrMapOvr>
+</p:notes>
+</file>
+
+<file path=ppt/notesSlides/notesSlide15.xml><?xml version="1.0" encoding="utf-8"?>
+<p:notes xmlns:a="http://schemas.openxmlformats.org/drawingml/2006/main" xmlns:r="http://schemas.openxmlformats.org/officeDocument/2006/relationships" xmlns:p="http://schemas.openxmlformats.org/presentationml/2006/main">
+  <p:cSld>
+    <p:spTree>
+      <p:nvGrpSpPr>
+        <p:cNvPr id="1" name=""/>
+        <p:cNvGrpSpPr/>
+        <p:nvPr/>
+      </p:nvGrpSpPr>
+      <p:grpSpPr>
+        <a:xfrm>
+          <a:off x="0" y="0"/>
+          <a:ext cx="0" cy="0"/>
+          <a:chOff x="0" y="0"/>
+          <a:chExt cx="0" cy="0"/>
+        </a:xfrm>
+      </p:grpSpPr>
+      <p:sp>
+        <p:nvSpPr>
+          <p:cNvPr id="2" name="Slide Image Placeholder 1"/>
+          <p:cNvSpPr>
+            <a:spLocks noGrp="1" noRot="1" noChangeAspect="1"/>
+          </p:cNvSpPr>
+          <p:nvPr>
+            <p:ph type="sldImg"/>
+          </p:nvPr>
+        </p:nvSpPr>
+        <p:spPr/>
+      </p:sp>
+      <p:sp>
+        <p:nvSpPr>
+          <p:cNvPr id="3" name="Notes Placeholder 2"/>
+          <p:cNvSpPr>
+            <a:spLocks noGrp="1"/>
+          </p:cNvSpPr>
+          <p:nvPr>
+            <p:ph type="body" idx="1"/>
+          </p:nvPr>
+        </p:nvSpPr>
+        <p:spPr/>
+        <p:txBody>
+          <a:bodyPr/>
+          <a:lstStyle/>
+          <a:p>
+            <a:r>
+              <a:rPr lang="en-US" dirty="0"/>
+              <a:t/>
+            </a:r>
+            <a:endParaRPr lang="en-US" dirty="0"/>
+          </a:p>
+        </p:txBody>
+      </p:sp>
+      <p:sp>
+        <p:nvSpPr>
+          <p:cNvPr id="4" name="Slide Number Placeholder 3"/>
+          <p:cNvSpPr>
+            <a:spLocks noGrp="1"/>
+          </p:cNvSpPr>
+          <p:nvPr>
+            <p:ph type="sldNum" sz="quarter" idx="10"/>
+          </p:nvPr>
+        </p:nvSpPr>
+        <p:spPr/>
+        <p:txBody>
+          <a:bodyPr/>
+          <a:lstStyle/>
+          <a:p>
+            <a:fld id="{F7021451-1387-4CA6-816F-3879F97B5CBC}" type="slidenum">
+              <a:rPr lang="en-US"/>
+              <a:t>15</a:t>
+            </a:fld>
+            <a:endParaRPr lang="en-US"/>
+          </a:p>
+        </p:txBody>
+      </p:sp>
+    </p:spTree>
+    <p:extLst>
+      <p:ext uri="{BB962C8B-B14F-4D97-AF65-F5344CB8AC3E}">
+        <p14:creationId xmlns:p14="http://schemas.microsoft.com/office/powerpoint/2010/main" val="1024086991"/>
+      </p:ext>
+    </p:extLst>
+  </p:cSld>
+  <p:clrMapOvr>
+    <a:masterClrMapping/>
+  </p:clrMapOvr>
+</p:notes>
+</file>
+
+<file path=ppt/notesSlides/notesSlide16.xml><?xml version="1.0" encoding="utf-8"?>
+<p:notes xmlns:a="http://schemas.openxmlformats.org/drawingml/2006/main" xmlns:r="http://schemas.openxmlformats.org/officeDocument/2006/relationships" xmlns:p="http://schemas.openxmlformats.org/presentationml/2006/main">
+  <p:cSld>
+    <p:spTree>
+      <p:nvGrpSpPr>
+        <p:cNvPr id="1" name=""/>
+        <p:cNvGrpSpPr/>
+        <p:nvPr/>
+      </p:nvGrpSpPr>
+      <p:grpSpPr>
+        <a:xfrm>
+          <a:off x="0" y="0"/>
+          <a:ext cx="0" cy="0"/>
+          <a:chOff x="0" y="0"/>
+          <a:chExt cx="0" cy="0"/>
+        </a:xfrm>
+      </p:grpSpPr>
+      <p:sp>
+        <p:nvSpPr>
+          <p:cNvPr id="2" name="Slide Image Placeholder 1"/>
+          <p:cNvSpPr>
+            <a:spLocks noGrp="1" noRot="1" noChangeAspect="1"/>
+          </p:cNvSpPr>
+          <p:nvPr>
+            <p:ph type="sldImg"/>
+          </p:nvPr>
+        </p:nvSpPr>
+        <p:spPr/>
+      </p:sp>
+      <p:sp>
+        <p:nvSpPr>
+          <p:cNvPr id="3" name="Notes Placeholder 2"/>
+          <p:cNvSpPr>
+            <a:spLocks noGrp="1"/>
+          </p:cNvSpPr>
+          <p:nvPr>
+            <p:ph type="body" idx="1"/>
+          </p:nvPr>
+        </p:nvSpPr>
+        <p:spPr/>
+        <p:txBody>
+          <a:bodyPr/>
+          <a:lstStyle/>
+          <a:p>
+            <a:r>
+              <a:rPr lang="en-US" dirty="0"/>
+              <a:t/>
+            </a:r>
+            <a:endParaRPr lang="en-US" dirty="0"/>
+          </a:p>
+        </p:txBody>
+      </p:sp>
+      <p:sp>
+        <p:nvSpPr>
+          <p:cNvPr id="4" name="Slide Number Placeholder 3"/>
+          <p:cNvSpPr>
+            <a:spLocks noGrp="1"/>
+          </p:cNvSpPr>
+          <p:nvPr>
+            <p:ph type="sldNum" sz="quarter" idx="10"/>
+          </p:nvPr>
+        </p:nvSpPr>
+        <p:spPr/>
+        <p:txBody>
+          <a:bodyPr/>
+          <a:lstStyle/>
+          <a:p>
+            <a:fld id="{F7021451-1387-4CA6-816F-3879F97B5CBC}" type="slidenum">
+              <a:rPr lang="en-US"/>
+              <a:t>16</a:t>
+            </a:fld>
+            <a:endParaRPr lang="en-US"/>
+          </a:p>
+        </p:txBody>
+      </p:sp>
+    </p:spTree>
+    <p:extLst>
+      <p:ext uri="{BB962C8B-B14F-4D97-AF65-F5344CB8AC3E}">
+        <p14:creationId xmlns:p14="http://schemas.microsoft.com/office/powerpoint/2010/main" val="1024086991"/>
+      </p:ext>
+    </p:extLst>
+  </p:cSld>
+  <p:clrMapOvr>
+    <a:masterClrMapping/>
+  </p:clrMapOvr>
+</p:notes>
+</file>
+
+<file path=ppt/notesSlides/notesSlide17.xml><?xml version="1.0" encoding="utf-8"?>
+<p:notes xmlns:a="http://schemas.openxmlformats.org/drawingml/2006/main" xmlns:r="http://schemas.openxmlformats.org/officeDocument/2006/relationships" xmlns:p="http://schemas.openxmlformats.org/presentationml/2006/main">
+  <p:cSld>
+    <p:spTree>
+      <p:nvGrpSpPr>
+        <p:cNvPr id="1" name=""/>
+        <p:cNvGrpSpPr/>
+        <p:nvPr/>
+      </p:nvGrpSpPr>
+      <p:grpSpPr>
+        <a:xfrm>
+          <a:off x="0" y="0"/>
+          <a:ext cx="0" cy="0"/>
+          <a:chOff x="0" y="0"/>
+          <a:chExt cx="0" cy="0"/>
+        </a:xfrm>
+      </p:grpSpPr>
+      <p:sp>
+        <p:nvSpPr>
+          <p:cNvPr id="2" name="Slide Image Placeholder 1"/>
+          <p:cNvSpPr>
+            <a:spLocks noGrp="1" noRot="1" noChangeAspect="1"/>
+          </p:cNvSpPr>
+          <p:nvPr>
+            <p:ph type="sldImg"/>
+          </p:nvPr>
+        </p:nvSpPr>
+        <p:spPr/>
+      </p:sp>
+      <p:sp>
+        <p:nvSpPr>
+          <p:cNvPr id="3" name="Notes Placeholder 2"/>
+          <p:cNvSpPr>
+            <a:spLocks noGrp="1"/>
+          </p:cNvSpPr>
+          <p:nvPr>
+            <p:ph type="body" idx="1"/>
+          </p:nvPr>
+        </p:nvSpPr>
+        <p:spPr/>
+        <p:txBody>
+          <a:bodyPr/>
+          <a:lstStyle/>
+          <a:p>
+            <a:r>
+              <a:rPr lang="en-US" dirty="0"/>
+              <a:t/>
+            </a:r>
+            <a:endParaRPr lang="en-US" dirty="0"/>
+          </a:p>
+        </p:txBody>
+      </p:sp>
+      <p:sp>
+        <p:nvSpPr>
+          <p:cNvPr id="4" name="Slide Number Placeholder 3"/>
+          <p:cNvSpPr>
+            <a:spLocks noGrp="1"/>
+          </p:cNvSpPr>
+          <p:nvPr>
+            <p:ph type="sldNum" sz="quarter" idx="10"/>
+          </p:nvPr>
+        </p:nvSpPr>
+        <p:spPr/>
+        <p:txBody>
+          <a:bodyPr/>
+          <a:lstStyle/>
+          <a:p>
+            <a:fld id="{F7021451-1387-4CA6-816F-3879F97B5CBC}" type="slidenum">
+              <a:rPr lang="en-US"/>
+              <a:t>17</a:t>
+            </a:fld>
+            <a:endParaRPr lang="en-US"/>
+          </a:p>
+        </p:txBody>
+      </p:sp>
+    </p:spTree>
+    <p:extLst>
+      <p:ext uri="{BB962C8B-B14F-4D97-AF65-F5344CB8AC3E}">
+        <p14:creationId xmlns:p14="http://schemas.microsoft.com/office/powerpoint/2010/main" val="1024086991"/>
+      </p:ext>
+    </p:extLst>
+  </p:cSld>
+  <p:clrMapOvr>
+    <a:masterClrMapping/>
+  </p:clrMapOvr>
+</p:notes>
+</file>
+
+<file path=ppt/notesSlides/notesSlide18.xml><?xml version="1.0" encoding="utf-8"?>
+<p:notes xmlns:a="http://schemas.openxmlformats.org/drawingml/2006/main" xmlns:r="http://schemas.openxmlformats.org/officeDocument/2006/relationships" xmlns:p="http://schemas.openxmlformats.org/presentationml/2006/main">
+  <p:cSld>
+    <p:spTree>
+      <p:nvGrpSpPr>
+        <p:cNvPr id="1" name=""/>
+        <p:cNvGrpSpPr/>
+        <p:nvPr/>
+      </p:nvGrpSpPr>
+      <p:grpSpPr>
+        <a:xfrm>
+          <a:off x="0" y="0"/>
+          <a:ext cx="0" cy="0"/>
+          <a:chOff x="0" y="0"/>
+          <a:chExt cx="0" cy="0"/>
+        </a:xfrm>
+      </p:grpSpPr>
+      <p:sp>
+        <p:nvSpPr>
+          <p:cNvPr id="2" name="Slide Image Placeholder 1"/>
+          <p:cNvSpPr>
+            <a:spLocks noGrp="1" noRot="1" noChangeAspect="1"/>
+          </p:cNvSpPr>
+          <p:nvPr>
+            <p:ph type="sldImg"/>
+          </p:nvPr>
+        </p:nvSpPr>
+        <p:spPr/>
+      </p:sp>
+      <p:sp>
+        <p:nvSpPr>
+          <p:cNvPr id="3" name="Notes Placeholder 2"/>
+          <p:cNvSpPr>
+            <a:spLocks noGrp="1"/>
+          </p:cNvSpPr>
+          <p:nvPr>
+            <p:ph type="body" idx="1"/>
+          </p:nvPr>
+        </p:nvSpPr>
+        <p:spPr/>
+        <p:txBody>
+          <a:bodyPr/>
+          <a:lstStyle/>
+          <a:p>
+            <a:r>
+              <a:rPr lang="en-US" dirty="0"/>
+              <a:t/>
+            </a:r>
+            <a:endParaRPr lang="en-US" dirty="0"/>
+          </a:p>
+        </p:txBody>
+      </p:sp>
+      <p:sp>
+        <p:nvSpPr>
+          <p:cNvPr id="4" name="Slide Number Placeholder 3"/>
+          <p:cNvSpPr>
+            <a:spLocks noGrp="1"/>
+          </p:cNvSpPr>
+          <p:nvPr>
+            <p:ph type="sldNum" sz="quarter" idx="10"/>
+          </p:nvPr>
+        </p:nvSpPr>
+        <p:spPr/>
+        <p:txBody>
+          <a:bodyPr/>
+          <a:lstStyle/>
+          <a:p>
+            <a:fld id="{F7021451-1387-4CA6-816F-3879F97B5CBC}" type="slidenum">
+              <a:rPr lang="en-US"/>
+              <a:t>18</a:t>
             </a:fld>
             <a:endParaRPr lang="en-US"/>
           </a:p>
@@ -2189,148 +2634,6 @@
         </p:nvSpPr>
         <p:spPr>
           <a:xfrm>
-            <a:off x="406301" y="1223963"/>
-            <a:ext cx="8498026" cy="274290"/>
-          </a:xfrm>
-          <a:prstGeom prst="rect">
-            <a:avLst/>
-          </a:prstGeom>
-          <a:noFill/>
-          <a:ln/>
-        </p:spPr>
-        <p:txBody>
-          <a:bodyPr wrap="square" lIns="0" tIns="0" rIns="0" bIns="0" rtlCol="0" anchor="t"/>
-          <a:lstStyle/>
-          <a:p>
-            <a:pPr algn="l" indent="0" marL="0">
-              <a:lnSpc>
-                <a:spcPts val="2160"/>
-              </a:lnSpc>
-              <a:spcBef>
-                <a:spcPts val="600"/>
-              </a:spcBef>
-              <a:spcAft>
-                <a:spcPts val="800"/>
-              </a:spcAft>
-              <a:buNone/>
-            </a:pPr>
-            <a:r>
-              <a:rPr lang="en-US" sz="1800" b="1" dirty="0">
-                <a:solidFill>
-                  <a:srgbClr val="FE4447"/>
-                </a:solidFill>
-                <a:latin typeface="Georgia" pitchFamily="34" charset="0"/>
-                <a:ea typeface="Georgia" pitchFamily="34" charset="-122"/>
-                <a:cs typeface="Georgia" pitchFamily="34" charset="-120"/>
-              </a:rPr>
-              <a:t>Learning objective</a:t>
-            </a:r>
-            <a:endParaRPr lang="en-US" sz="1800" dirty="0"/>
-          </a:p>
-        </p:txBody>
-      </p:sp>
-      <p:sp>
-        <p:nvSpPr>
-          <p:cNvPr id="6" name="Text 4"/>
-          <p:cNvSpPr/>
-          <p:nvPr/>
-        </p:nvSpPr>
-        <p:spPr>
-          <a:xfrm>
-            <a:off x="406301" y="1637854"/>
-            <a:ext cx="8498026" cy="426541"/>
-          </a:xfrm>
-          <a:prstGeom prst="rect">
-            <a:avLst/>
-          </a:prstGeom>
-          <a:noFill/>
-          <a:ln/>
-        </p:spPr>
-        <p:txBody>
-          <a:bodyPr wrap="square" lIns="0" tIns="0" rIns="0" bIns="0" rtlCol="0" anchor="t"/>
-          <a:lstStyle/>
-          <a:p>
-            <a:pPr algn="l" indent="0" marL="0">
-              <a:lnSpc>
-                <a:spcPts val="1680"/>
-              </a:lnSpc>
-              <a:spcBef>
-                <a:spcPts val="300"/>
-              </a:spcBef>
-              <a:spcAft>
-                <a:spcPts val="300"/>
-              </a:spcAft>
-              <a:buNone/>
-            </a:pPr>
-            <a:r>
-              <a:rPr lang="en-US" sz="1200" dirty="0">
-                <a:solidFill>
-                  <a:srgbClr val="1C2833"/>
-                </a:solidFill>
-                <a:latin typeface="Arial" pitchFamily="34" charset="0"/>
-                <a:ea typeface="Arial" pitchFamily="34" charset="-122"/>
-                <a:cs typeface="Arial" pitchFamily="34" charset="-120"/>
-              </a:rPr>
-              <a:t>By the end of this lesson, students sort 30 qualities/objects/events into the three </a:t>
-            </a:r>
-            <a:pPr algn="l" indent="0" marL="0">
-              <a:lnSpc>
-                <a:spcPts val="1680"/>
-              </a:lnSpc>
-              <a:spcBef>
-                <a:spcPts val="300"/>
-              </a:spcBef>
-              <a:spcAft>
-                <a:spcPts val="300"/>
-              </a:spcAft>
-              <a:buNone/>
-            </a:pPr>
-            <a:r>
-              <a:rPr lang="en-US" sz="1200" i="1" dirty="0">
-                <a:solidFill>
-                  <a:srgbClr val="1C2833"/>
-                </a:solidFill>
-                <a:latin typeface="Arial" pitchFamily="34" charset="0"/>
-                <a:ea typeface="Arial" pitchFamily="34" charset="-122"/>
-                <a:cs typeface="Arial" pitchFamily="34" charset="-120"/>
-              </a:rPr>
-              <a:t>doṣa</a:t>
-            </a:r>
-            <a:pPr algn="l" indent="0" marL="0">
-              <a:lnSpc>
-                <a:spcPts val="1680"/>
-              </a:lnSpc>
-              <a:spcBef>
-                <a:spcPts val="300"/>
-              </a:spcBef>
-              <a:spcAft>
-                <a:spcPts val="300"/>
-              </a:spcAft>
-              <a:buNone/>
-            </a:pPr>
-            <a:r>
-              <a:rPr lang="en-US" sz="1200" dirty="0">
-                <a:solidFill>
-                  <a:srgbClr val="1C2833"/>
-                </a:solidFill>
-                <a:latin typeface="Arial" pitchFamily="34" charset="0"/>
-                <a:ea typeface="Arial" pitchFamily="34" charset="-122"/>
-                <a:cs typeface="Arial" pitchFamily="34" charset="-120"/>
-              </a:rPr>
-              <a:t> buckets with reasoned justification, defending borderline cases.</a:t>
-            </a:r>
-            <a:endParaRPr lang="en-US" sz="1200" dirty="0"/>
-          </a:p>
-        </p:txBody>
-      </p:sp>
-      <p:sp>
-        <p:nvSpPr>
-          <p:cNvPr id="7" name="Text 5"/>
-          <p:cNvSpPr/>
-          <p:nvPr/>
-        </p:nvSpPr>
-        <p:spPr>
-          <a:xfrm>
             <a:off x="406301" y="4434929"/>
             <a:ext cx="8498026" cy="213271"/>
           </a:xfrm>
@@ -2475,7 +2778,7 @@
                 <a:ea typeface="Georgia" pitchFamily="34" charset="-122"/>
                 <a:cs typeface="Georgia" pitchFamily="34" charset="-120"/>
               </a:rPr>
-              <a:t>Homework</a:t>
+              <a:t>Core debrief (10 min) (cont.)</a:t>
             </a:r>
             <a:endParaRPr lang="en-US" sz="1800" dirty="0"/>
           </a:p>
@@ -2489,8 +2792,61 @@
         </p:nvSpPr>
         <p:spPr>
           <a:xfrm>
-            <a:off x="406301" y="870942"/>
-            <a:ext cx="8498026" cy="426541"/>
+            <a:off x="406301" y="883593"/>
+            <a:ext cx="8331398" cy="611981"/>
+          </a:xfrm>
+          <a:prstGeom prst="rect">
+            <a:avLst/>
+          </a:prstGeom>
+          <a:solidFill>
+            <a:srgbClr val="F4F8F9"/>
+          </a:solidFill>
+          <a:ln/>
+        </p:spPr>
+        <p:txBody>
+          <a:bodyPr wrap="square" rtlCol="0" anchor="ctr"/>
+          <a:lstStyle/>
+          <a:p>
+            <a:pPr indent="0" marL="0">
+              <a:buNone/>
+            </a:pPr>
+            <a:endParaRPr lang="en-US" dirty="0"/>
+          </a:p>
+        </p:txBody>
+      </p:sp>
+      <p:sp>
+        <p:nvSpPr>
+          <p:cNvPr id="5" name="Shape 3"/>
+          <p:cNvSpPr/>
+          <p:nvPr/>
+        </p:nvSpPr>
+        <p:spPr>
+          <a:xfrm>
+            <a:off x="434876" y="883593"/>
+            <a:ext cx="0" cy="611981"/>
+          </a:xfrm>
+          <a:prstGeom prst="line">
+            <a:avLst/>
+          </a:prstGeom>
+          <a:noFill/>
+          <a:ln w="57150">
+            <a:solidFill>
+              <a:srgbClr val="FE4447"/>
+            </a:solidFill>
+            <a:prstDash val="solid"/>
+          </a:ln>
+        </p:spPr>
+      </p:sp>
+      <p:sp>
+        <p:nvSpPr>
+          <p:cNvPr id="6" name="Text 4"/>
+          <p:cNvSpPr/>
+          <p:nvPr/>
+        </p:nvSpPr>
+        <p:spPr>
+          <a:xfrm>
+            <a:off x="692051" y="1074093"/>
+            <a:ext cx="7973389" cy="230981"/>
           </a:xfrm>
           <a:prstGeom prst="rect">
             <a:avLst/>
@@ -2504,7 +2860,7 @@
           <a:p>
             <a:pPr algn="l" indent="0" marL="0">
               <a:lnSpc>
-                <a:spcPts val="1680"/>
+                <a:spcPts val="1820"/>
               </a:lnSpc>
               <a:spcBef>
                 <a:spcPts val="300"/>
@@ -2515,19 +2871,19 @@
               <a:buNone/>
             </a:pPr>
             <a:r>
-              <a:rPr lang="en-US" sz="1200" dirty="0">
-                <a:solidFill>
-                  <a:srgbClr val="1C2833"/>
-                </a:solidFill>
-                <a:latin typeface="Arial" pitchFamily="34" charset="0"/>
-                <a:ea typeface="Arial" pitchFamily="34" charset="-122"/>
-                <a:cs typeface="Arial" pitchFamily="34" charset="-120"/>
-              </a:rPr>
-              <a:t>– Write down what you ate at dinner tonight. One line per item describing the </a:t>
-            </a:r>
-            <a:pPr algn="l" indent="0" marL="0">
-              <a:lnSpc>
-                <a:spcPts val="1680"/>
+              <a:rPr lang="en-US" sz="1300" dirty="0">
+                <a:solidFill>
+                  <a:srgbClr val="1C2833"/>
+                </a:solidFill>
+                <a:latin typeface="Georgia" pitchFamily="34" charset="0"/>
+                <a:ea typeface="Georgia" pitchFamily="34" charset="-122"/>
+                <a:cs typeface="Georgia" pitchFamily="34" charset="-120"/>
+              </a:rPr>
+              <a:t>Like increases like. To </a:t>
+            </a:r>
+            <a:pPr algn="l" indent="0" marL="0">
+              <a:lnSpc>
+                <a:spcPts val="1820"/>
               </a:lnSpc>
               <a:spcBef>
                 <a:spcPts val="300"/>
@@ -2538,19 +2894,19 @@
               <a:buNone/>
             </a:pPr>
             <a:r>
-              <a:rPr lang="en-US" sz="1200" i="1" dirty="0">
-                <a:solidFill>
-                  <a:srgbClr val="1C2833"/>
-                </a:solidFill>
-                <a:latin typeface="Arial" pitchFamily="34" charset="0"/>
-                <a:ea typeface="Arial" pitchFamily="34" charset="-122"/>
-                <a:cs typeface="Arial" pitchFamily="34" charset="-120"/>
-              </a:rPr>
-              <a:t>qualities</a:t>
-            </a:r>
-            <a:pPr algn="l" indent="0" marL="0">
-              <a:lnSpc>
-                <a:spcPts val="1680"/>
+              <a:rPr lang="en-US" sz="1300" i="1" dirty="0">
+                <a:solidFill>
+                  <a:srgbClr val="1C2833"/>
+                </a:solidFill>
+                <a:latin typeface="Georgia" pitchFamily="34" charset="0"/>
+                <a:ea typeface="Georgia" pitchFamily="34" charset="-122"/>
+                <a:cs typeface="Georgia" pitchFamily="34" charset="-120"/>
+              </a:rPr>
+              <a:t>balance</a:t>
+            </a:r>
+            <a:pPr algn="l" indent="0" marL="0">
+              <a:lnSpc>
+                <a:spcPts val="1820"/>
               </a:lnSpc>
               <a:spcBef>
                 <a:spcPts val="300"/>
@@ -2561,19 +2917,19 @@
               <a:buNone/>
             </a:pPr>
             <a:r>
-              <a:rPr lang="en-US" sz="1200" dirty="0">
-                <a:solidFill>
-                  <a:srgbClr val="1C2833"/>
-                </a:solidFill>
-                <a:latin typeface="Arial" pitchFamily="34" charset="0"/>
-                <a:ea typeface="Arial" pitchFamily="34" charset="-122"/>
-                <a:cs typeface="Arial" pitchFamily="34" charset="-120"/>
-              </a:rPr>
-              <a:t> (heavy/light, hot/cold, dry/oily). Don't worry about which </a:t>
-            </a:r>
-            <a:pPr algn="l" indent="0" marL="0">
-              <a:lnSpc>
-                <a:spcPts val="1680"/>
+              <a:rPr lang="en-US" sz="1300" dirty="0">
+                <a:solidFill>
+                  <a:srgbClr val="1C2833"/>
+                </a:solidFill>
+                <a:latin typeface="Georgia" pitchFamily="34" charset="0"/>
+                <a:ea typeface="Georgia" pitchFamily="34" charset="-122"/>
+                <a:cs typeface="Georgia" pitchFamily="34" charset="-120"/>
+              </a:rPr>
+              <a:t> a doṣa, use the </a:t>
+            </a:r>
+            <a:pPr algn="l" indent="0" marL="0">
+              <a:lnSpc>
+                <a:spcPts val="1820"/>
               </a:lnSpc>
               <a:spcBef>
                 <a:spcPts val="300"/>
@@ -2584,19 +2940,19 @@
               <a:buNone/>
             </a:pPr>
             <a:r>
-              <a:rPr lang="en-US" sz="1200" i="1" dirty="0">
-                <a:solidFill>
-                  <a:srgbClr val="1C2833"/>
-                </a:solidFill>
-                <a:latin typeface="Arial" pitchFamily="34" charset="0"/>
-                <a:ea typeface="Arial" pitchFamily="34" charset="-122"/>
-                <a:cs typeface="Arial" pitchFamily="34" charset="-120"/>
-              </a:rPr>
-              <a:t>doṣa</a:t>
-            </a:r>
-            <a:pPr algn="l" indent="0" marL="0">
-              <a:lnSpc>
-                <a:spcPts val="1680"/>
+              <a:rPr lang="en-US" sz="1300" i="1" dirty="0">
+                <a:solidFill>
+                  <a:srgbClr val="1C2833"/>
+                </a:solidFill>
+                <a:latin typeface="Georgia" pitchFamily="34" charset="0"/>
+                <a:ea typeface="Georgia" pitchFamily="34" charset="-122"/>
+                <a:cs typeface="Georgia" pitchFamily="34" charset="-120"/>
+              </a:rPr>
+              <a:t>opposite</a:t>
+            </a:r>
+            <a:pPr algn="l" indent="0" marL="0">
+              <a:lnSpc>
+                <a:spcPts val="1820"/>
               </a:lnSpc>
               <a:spcBef>
                 <a:spcPts val="300"/>
@@ -2607,23 +2963,23 @@
               <a:buNone/>
             </a:pPr>
             <a:r>
-              <a:rPr lang="en-US" sz="1200" dirty="0">
-                <a:solidFill>
-                  <a:srgbClr val="1C2833"/>
-                </a:solidFill>
-                <a:latin typeface="Arial" pitchFamily="34" charset="0"/>
-                <a:ea typeface="Arial" pitchFamily="34" charset="-122"/>
-                <a:cs typeface="Arial" pitchFamily="34" charset="-120"/>
-              </a:rPr>
-              <a:t> — just the qualities.</a:t>
-            </a:r>
-            <a:endParaRPr lang="en-US" sz="1200" dirty="0"/>
-          </a:p>
-        </p:txBody>
-      </p:sp>
-      <p:sp>
-        <p:nvSpPr>
-          <p:cNvPr id="5" name="Text 3"/>
+              <a:rPr lang="en-US" sz="1300" dirty="0">
+                <a:solidFill>
+                  <a:srgbClr val="1C2833"/>
+                </a:solidFill>
+                <a:latin typeface="Georgia" pitchFamily="34" charset="0"/>
+                <a:ea typeface="Georgia" pitchFamily="34" charset="-122"/>
+                <a:cs typeface="Georgia" pitchFamily="34" charset="-120"/>
+              </a:rPr>
+              <a:t> quality.</a:t>
+            </a:r>
+            <a:endParaRPr lang="en-US" sz="1300" dirty="0"/>
+          </a:p>
+        </p:txBody>
+      </p:sp>
+      <p:sp>
+        <p:nvSpPr>
+          <p:cNvPr id="7" name="Text 5"/>
           <p:cNvSpPr/>
           <p:nvPr/>
         </p:nvSpPr>
@@ -2773,7 +3129,7 @@
                 <a:ea typeface="Georgia" pitchFamily="34" charset="-122"/>
                 <a:cs typeface="Georgia" pitchFamily="34" charset="-120"/>
               </a:rPr>
-              <a:t>Differentiation</a:t>
+              <a:t>Core debrief (10 min) (cont.)</a:t>
             </a:r>
             <a:endParaRPr lang="en-US" sz="1800" dirty="0"/>
           </a:p>
@@ -2787,8 +3143,8 @@
         </p:nvSpPr>
         <p:spPr>
           <a:xfrm>
-            <a:off x="634901" y="883593"/>
-            <a:ext cx="8102798" cy="731341"/>
+            <a:off x="406301" y="870942"/>
+            <a:ext cx="8498026" cy="213271"/>
           </a:xfrm>
           <a:prstGeom prst="rect">
             <a:avLst/>
@@ -2800,6 +3156,54 @@
           <a:bodyPr wrap="square" lIns="0" tIns="0" rIns="0" bIns="0" rtlCol="0" anchor="t"/>
           <a:lstStyle/>
           <a:p>
+            <a:pPr algn="l" indent="0" marL="0">
+              <a:lnSpc>
+                <a:spcPts val="1680"/>
+              </a:lnSpc>
+              <a:spcBef>
+                <a:spcPts val="300"/>
+              </a:spcBef>
+              <a:spcAft>
+                <a:spcPts val="300"/>
+              </a:spcAft>
+              <a:buNone/>
+            </a:pPr>
+            <a:r>
+              <a:rPr lang="en-US" sz="1200" dirty="0">
+                <a:solidFill>
+                  <a:srgbClr val="1C2833"/>
+                </a:solidFill>
+                <a:latin typeface="Arial" pitchFamily="34" charset="0"/>
+                <a:ea typeface="Arial" pitchFamily="34" charset="-122"/>
+                <a:cs typeface="Arial" pitchFamily="34" charset="-120"/>
+              </a:rPr>
+              <a:t>Examples:</a:t>
+            </a:r>
+            <a:endParaRPr lang="en-US" sz="1200" dirty="0"/>
+          </a:p>
+        </p:txBody>
+      </p:sp>
+      <p:sp>
+        <p:nvSpPr>
+          <p:cNvPr id="5" name="Text 3"/>
+          <p:cNvSpPr/>
+          <p:nvPr/>
+        </p:nvSpPr>
+        <p:spPr>
+          <a:xfrm>
+            <a:off x="634901" y="1173063"/>
+            <a:ext cx="8102798" cy="769441"/>
+          </a:xfrm>
+          <a:prstGeom prst="rect">
+            <a:avLst/>
+          </a:prstGeom>
+          <a:noFill/>
+          <a:ln/>
+        </p:spPr>
+        <p:txBody>
+          <a:bodyPr wrap="square" lIns="0" tIns="0" rIns="0" bIns="0" rtlCol="0" anchor="t"/>
+          <a:lstStyle/>
+          <a:p>
             <a:pPr algn="l" marL="342900" indent="-342900">
               <a:lnSpc>
                 <a:spcPts val="1620"/>
@@ -2811,15 +3215,15 @@
               <a:buChar char="•"/>
             </a:pPr>
             <a:r>
-              <a:rPr lang="en-US" sz="1200" b="1" dirty="0">
-                <a:solidFill>
-                  <a:srgbClr val="1C2833"/>
-                </a:solidFill>
-                <a:latin typeface="Arial" pitchFamily="34" charset="0"/>
-                <a:ea typeface="Arial" pitchFamily="34" charset="-122"/>
-                <a:cs typeface="Arial" pitchFamily="34" charset="-120"/>
-              </a:rPr>
-              <a:t>One tier up:</a:t>
+              <a:rPr lang="en-US" sz="1200" i="1" dirty="0">
+                <a:solidFill>
+                  <a:srgbClr val="1C2833"/>
+                </a:solidFill>
+                <a:latin typeface="Arial" pitchFamily="34" charset="0"/>
+                <a:ea typeface="Arial" pitchFamily="34" charset="-122"/>
+                <a:cs typeface="Arial" pitchFamily="34" charset="-120"/>
+              </a:rPr>
+              <a:t>Vāta</a:t>
             </a:r>
             <a:pPr algn="l" indent="0" marL="0">
               <a:lnSpc>
@@ -2839,87 +3243,7 @@
                 <a:ea typeface="Arial" pitchFamily="34" charset="-122"/>
                 <a:cs typeface="Arial" pitchFamily="34" charset="-120"/>
               </a:rPr>
-              <a:t> Take your dinner from homework and write which </a:t>
-            </a:r>
-            <a:pPr algn="l" indent="0" marL="0">
-              <a:lnSpc>
-                <a:spcPts val="1620"/>
-              </a:lnSpc>
-              <a:spcAft>
-                <a:spcPts val="300"/>
-              </a:spcAft>
-              <a:buNone/>
-            </a:pPr>
-            <a:r>
-              <a:rPr lang="en-US" sz="1200" i="1" dirty="0">
-                <a:solidFill>
-                  <a:srgbClr val="1C2833"/>
-                </a:solidFill>
-                <a:latin typeface="Arial" pitchFamily="34" charset="0"/>
-                <a:ea typeface="Arial" pitchFamily="34" charset="-122"/>
-                <a:cs typeface="Arial" pitchFamily="34" charset="-120"/>
-              </a:rPr>
-              <a:t>doṣa</a:t>
-            </a:r>
-            <a:pPr algn="l" indent="0" marL="0">
-              <a:lnSpc>
-                <a:spcPts val="1620"/>
-              </a:lnSpc>
-              <a:spcAft>
-                <a:spcPts val="300"/>
-              </a:spcAft>
-              <a:buNone/>
-            </a:pPr>
-            <a:r>
-              <a:rPr lang="en-US" sz="1200" dirty="0">
-                <a:solidFill>
-                  <a:srgbClr val="1C2833"/>
-                </a:solidFill>
-                <a:latin typeface="Arial" pitchFamily="34" charset="0"/>
-                <a:ea typeface="Arial" pitchFamily="34" charset="-122"/>
-                <a:cs typeface="Arial" pitchFamily="34" charset="-120"/>
-              </a:rPr>
-              <a:t> each item is likely to increase. Then ask: did your meal </a:t>
-            </a:r>
-            <a:pPr algn="l" indent="0" marL="0">
-              <a:lnSpc>
-                <a:spcPts val="1620"/>
-              </a:lnSpc>
-              <a:spcAft>
-                <a:spcPts val="300"/>
-              </a:spcAft>
-              <a:buNone/>
-            </a:pPr>
-            <a:r>
-              <a:rPr lang="en-US" sz="1200" i="1" dirty="0">
-                <a:solidFill>
-                  <a:srgbClr val="1C2833"/>
-                </a:solidFill>
-                <a:latin typeface="Arial" pitchFamily="34" charset="0"/>
-                <a:ea typeface="Arial" pitchFamily="34" charset="-122"/>
-                <a:cs typeface="Arial" pitchFamily="34" charset="-120"/>
-              </a:rPr>
-              <a:t>balance</a:t>
-            </a:r>
-            <a:pPr algn="l" indent="0" marL="0">
-              <a:lnSpc>
-                <a:spcPts val="1620"/>
-              </a:lnSpc>
-              <a:spcAft>
-                <a:spcPts val="300"/>
-              </a:spcAft>
-              <a:buNone/>
-            </a:pPr>
-            <a:r>
-              <a:rPr lang="en-US" sz="1200" dirty="0">
-                <a:solidFill>
-                  <a:srgbClr val="1C2833"/>
-                </a:solidFill>
-                <a:latin typeface="Arial" pitchFamily="34" charset="0"/>
-                <a:ea typeface="Arial" pitchFamily="34" charset="-122"/>
-                <a:cs typeface="Arial" pitchFamily="34" charset="-120"/>
-              </a:rPr>
-              <a:t> you, or push you one way?</a:t>
+              <a:t> (dry, cold) is increased by dry crackers and cold weather. Calmed by warm soup and oil massage.</a:t>
             </a:r>
             <a:endParaRPr lang="en-US" sz="1200" dirty="0"/>
           </a:p>
@@ -2935,15 +3259,15 @@
               <a:buChar char="•"/>
             </a:pPr>
             <a:r>
-              <a:rPr lang="en-US" sz="1200" b="1" dirty="0">
-                <a:solidFill>
-                  <a:srgbClr val="1C2833"/>
-                </a:solidFill>
-                <a:latin typeface="Arial" pitchFamily="34" charset="0"/>
-                <a:ea typeface="Arial" pitchFamily="34" charset="-122"/>
-                <a:cs typeface="Arial" pitchFamily="34" charset="-120"/>
-              </a:rPr>
-              <a:t>One tier down:</a:t>
+              <a:rPr lang="en-US" sz="1200" i="1" dirty="0">
+                <a:solidFill>
+                  <a:srgbClr val="1C2833"/>
+                </a:solidFill>
+                <a:latin typeface="Arial" pitchFamily="34" charset="0"/>
+                <a:ea typeface="Arial" pitchFamily="34" charset="-122"/>
+                <a:cs typeface="Arial" pitchFamily="34" charset="-120"/>
+              </a:rPr>
+              <a:t>Pitta</a:t>
             </a:r>
             <a:pPr algn="l" indent="0" marL="0">
               <a:lnSpc>
@@ -2963,15 +3287,59 @@
                 <a:ea typeface="Arial" pitchFamily="34" charset="-122"/>
                 <a:cs typeface="Arial" pitchFamily="34" charset="-120"/>
               </a:rPr>
-              <a:t> Focus on three cards: ice cream (kapha), chili (pitta), windy day (vāta). Just those three patterns.</a:t>
+              <a:t> (hot, sharp) is increased by spicy food and arguments. Calmed by cool milk and a walk in shade.</a:t>
             </a:r>
             <a:endParaRPr lang="en-US" sz="1200" dirty="0"/>
           </a:p>
-        </p:txBody>
-      </p:sp>
-      <p:sp>
-        <p:nvSpPr>
-          <p:cNvPr id="5" name="Text 3"/>
+          <a:p>
+            <a:pPr algn="l" marL="342900" indent="-342900">
+              <a:lnSpc>
+                <a:spcPts val="1620"/>
+              </a:lnSpc>
+              <a:spcAft>
+                <a:spcPts val="300"/>
+              </a:spcAft>
+              <a:buSzPct val="100000"/>
+              <a:buChar char="•"/>
+            </a:pPr>
+            <a:r>
+              <a:rPr lang="en-US" sz="1200" i="1" dirty="0">
+                <a:solidFill>
+                  <a:srgbClr val="1C2833"/>
+                </a:solidFill>
+                <a:latin typeface="Arial" pitchFamily="34" charset="0"/>
+                <a:ea typeface="Arial" pitchFamily="34" charset="-122"/>
+                <a:cs typeface="Arial" pitchFamily="34" charset="-120"/>
+              </a:rPr>
+              <a:t>Kapha</a:t>
+            </a:r>
+            <a:pPr algn="l" indent="0" marL="0">
+              <a:lnSpc>
+                <a:spcPts val="1620"/>
+              </a:lnSpc>
+              <a:spcAft>
+                <a:spcPts val="300"/>
+              </a:spcAft>
+              <a:buNone/>
+            </a:pPr>
+            <a:r>
+              <a:rPr lang="en-US" sz="1200" dirty="0">
+                <a:solidFill>
+                  <a:srgbClr val="1C2833"/>
+                </a:solidFill>
+                <a:latin typeface="Arial" pitchFamily="34" charset="0"/>
+                <a:ea typeface="Arial" pitchFamily="34" charset="-122"/>
+                <a:cs typeface="Arial" pitchFamily="34" charset="-120"/>
+              </a:rPr>
+              <a:t> (heavy, slow) is increased by heavy oily meals and naps. Calmed by brisk walking and light food.</a:t>
+            </a:r>
+            <a:endParaRPr lang="en-US" sz="1200" dirty="0"/>
+          </a:p>
+        </p:txBody>
+      </p:sp>
+      <p:sp>
+        <p:nvSpPr>
+          <p:cNvPr id="6" name="Text 4"/>
           <p:cNvSpPr/>
           <p:nvPr/>
         </p:nvSpPr>
@@ -3121,7 +3489,7 @@
                 <a:ea typeface="Georgia" pitchFamily="34" charset="-122"/>
                 <a:cs typeface="Georgia" pitchFamily="34" charset="-120"/>
               </a:rPr>
-              <a:t>Teacher notes</a:t>
+              <a:t>Core debrief (10 min) (cont.)</a:t>
             </a:r>
             <a:endParaRPr lang="en-US" sz="1800" dirty="0"/>
           </a:p>
@@ -3136,7 +3504,7 @@
         <p:spPr>
           <a:xfrm>
             <a:off x="406301" y="870942"/>
-            <a:ext cx="8498026" cy="639812"/>
+            <a:ext cx="8498026" cy="213271"/>
           </a:xfrm>
           <a:prstGeom prst="rect">
             <a:avLst/>
@@ -3169,7 +3537,53 @@
                 <a:ea typeface="Arial" pitchFamily="34" charset="-122"/>
                 <a:cs typeface="Arial" pitchFamily="34" charset="-120"/>
               </a:rPr>
-              <a:t>– The sort activity is high-energy. Set a timer. – Some pairs will park easy cards quickly and avoid the hard ones. Walk around and hand them a hard one ("here — try this"). – For cards with genuine ambiguity (e.g. "fresh fruit"), the right answer is "it depends on which fruit, when, and how." Don't force a single placement; let the discussion be the lesson.</a:t>
+              <a:t>This is the </a:t>
+            </a:r>
+            <a:pPr algn="l" indent="0" marL="0">
+              <a:lnSpc>
+                <a:spcPts val="1680"/>
+              </a:lnSpc>
+              <a:spcBef>
+                <a:spcPts val="300"/>
+              </a:spcBef>
+              <a:spcAft>
+                <a:spcPts val="300"/>
+              </a:spcAft>
+              <a:buNone/>
+            </a:pPr>
+            <a:r>
+              <a:rPr lang="en-US" sz="1200" i="1" dirty="0">
+                <a:solidFill>
+                  <a:srgbClr val="1C2833"/>
+                </a:solidFill>
+                <a:latin typeface="Arial" pitchFamily="34" charset="0"/>
+                <a:ea typeface="Arial" pitchFamily="34" charset="-122"/>
+                <a:cs typeface="Arial" pitchFamily="34" charset="-120"/>
+              </a:rPr>
+              <a:t>guṇa</a:t>
+            </a:r>
+            <a:pPr algn="l" indent="0" marL="0">
+              <a:lnSpc>
+                <a:spcPts val="1680"/>
+              </a:lnSpc>
+              <a:spcBef>
+                <a:spcPts val="300"/>
+              </a:spcBef>
+              <a:spcAft>
+                <a:spcPts val="300"/>
+              </a:spcAft>
+              <a:buNone/>
+            </a:pPr>
+            <a:r>
+              <a:rPr lang="en-US" sz="1200" dirty="0">
+                <a:solidFill>
+                  <a:srgbClr val="1C2833"/>
+                </a:solidFill>
+                <a:latin typeface="Arial" pitchFamily="34" charset="0"/>
+                <a:ea typeface="Arial" pitchFamily="34" charset="-122"/>
+                <a:cs typeface="Arial" pitchFamily="34" charset="-120"/>
+              </a:rPr>
+              <a:t> principle the rest of Ayurveda is built on.</a:t>
             </a:r>
             <a:endParaRPr lang="en-US" sz="1200" dirty="0"/>
           </a:p>
@@ -3178,6 +3592,192 @@
       <p:sp>
         <p:nvSpPr>
           <p:cNvPr id="5" name="Text 3"/>
+          <p:cNvSpPr/>
+          <p:nvPr/>
+        </p:nvSpPr>
+        <p:spPr>
+          <a:xfrm>
+            <a:off x="634901" y="1173063"/>
+            <a:ext cx="8102798" cy="487561"/>
+          </a:xfrm>
+          <a:prstGeom prst="rect">
+            <a:avLst/>
+          </a:prstGeom>
+          <a:noFill/>
+          <a:ln/>
+        </p:spPr>
+        <p:txBody>
+          <a:bodyPr wrap="square" lIns="0" tIns="0" rIns="0" bIns="0" rtlCol="0" anchor="t"/>
+          <a:lstStyle/>
+          <a:p>
+            <a:pPr algn="l" marL="342900" indent="-342900">
+              <a:lnSpc>
+                <a:spcPts val="1620"/>
+              </a:lnSpc>
+              <a:spcAft>
+                <a:spcPts val="300"/>
+              </a:spcAft>
+              <a:buSzPct val="100000"/>
+              <a:buChar char="•"/>
+            </a:pPr>
+            <a:r>
+              <a:rPr lang="en-US" sz="1200" b="1" dirty="0">
+                <a:solidFill>
+                  <a:srgbClr val="1C2833"/>
+                </a:solidFill>
+                <a:latin typeface="Arial" pitchFamily="34" charset="0"/>
+                <a:ea typeface="Arial" pitchFamily="34" charset="-122"/>
+                <a:cs typeface="Arial" pitchFamily="34" charset="-120"/>
+              </a:rPr>
+              <a:t>What this is NOT.</a:t>
+            </a:r>
+            <a:pPr algn="l" indent="0" marL="0">
+              <a:lnSpc>
+                <a:spcPts val="1620"/>
+              </a:lnSpc>
+              <a:spcAft>
+                <a:spcPts val="300"/>
+              </a:spcAft>
+              <a:buNone/>
+            </a:pPr>
+            <a:r>
+              <a:rPr lang="en-US" sz="1200" dirty="0">
+                <a:solidFill>
+                  <a:srgbClr val="1C2833"/>
+                </a:solidFill>
+                <a:latin typeface="Arial" pitchFamily="34" charset="0"/>
+                <a:ea typeface="Arial" pitchFamily="34" charset="-122"/>
+                <a:cs typeface="Arial" pitchFamily="34" charset="-120"/>
+              </a:rPr>
+              <a:t> It is </a:t>
+            </a:r>
+            <a:pPr algn="l" indent="0" marL="0">
+              <a:lnSpc>
+                <a:spcPts val="1620"/>
+              </a:lnSpc>
+              <a:spcAft>
+                <a:spcPts val="300"/>
+              </a:spcAft>
+              <a:buNone/>
+            </a:pPr>
+            <a:r>
+              <a:rPr lang="en-US" sz="1200" b="1" dirty="0">
+                <a:solidFill>
+                  <a:srgbClr val="1C2833"/>
+                </a:solidFill>
+                <a:latin typeface="Arial" pitchFamily="34" charset="0"/>
+                <a:ea typeface="Arial" pitchFamily="34" charset="-122"/>
+                <a:cs typeface="Arial" pitchFamily="34" charset="-120"/>
+              </a:rPr>
+              <a:t>not</a:t>
+            </a:r>
+            <a:pPr algn="l" indent="0" marL="0">
+              <a:lnSpc>
+                <a:spcPts val="1620"/>
+              </a:lnSpc>
+              <a:spcAft>
+                <a:spcPts val="300"/>
+              </a:spcAft>
+              <a:buNone/>
+            </a:pPr>
+            <a:r>
+              <a:rPr lang="en-US" sz="1200" dirty="0">
+                <a:solidFill>
+                  <a:srgbClr val="1C2833"/>
+                </a:solidFill>
+                <a:latin typeface="Arial" pitchFamily="34" charset="0"/>
+                <a:ea typeface="Arial" pitchFamily="34" charset="-122"/>
+                <a:cs typeface="Arial" pitchFamily="34" charset="-120"/>
+              </a:rPr>
+              <a:t> a prescription for what </a:t>
+            </a:r>
+            <a:pPr algn="l" indent="0" marL="0">
+              <a:lnSpc>
+                <a:spcPts val="1620"/>
+              </a:lnSpc>
+              <a:spcAft>
+                <a:spcPts val="300"/>
+              </a:spcAft>
+              <a:buNone/>
+            </a:pPr>
+            <a:r>
+              <a:rPr lang="en-US" sz="1200" i="1" dirty="0">
+                <a:solidFill>
+                  <a:srgbClr val="1C2833"/>
+                </a:solidFill>
+                <a:latin typeface="Arial" pitchFamily="34" charset="0"/>
+                <a:ea typeface="Arial" pitchFamily="34" charset="-122"/>
+                <a:cs typeface="Arial" pitchFamily="34" charset="-120"/>
+              </a:rPr>
+              <a:t>you</a:t>
+            </a:r>
+            <a:pPr algn="l" indent="0" marL="0">
+              <a:lnSpc>
+                <a:spcPts val="1620"/>
+              </a:lnSpc>
+              <a:spcAft>
+                <a:spcPts val="300"/>
+              </a:spcAft>
+              <a:buNone/>
+            </a:pPr>
+            <a:r>
+              <a:rPr lang="en-US" sz="1200" dirty="0">
+                <a:solidFill>
+                  <a:srgbClr val="1C2833"/>
+                </a:solidFill>
+                <a:latin typeface="Arial" pitchFamily="34" charset="0"/>
+                <a:ea typeface="Arial" pitchFamily="34" charset="-122"/>
+                <a:cs typeface="Arial" pitchFamily="34" charset="-120"/>
+              </a:rPr>
+              <a:t> should eat. Modern nutrition still applies (protein, vitamins, calories). </a:t>
+            </a:r>
+            <a:pPr algn="l" indent="0" marL="0">
+              <a:lnSpc>
+                <a:spcPts val="1620"/>
+              </a:lnSpc>
+              <a:spcAft>
+                <a:spcPts val="300"/>
+              </a:spcAft>
+              <a:buNone/>
+            </a:pPr>
+            <a:r>
+              <a:rPr lang="en-US" sz="1200" i="1" dirty="0">
+                <a:solidFill>
+                  <a:srgbClr val="1C2833"/>
+                </a:solidFill>
+                <a:latin typeface="Arial" pitchFamily="34" charset="0"/>
+                <a:ea typeface="Arial" pitchFamily="34" charset="-122"/>
+                <a:cs typeface="Arial" pitchFamily="34" charset="-120"/>
+              </a:rPr>
+              <a:t>Doṣa</a:t>
+            </a:r>
+            <a:pPr algn="l" indent="0" marL="0">
+              <a:lnSpc>
+                <a:spcPts val="1620"/>
+              </a:lnSpc>
+              <a:spcAft>
+                <a:spcPts val="300"/>
+              </a:spcAft>
+              <a:buNone/>
+            </a:pPr>
+            <a:r>
+              <a:rPr lang="en-US" sz="1200" dirty="0">
+                <a:solidFill>
+                  <a:srgbClr val="1C2833"/>
+                </a:solidFill>
+                <a:latin typeface="Arial" pitchFamily="34" charset="0"/>
+                <a:ea typeface="Arial" pitchFamily="34" charset="-122"/>
+                <a:cs typeface="Arial" pitchFamily="34" charset="-120"/>
+              </a:rPr>
+              <a:t>-aware adjustment is a small overlay on top.</a:t>
+            </a:r>
+            <a:endParaRPr lang="en-US" sz="1200" dirty="0"/>
+          </a:p>
+        </p:txBody>
+      </p:sp>
+      <p:sp>
+        <p:nvSpPr>
+          <p:cNvPr id="6" name="Text 4"/>
           <p:cNvSpPr/>
           <p:nvPr/>
         </p:nvSpPr>
@@ -3327,7 +3927,7 @@
                 <a:ea typeface="Georgia" pitchFamily="34" charset="-122"/>
                 <a:cs typeface="Georgia" pitchFamily="34" charset="-120"/>
               </a:rPr>
-              <a:t>Citation(s) used in this lesson</a:t>
+              <a:t>Wrap-up (5 min)</a:t>
             </a:r>
             <a:endParaRPr lang="en-US" sz="1800" dirty="0"/>
           </a:p>
@@ -3341,8 +3941,8 @@
         </p:nvSpPr>
         <p:spPr>
           <a:xfrm>
-            <a:off x="406301" y="870942"/>
-            <a:ext cx="8498026" cy="436066"/>
+            <a:off x="634901" y="883593"/>
+            <a:ext cx="8102798" cy="731341"/>
           </a:xfrm>
           <a:prstGeom prst="rect">
             <a:avLst/>
@@ -3354,6 +3954,136 @@
           <a:bodyPr wrap="square" lIns="0" tIns="0" rIns="0" bIns="0" rtlCol="0" anchor="t"/>
           <a:lstStyle/>
           <a:p>
+            <a:pPr algn="l" marL="342900" indent="-342900">
+              <a:lnSpc>
+                <a:spcPts val="1620"/>
+              </a:lnSpc>
+              <a:spcAft>
+                <a:spcPts val="300"/>
+              </a:spcAft>
+              <a:buSzPct val="100000"/>
+              <a:buChar char="•"/>
+            </a:pPr>
+            <a:r>
+              <a:rPr lang="en-US" sz="1200" dirty="0">
+                <a:solidFill>
+                  <a:srgbClr val="1C2833"/>
+                </a:solidFill>
+                <a:latin typeface="Arial" pitchFamily="34" charset="0"/>
+                <a:ea typeface="Arial" pitchFamily="34" charset="-122"/>
+                <a:cs typeface="Arial" pitchFamily="34" charset="-120"/>
+              </a:rPr>
+              <a:t>One-word exit: </a:t>
+            </a:r>
+            <a:pPr algn="l" indent="0" marL="0">
+              <a:lnSpc>
+                <a:spcPts val="1620"/>
+              </a:lnSpc>
+              <a:spcAft>
+                <a:spcPts val="300"/>
+              </a:spcAft>
+              <a:buNone/>
+            </a:pPr>
+            <a:r>
+              <a:rPr lang="en-US" sz="1200" i="1" dirty="0">
+                <a:solidFill>
+                  <a:srgbClr val="1C2833"/>
+                </a:solidFill>
+                <a:latin typeface="Arial" pitchFamily="34" charset="0"/>
+                <a:ea typeface="Arial" pitchFamily="34" charset="-122"/>
+                <a:cs typeface="Arial" pitchFamily="34" charset="-120"/>
+              </a:rPr>
+              <a:t>"Which doṣa do you think you've been most around this week — in the room you're in most, the food you've eaten most, the weather?"</a:t>
+            </a:r>
+            <a:pPr algn="l" indent="0" marL="0">
+              <a:lnSpc>
+                <a:spcPts val="1620"/>
+              </a:lnSpc>
+              <a:spcAft>
+                <a:spcPts val="300"/>
+              </a:spcAft>
+              <a:buNone/>
+            </a:pPr>
+            <a:r>
+              <a:rPr lang="en-US" sz="1200" dirty="0">
+                <a:solidFill>
+                  <a:srgbClr val="1C2833"/>
+                </a:solidFill>
+                <a:latin typeface="Arial" pitchFamily="34" charset="0"/>
+                <a:ea typeface="Arial" pitchFamily="34" charset="-122"/>
+                <a:cs typeface="Arial" pitchFamily="34" charset="-120"/>
+              </a:rPr>
+              <a:t> Sticky note.</a:t>
+            </a:r>
+            <a:endParaRPr lang="en-US" sz="1200" dirty="0"/>
+          </a:p>
+          <a:p>
+            <a:pPr algn="l" marL="342900" indent="-342900">
+              <a:lnSpc>
+                <a:spcPts val="1620"/>
+              </a:lnSpc>
+              <a:spcAft>
+                <a:spcPts val="300"/>
+              </a:spcAft>
+              <a:buSzPct val="100000"/>
+              <a:buChar char="•"/>
+            </a:pPr>
+            <a:r>
+              <a:rPr lang="en-US" sz="1200" dirty="0">
+                <a:solidFill>
+                  <a:srgbClr val="1C2833"/>
+                </a:solidFill>
+                <a:latin typeface="Arial" pitchFamily="34" charset="0"/>
+                <a:ea typeface="Arial" pitchFamily="34" charset="-122"/>
+                <a:cs typeface="Arial" pitchFamily="34" charset="-120"/>
+              </a:rPr>
+              <a:t>Preview Day 5: </a:t>
+            </a:r>
+            <a:pPr algn="l" indent="0" marL="0">
+              <a:lnSpc>
+                <a:spcPts val="1620"/>
+              </a:lnSpc>
+              <a:spcAft>
+                <a:spcPts val="300"/>
+              </a:spcAft>
+              <a:buNone/>
+            </a:pPr>
+            <a:r>
+              <a:rPr lang="en-US" sz="1200" i="1" dirty="0">
+                <a:solidFill>
+                  <a:srgbClr val="1C2833"/>
+                </a:solidFill>
+                <a:latin typeface="Arial" pitchFamily="34" charset="0"/>
+                <a:ea typeface="Arial" pitchFamily="34" charset="-122"/>
+                <a:cs typeface="Arial" pitchFamily="34" charset="-120"/>
+              </a:rPr>
+              <a:t>"Tomorrow — the day-clock. Which doṣa runs when."</a:t>
+            </a:r>
+            <a:endParaRPr lang="en-US" sz="1200" dirty="0"/>
+          </a:p>
+        </p:txBody>
+      </p:sp>
+      <p:sp>
+        <p:nvSpPr>
+          <p:cNvPr id="5" name="Text 3"/>
+          <p:cNvSpPr/>
+          <p:nvPr/>
+        </p:nvSpPr>
+        <p:spPr>
+          <a:xfrm>
+            <a:off x="406301" y="4434929"/>
+            <a:ext cx="8498026" cy="213271"/>
+          </a:xfrm>
+          <a:prstGeom prst="rect">
+            <a:avLst/>
+          </a:prstGeom>
+          <a:noFill/>
+          <a:ln/>
+        </p:spPr>
+        <p:txBody>
+          <a:bodyPr wrap="square" lIns="0" tIns="0" rIns="0" bIns="0" rtlCol="0" anchor="t"/>
+          <a:lstStyle/>
+          <a:p>
             <a:pPr algn="l" indent="0" marL="0">
               <a:lnSpc>
                 <a:spcPts val="1680"/>
@@ -3375,8 +4105,963 @@
                 <a:ea typeface="Arial" pitchFamily="34" charset="-122"/>
                 <a:cs typeface="Arial" pitchFamily="34" charset="-120"/>
               </a:rPr>
-              <a:t>– Concepts only — no direct citation in this lesson. The </a:t>
-            </a:r>
+              <a:t>Middle ·  · IKS Curriculum</a:t>
+            </a:r>
+            <a:endParaRPr lang="en-US" sz="1200" dirty="0"/>
+          </a:p>
+        </p:txBody>
+      </p:sp>
+    </p:spTree>
+  </p:cSld>
+  <p:clrMapOvr>
+    <a:masterClrMapping/>
+  </p:clrMapOvr>
+</p:sld>
+</file>
+
+<file path=ppt/slides/slide14.xml><?xml version="1.0" encoding="utf-8"?>
+<p:sld xmlns:a="http://schemas.openxmlformats.org/drawingml/2006/main" xmlns:r="http://schemas.openxmlformats.org/officeDocument/2006/relationships" xmlns:p="http://schemas.openxmlformats.org/presentationml/2006/main">
+  <p:cSld name="Slide 14">
+    <p:bg>
+      <p:bgPr>
+        <a:solidFill>
+          <a:srgbClr val="FFFFFF"/>
+        </a:solidFill>
+      </p:bgPr>
+    </p:bg>
+    <p:spTree>
+      <p:nvGrpSpPr>
+        <p:cNvPr id="1" name=""/>
+        <p:cNvGrpSpPr/>
+        <p:nvPr/>
+      </p:nvGrpSpPr>
+      <p:grpSpPr>
+        <a:xfrm>
+          <a:off x="0" y="0"/>
+          <a:ext cx="0" cy="0"/>
+          <a:chOff x="0" y="0"/>
+          <a:chExt cx="0" cy="0"/>
+        </a:xfrm>
+      </p:grpSpPr>
+      <p:sp>
+        <p:nvSpPr>
+          <p:cNvPr id="2" name="Text 0"/>
+          <p:cNvSpPr/>
+          <p:nvPr/>
+        </p:nvSpPr>
+        <p:spPr>
+          <a:xfrm>
+            <a:off x="0" y="0"/>
+            <a:ext cx="9144000" cy="101501"/>
+          </a:xfrm>
+          <a:prstGeom prst="rect">
+            <a:avLst/>
+          </a:prstGeom>
+          <a:solidFill>
+            <a:srgbClr val="277884"/>
+          </a:solidFill>
+          <a:ln/>
+        </p:spPr>
+        <p:txBody>
+          <a:bodyPr wrap="square" rtlCol="0" anchor="ctr"/>
+          <a:lstStyle/>
+          <a:p>
+            <a:pPr indent="0" marL="0">
+              <a:buNone/>
+            </a:pPr>
+            <a:endParaRPr lang="en-US" dirty="0"/>
+          </a:p>
+        </p:txBody>
+      </p:sp>
+      <p:sp>
+        <p:nvSpPr>
+          <p:cNvPr id="3" name="Text 1"/>
+          <p:cNvSpPr/>
+          <p:nvPr/>
+        </p:nvSpPr>
+        <p:spPr>
+          <a:xfrm>
+            <a:off x="406301" y="457051"/>
+            <a:ext cx="8498026" cy="274290"/>
+          </a:xfrm>
+          <a:prstGeom prst="rect">
+            <a:avLst/>
+          </a:prstGeom>
+          <a:noFill/>
+          <a:ln/>
+        </p:spPr>
+        <p:txBody>
+          <a:bodyPr wrap="square" lIns="0" tIns="0" rIns="0" bIns="0" rtlCol="0" anchor="t"/>
+          <a:lstStyle/>
+          <a:p>
+            <a:pPr algn="l" indent="0" marL="0">
+              <a:lnSpc>
+                <a:spcPts val="2160"/>
+              </a:lnSpc>
+              <a:spcBef>
+                <a:spcPts val="600"/>
+              </a:spcBef>
+              <a:spcAft>
+                <a:spcPts val="800"/>
+              </a:spcAft>
+              <a:buNone/>
+            </a:pPr>
+            <a:r>
+              <a:rPr lang="en-US" sz="1800" b="1" dirty="0">
+                <a:solidFill>
+                  <a:srgbClr val="FE4447"/>
+                </a:solidFill>
+                <a:latin typeface="Georgia" pitchFamily="34" charset="0"/>
+                <a:ea typeface="Georgia" pitchFamily="34" charset="-122"/>
+                <a:cs typeface="Georgia" pitchFamily="34" charset="-120"/>
+              </a:rPr>
+              <a:t>Student-facing content</a:t>
+            </a:r>
+            <a:endParaRPr lang="en-US" sz="1800" dirty="0"/>
+          </a:p>
+        </p:txBody>
+      </p:sp>
+      <p:sp>
+        <p:nvSpPr>
+          <p:cNvPr id="4" name="Text 2"/>
+          <p:cNvSpPr/>
+          <p:nvPr/>
+        </p:nvSpPr>
+        <p:spPr>
+          <a:xfrm>
+            <a:off x="406301" y="883593"/>
+            <a:ext cx="8331398" cy="2112169"/>
+          </a:xfrm>
+          <a:prstGeom prst="rect">
+            <a:avLst/>
+          </a:prstGeom>
+          <a:solidFill>
+            <a:srgbClr val="F4F8F9"/>
+          </a:solidFill>
+          <a:ln/>
+        </p:spPr>
+        <p:txBody>
+          <a:bodyPr wrap="square" rtlCol="0" anchor="ctr"/>
+          <a:lstStyle/>
+          <a:p>
+            <a:pPr indent="0" marL="0">
+              <a:buNone/>
+            </a:pPr>
+            <a:endParaRPr lang="en-US" dirty="0"/>
+          </a:p>
+        </p:txBody>
+      </p:sp>
+      <p:sp>
+        <p:nvSpPr>
+          <p:cNvPr id="5" name="Shape 3"/>
+          <p:cNvSpPr/>
+          <p:nvPr/>
+        </p:nvSpPr>
+        <p:spPr>
+          <a:xfrm>
+            <a:off x="434876" y="883593"/>
+            <a:ext cx="0" cy="2112169"/>
+          </a:xfrm>
+          <a:prstGeom prst="line">
+            <a:avLst/>
+          </a:prstGeom>
+          <a:noFill/>
+          <a:ln w="57150">
+            <a:solidFill>
+              <a:srgbClr val="FE4447"/>
+            </a:solidFill>
+            <a:prstDash val="solid"/>
+          </a:ln>
+        </p:spPr>
+      </p:sp>
+      <p:sp>
+        <p:nvSpPr>
+          <p:cNvPr id="6" name="Text 4"/>
+          <p:cNvSpPr/>
+          <p:nvPr/>
+        </p:nvSpPr>
+        <p:spPr>
+          <a:xfrm>
+            <a:off x="692051" y="1074093"/>
+            <a:ext cx="7973389" cy="230981"/>
+          </a:xfrm>
+          <a:prstGeom prst="rect">
+            <a:avLst/>
+          </a:prstGeom>
+          <a:noFill/>
+          <a:ln/>
+        </p:spPr>
+        <p:txBody>
+          <a:bodyPr wrap="square" lIns="0" tIns="0" rIns="0" bIns="0" rtlCol="0" anchor="t"/>
+          <a:lstStyle/>
+          <a:p>
+            <a:pPr algn="l" indent="0" marL="0">
+              <a:lnSpc>
+                <a:spcPts val="1820"/>
+              </a:lnSpc>
+              <a:spcBef>
+                <a:spcPts val="300"/>
+              </a:spcBef>
+              <a:spcAft>
+                <a:spcPts val="300"/>
+              </a:spcAft>
+              <a:buNone/>
+            </a:pPr>
+            <a:r>
+              <a:rPr lang="en-US" sz="1300" dirty="0">
+                <a:solidFill>
+                  <a:srgbClr val="1C2833"/>
+                </a:solidFill>
+                <a:latin typeface="Georgia" pitchFamily="34" charset="0"/>
+                <a:ea typeface="Georgia" pitchFamily="34" charset="-122"/>
+                <a:cs typeface="Georgia" pitchFamily="34" charset="-120"/>
+              </a:rPr>
+              <a:t>*</a:t>
+            </a:r>
+            <a:pPr algn="l" indent="0" marL="0">
+              <a:lnSpc>
+                <a:spcPts val="1820"/>
+              </a:lnSpc>
+              <a:spcBef>
+                <a:spcPts val="300"/>
+              </a:spcBef>
+              <a:spcAft>
+                <a:spcPts val="300"/>
+              </a:spcAft>
+              <a:buNone/>
+            </a:pPr>
+            <a:r>
+              <a:rPr lang="en-US" sz="1300" i="1" dirty="0">
+                <a:solidFill>
+                  <a:srgbClr val="1C2833"/>
+                </a:solidFill>
+                <a:latin typeface="Georgia" pitchFamily="34" charset="0"/>
+                <a:ea typeface="Georgia" pitchFamily="34" charset="-122"/>
+                <a:cs typeface="Georgia" pitchFamily="34" charset="-120"/>
+              </a:rPr>
+              <a:t>The</a:t>
+            </a:r>
+            <a:pPr algn="l" indent="0" marL="0">
+              <a:lnSpc>
+                <a:spcPts val="1820"/>
+              </a:lnSpc>
+              <a:spcBef>
+                <a:spcPts val="300"/>
+              </a:spcBef>
+              <a:spcAft>
+                <a:spcPts val="300"/>
+              </a:spcAft>
+              <a:buNone/>
+            </a:pPr>
+            <a:r>
+              <a:rPr lang="en-US" sz="1300" dirty="0">
+                <a:solidFill>
+                  <a:srgbClr val="1C2833"/>
+                </a:solidFill>
+                <a:latin typeface="Georgia" pitchFamily="34" charset="0"/>
+                <a:ea typeface="Georgia" pitchFamily="34" charset="-122"/>
+                <a:cs typeface="Georgia" pitchFamily="34" charset="-120"/>
+              </a:rPr>
+              <a:t>guṇa</a:t>
+            </a:r>
+            <a:pPr algn="l" indent="0" marL="0">
+              <a:lnSpc>
+                <a:spcPts val="1820"/>
+              </a:lnSpc>
+              <a:spcBef>
+                <a:spcPts val="300"/>
+              </a:spcBef>
+              <a:spcAft>
+                <a:spcPts val="300"/>
+              </a:spcAft>
+              <a:buNone/>
+            </a:pPr>
+            <a:r>
+              <a:rPr lang="en-US" sz="1300" i="1" dirty="0">
+                <a:solidFill>
+                  <a:srgbClr val="1C2833"/>
+                </a:solidFill>
+                <a:latin typeface="Georgia" pitchFamily="34" charset="0"/>
+                <a:ea typeface="Georgia" pitchFamily="34" charset="-122"/>
+                <a:cs typeface="Georgia" pitchFamily="34" charset="-120"/>
+              </a:rPr>
+              <a:t> principle: like increases like.</a:t>
+            </a:r>
+            <a:pPr algn="l" indent="0" marL="0">
+              <a:lnSpc>
+                <a:spcPts val="1820"/>
+              </a:lnSpc>
+              <a:spcBef>
+                <a:spcPts val="300"/>
+              </a:spcBef>
+              <a:spcAft>
+                <a:spcPts val="300"/>
+              </a:spcAft>
+              <a:buNone/>
+            </a:pPr>
+            <a:r>
+              <a:rPr lang="en-US" sz="1300" dirty="0">
+                <a:solidFill>
+                  <a:srgbClr val="1C2833"/>
+                </a:solidFill>
+                <a:latin typeface="Georgia" pitchFamily="34" charset="0"/>
+                <a:ea typeface="Georgia" pitchFamily="34" charset="-122"/>
+                <a:cs typeface="Georgia" pitchFamily="34" charset="-120"/>
+              </a:rPr>
+              <a:t>*</a:t>
+            </a:r>
+            <a:endParaRPr lang="en-US" sz="1300" dirty="0"/>
+          </a:p>
+        </p:txBody>
+      </p:sp>
+      <p:sp>
+        <p:nvSpPr>
+          <p:cNvPr id="7" name="Text 5"/>
+          <p:cNvSpPr/>
+          <p:nvPr/>
+        </p:nvSpPr>
+        <p:spPr>
+          <a:xfrm>
+            <a:off x="692051" y="1343174"/>
+            <a:ext cx="7973389" cy="230981"/>
+          </a:xfrm>
+          <a:prstGeom prst="rect">
+            <a:avLst/>
+          </a:prstGeom>
+          <a:noFill/>
+          <a:ln/>
+        </p:spPr>
+        <p:txBody>
+          <a:bodyPr wrap="square" lIns="0" tIns="0" rIns="0" bIns="0" rtlCol="0" anchor="t"/>
+          <a:lstStyle/>
+          <a:p>
+            <a:pPr algn="l" indent="0" marL="0">
+              <a:lnSpc>
+                <a:spcPts val="1820"/>
+              </a:lnSpc>
+              <a:spcBef>
+                <a:spcPts val="300"/>
+              </a:spcBef>
+              <a:spcAft>
+                <a:spcPts val="300"/>
+              </a:spcAft>
+              <a:buNone/>
+            </a:pPr>
+            <a:r>
+              <a:rPr lang="en-US" sz="1300" dirty="0">
+                <a:solidFill>
+                  <a:srgbClr val="1C2833"/>
+                </a:solidFill>
+                <a:latin typeface="Georgia" pitchFamily="34" charset="0"/>
+                <a:ea typeface="Georgia" pitchFamily="34" charset="-122"/>
+                <a:cs typeface="Georgia" pitchFamily="34" charset="-120"/>
+              </a:rPr>
+              <a:t>If you want to </a:t>
+            </a:r>
+            <a:pPr algn="l" indent="0" marL="0">
+              <a:lnSpc>
+                <a:spcPts val="1820"/>
+              </a:lnSpc>
+              <a:spcBef>
+                <a:spcPts val="300"/>
+              </a:spcBef>
+              <a:spcAft>
+                <a:spcPts val="300"/>
+              </a:spcAft>
+              <a:buNone/>
+            </a:pPr>
+            <a:r>
+              <a:rPr lang="en-US" sz="1300" i="1" dirty="0">
+                <a:solidFill>
+                  <a:srgbClr val="1C2833"/>
+                </a:solidFill>
+                <a:latin typeface="Georgia" pitchFamily="34" charset="0"/>
+                <a:ea typeface="Georgia" pitchFamily="34" charset="-122"/>
+                <a:cs typeface="Georgia" pitchFamily="34" charset="-120"/>
+              </a:rPr>
+              <a:t>increase</a:t>
+            </a:r>
+            <a:pPr algn="l" indent="0" marL="0">
+              <a:lnSpc>
+                <a:spcPts val="1820"/>
+              </a:lnSpc>
+              <a:spcBef>
+                <a:spcPts val="300"/>
+              </a:spcBef>
+              <a:spcAft>
+                <a:spcPts val="300"/>
+              </a:spcAft>
+              <a:buNone/>
+            </a:pPr>
+            <a:r>
+              <a:rPr lang="en-US" sz="1300" dirty="0">
+                <a:solidFill>
+                  <a:srgbClr val="1C2833"/>
+                </a:solidFill>
+                <a:latin typeface="Georgia" pitchFamily="34" charset="0"/>
+                <a:ea typeface="Georgia" pitchFamily="34" charset="-122"/>
+                <a:cs typeface="Georgia" pitchFamily="34" charset="-120"/>
+              </a:rPr>
+              <a:t> a </a:t>
+            </a:r>
+            <a:pPr algn="l" indent="0" marL="0">
+              <a:lnSpc>
+                <a:spcPts val="1820"/>
+              </a:lnSpc>
+              <a:spcBef>
+                <a:spcPts val="300"/>
+              </a:spcBef>
+              <a:spcAft>
+                <a:spcPts val="300"/>
+              </a:spcAft>
+              <a:buNone/>
+            </a:pPr>
+            <a:r>
+              <a:rPr lang="en-US" sz="1300" i="1" dirty="0">
+                <a:solidFill>
+                  <a:srgbClr val="1C2833"/>
+                </a:solidFill>
+                <a:latin typeface="Georgia" pitchFamily="34" charset="0"/>
+                <a:ea typeface="Georgia" pitchFamily="34" charset="-122"/>
+                <a:cs typeface="Georgia" pitchFamily="34" charset="-120"/>
+              </a:rPr>
+              <a:t>doṣa</a:t>
+            </a:r>
+            <a:pPr algn="l" indent="0" marL="0">
+              <a:lnSpc>
+                <a:spcPts val="1820"/>
+              </a:lnSpc>
+              <a:spcBef>
+                <a:spcPts val="300"/>
+              </a:spcBef>
+              <a:spcAft>
+                <a:spcPts val="300"/>
+              </a:spcAft>
+              <a:buNone/>
+            </a:pPr>
+            <a:r>
+              <a:rPr lang="en-US" sz="1300" dirty="0">
+                <a:solidFill>
+                  <a:srgbClr val="1C2833"/>
+                </a:solidFill>
+                <a:latin typeface="Georgia" pitchFamily="34" charset="0"/>
+                <a:ea typeface="Georgia" pitchFamily="34" charset="-122"/>
+                <a:cs typeface="Georgia" pitchFamily="34" charset="-120"/>
+              </a:rPr>
+              <a:t>, use its qualities. If you want to </a:t>
+            </a:r>
+            <a:pPr algn="l" indent="0" marL="0">
+              <a:lnSpc>
+                <a:spcPts val="1820"/>
+              </a:lnSpc>
+              <a:spcBef>
+                <a:spcPts val="300"/>
+              </a:spcBef>
+              <a:spcAft>
+                <a:spcPts val="300"/>
+              </a:spcAft>
+              <a:buNone/>
+            </a:pPr>
+            <a:r>
+              <a:rPr lang="en-US" sz="1300" i="1" dirty="0">
+                <a:solidFill>
+                  <a:srgbClr val="1C2833"/>
+                </a:solidFill>
+                <a:latin typeface="Georgia" pitchFamily="34" charset="0"/>
+                <a:ea typeface="Georgia" pitchFamily="34" charset="-122"/>
+                <a:cs typeface="Georgia" pitchFamily="34" charset="-120"/>
+              </a:rPr>
+              <a:t>calm</a:t>
+            </a:r>
+            <a:pPr algn="l" indent="0" marL="0">
+              <a:lnSpc>
+                <a:spcPts val="1820"/>
+              </a:lnSpc>
+              <a:spcBef>
+                <a:spcPts val="300"/>
+              </a:spcBef>
+              <a:spcAft>
+                <a:spcPts val="300"/>
+              </a:spcAft>
+              <a:buNone/>
+            </a:pPr>
+            <a:r>
+              <a:rPr lang="en-US" sz="1300" dirty="0">
+                <a:solidFill>
+                  <a:srgbClr val="1C2833"/>
+                </a:solidFill>
+                <a:latin typeface="Georgia" pitchFamily="34" charset="0"/>
+                <a:ea typeface="Georgia" pitchFamily="34" charset="-122"/>
+                <a:cs typeface="Georgia" pitchFamily="34" charset="-120"/>
+              </a:rPr>
+              <a:t> a </a:t>
+            </a:r>
+            <a:pPr algn="l" indent="0" marL="0">
+              <a:lnSpc>
+                <a:spcPts val="1820"/>
+              </a:lnSpc>
+              <a:spcBef>
+                <a:spcPts val="300"/>
+              </a:spcBef>
+              <a:spcAft>
+                <a:spcPts val="300"/>
+              </a:spcAft>
+              <a:buNone/>
+            </a:pPr>
+            <a:r>
+              <a:rPr lang="en-US" sz="1300" i="1" dirty="0">
+                <a:solidFill>
+                  <a:srgbClr val="1C2833"/>
+                </a:solidFill>
+                <a:latin typeface="Georgia" pitchFamily="34" charset="0"/>
+                <a:ea typeface="Georgia" pitchFamily="34" charset="-122"/>
+                <a:cs typeface="Georgia" pitchFamily="34" charset="-120"/>
+              </a:rPr>
+              <a:t>doṣa</a:t>
+            </a:r>
+            <a:pPr algn="l" indent="0" marL="0">
+              <a:lnSpc>
+                <a:spcPts val="1820"/>
+              </a:lnSpc>
+              <a:spcBef>
+                <a:spcPts val="300"/>
+              </a:spcBef>
+              <a:spcAft>
+                <a:spcPts val="300"/>
+              </a:spcAft>
+              <a:buNone/>
+            </a:pPr>
+            <a:r>
+              <a:rPr lang="en-US" sz="1300" dirty="0">
+                <a:solidFill>
+                  <a:srgbClr val="1C2833"/>
+                </a:solidFill>
+                <a:latin typeface="Georgia" pitchFamily="34" charset="0"/>
+                <a:ea typeface="Georgia" pitchFamily="34" charset="-122"/>
+                <a:cs typeface="Georgia" pitchFamily="34" charset="-120"/>
+              </a:rPr>
+              <a:t>, use the </a:t>
+            </a:r>
+            <a:pPr algn="l" indent="0" marL="0">
+              <a:lnSpc>
+                <a:spcPts val="1820"/>
+              </a:lnSpc>
+              <a:spcBef>
+                <a:spcPts val="300"/>
+              </a:spcBef>
+              <a:spcAft>
+                <a:spcPts val="300"/>
+              </a:spcAft>
+              <a:buNone/>
+            </a:pPr>
+            <a:r>
+              <a:rPr lang="en-US" sz="1300" i="1" dirty="0">
+                <a:solidFill>
+                  <a:srgbClr val="1C2833"/>
+                </a:solidFill>
+                <a:latin typeface="Georgia" pitchFamily="34" charset="0"/>
+                <a:ea typeface="Georgia" pitchFamily="34" charset="-122"/>
+                <a:cs typeface="Georgia" pitchFamily="34" charset="-120"/>
+              </a:rPr>
+              <a:t>opposite</a:t>
+            </a:r>
+            <a:pPr algn="l" indent="0" marL="0">
+              <a:lnSpc>
+                <a:spcPts val="1820"/>
+              </a:lnSpc>
+              <a:spcBef>
+                <a:spcPts val="300"/>
+              </a:spcBef>
+              <a:spcAft>
+                <a:spcPts val="300"/>
+              </a:spcAft>
+              <a:buNone/>
+            </a:pPr>
+            <a:r>
+              <a:rPr lang="en-US" sz="1300" dirty="0">
+                <a:solidFill>
+                  <a:srgbClr val="1C2833"/>
+                </a:solidFill>
+                <a:latin typeface="Georgia" pitchFamily="34" charset="0"/>
+                <a:ea typeface="Georgia" pitchFamily="34" charset="-122"/>
+                <a:cs typeface="Georgia" pitchFamily="34" charset="-120"/>
+              </a:rPr>
+              <a:t> qualities.</a:t>
+            </a:r>
+            <a:endParaRPr lang="en-US" sz="1300" dirty="0"/>
+          </a:p>
+        </p:txBody>
+      </p:sp>
+      <p:sp>
+        <p:nvSpPr>
+          <p:cNvPr id="8" name="Text 6"/>
+          <p:cNvSpPr/>
+          <p:nvPr/>
+        </p:nvSpPr>
+        <p:spPr>
+          <a:xfrm>
+            <a:off x="692051" y="1612255"/>
+            <a:ext cx="7973389" cy="692944"/>
+          </a:xfrm>
+          <a:prstGeom prst="rect">
+            <a:avLst/>
+          </a:prstGeom>
+          <a:noFill/>
+          <a:ln/>
+        </p:spPr>
+        <p:txBody>
+          <a:bodyPr wrap="square" lIns="0" tIns="0" rIns="0" bIns="0" rtlCol="0" anchor="t"/>
+          <a:lstStyle/>
+          <a:p>
+            <a:pPr algn="l" indent="0" marL="0">
+              <a:lnSpc>
+                <a:spcPts val="1820"/>
+              </a:lnSpc>
+              <a:spcBef>
+                <a:spcPts val="300"/>
+              </a:spcBef>
+              <a:spcAft>
+                <a:spcPts val="300"/>
+              </a:spcAft>
+              <a:buNone/>
+            </a:pPr>
+            <a:r>
+              <a:rPr lang="en-US" sz="1300" dirty="0">
+                <a:solidFill>
+                  <a:srgbClr val="1C2833"/>
+                </a:solidFill>
+                <a:latin typeface="Georgia" pitchFamily="34" charset="0"/>
+                <a:ea typeface="Georgia" pitchFamily="34" charset="-122"/>
+                <a:cs typeface="Georgia" pitchFamily="34" charset="-120"/>
+              </a:rPr>
+              <a:t>| Doṣa | Qualities | Calmed by | |------|-----------|-----------| | </a:t>
+            </a:r>
+            <a:pPr algn="l" indent="0" marL="0">
+              <a:lnSpc>
+                <a:spcPts val="1820"/>
+              </a:lnSpc>
+              <a:spcBef>
+                <a:spcPts val="300"/>
+              </a:spcBef>
+              <a:spcAft>
+                <a:spcPts val="300"/>
+              </a:spcAft>
+              <a:buNone/>
+            </a:pPr>
+            <a:r>
+              <a:rPr lang="en-US" sz="1300" i="1" dirty="0">
+                <a:solidFill>
+                  <a:srgbClr val="1C2833"/>
+                </a:solidFill>
+                <a:latin typeface="Georgia" pitchFamily="34" charset="0"/>
+                <a:ea typeface="Georgia" pitchFamily="34" charset="-122"/>
+                <a:cs typeface="Georgia" pitchFamily="34" charset="-120"/>
+              </a:rPr>
+              <a:t>vāta</a:t>
+            </a:r>
+            <a:pPr algn="l" indent="0" marL="0">
+              <a:lnSpc>
+                <a:spcPts val="1820"/>
+              </a:lnSpc>
+              <a:spcBef>
+                <a:spcPts val="300"/>
+              </a:spcBef>
+              <a:spcAft>
+                <a:spcPts val="300"/>
+              </a:spcAft>
+              <a:buNone/>
+            </a:pPr>
+            <a:r>
+              <a:rPr lang="en-US" sz="1300" dirty="0">
+                <a:solidFill>
+                  <a:srgbClr val="1C2833"/>
+                </a:solidFill>
+                <a:latin typeface="Georgia" pitchFamily="34" charset="0"/>
+                <a:ea typeface="Georgia" pitchFamily="34" charset="-122"/>
+                <a:cs typeface="Georgia" pitchFamily="34" charset="-120"/>
+              </a:rPr>
+              <a:t> | dry, cold, mobile | warm, moist, steady — warm soup, oil, rest | | </a:t>
+            </a:r>
+            <a:pPr algn="l" indent="0" marL="0">
+              <a:lnSpc>
+                <a:spcPts val="1820"/>
+              </a:lnSpc>
+              <a:spcBef>
+                <a:spcPts val="300"/>
+              </a:spcBef>
+              <a:spcAft>
+                <a:spcPts val="300"/>
+              </a:spcAft>
+              <a:buNone/>
+            </a:pPr>
+            <a:r>
+              <a:rPr lang="en-US" sz="1300" i="1" dirty="0">
+                <a:solidFill>
+                  <a:srgbClr val="1C2833"/>
+                </a:solidFill>
+                <a:latin typeface="Georgia" pitchFamily="34" charset="0"/>
+                <a:ea typeface="Georgia" pitchFamily="34" charset="-122"/>
+                <a:cs typeface="Georgia" pitchFamily="34" charset="-120"/>
+              </a:rPr>
+              <a:t>pitta</a:t>
+            </a:r>
+            <a:pPr algn="l" indent="0" marL="0">
+              <a:lnSpc>
+                <a:spcPts val="1820"/>
+              </a:lnSpc>
+              <a:spcBef>
+                <a:spcPts val="300"/>
+              </a:spcBef>
+              <a:spcAft>
+                <a:spcPts val="300"/>
+              </a:spcAft>
+              <a:buNone/>
+            </a:pPr>
+            <a:r>
+              <a:rPr lang="en-US" sz="1300" dirty="0">
+                <a:solidFill>
+                  <a:srgbClr val="1C2833"/>
+                </a:solidFill>
+                <a:latin typeface="Georgia" pitchFamily="34" charset="0"/>
+                <a:ea typeface="Georgia" pitchFamily="34" charset="-122"/>
+                <a:cs typeface="Georgia" pitchFamily="34" charset="-120"/>
+              </a:rPr>
+              <a:t> | hot, sharp, oily | cool, mild, sweet — milk, coriander, walk in shade | | </a:t>
+            </a:r>
+            <a:pPr algn="l" indent="0" marL="0">
+              <a:lnSpc>
+                <a:spcPts val="1820"/>
+              </a:lnSpc>
+              <a:spcBef>
+                <a:spcPts val="300"/>
+              </a:spcBef>
+              <a:spcAft>
+                <a:spcPts val="300"/>
+              </a:spcAft>
+              <a:buNone/>
+            </a:pPr>
+            <a:r>
+              <a:rPr lang="en-US" sz="1300" i="1" dirty="0">
+                <a:solidFill>
+                  <a:srgbClr val="1C2833"/>
+                </a:solidFill>
+                <a:latin typeface="Georgia" pitchFamily="34" charset="0"/>
+                <a:ea typeface="Georgia" pitchFamily="34" charset="-122"/>
+                <a:cs typeface="Georgia" pitchFamily="34" charset="-120"/>
+              </a:rPr>
+              <a:t>kapha</a:t>
+            </a:r>
+            <a:pPr algn="l" indent="0" marL="0">
+              <a:lnSpc>
+                <a:spcPts val="1820"/>
+              </a:lnSpc>
+              <a:spcBef>
+                <a:spcPts val="300"/>
+              </a:spcBef>
+              <a:spcAft>
+                <a:spcPts val="300"/>
+              </a:spcAft>
+              <a:buNone/>
+            </a:pPr>
+            <a:r>
+              <a:rPr lang="en-US" sz="1300" dirty="0">
+                <a:solidFill>
+                  <a:srgbClr val="1C2833"/>
+                </a:solidFill>
+                <a:latin typeface="Georgia" pitchFamily="34" charset="0"/>
+                <a:ea typeface="Georgia" pitchFamily="34" charset="-122"/>
+                <a:cs typeface="Georgia" pitchFamily="34" charset="-120"/>
+              </a:rPr>
+              <a:t> | heavy, slow, cool | light, dry, warm — ginger tea, brisk walk |</a:t>
+            </a:r>
+            <a:endParaRPr lang="en-US" sz="1300" dirty="0"/>
+          </a:p>
+        </p:txBody>
+      </p:sp>
+      <p:sp>
+        <p:nvSpPr>
+          <p:cNvPr id="9" name="Text 7"/>
+          <p:cNvSpPr/>
+          <p:nvPr/>
+        </p:nvSpPr>
+        <p:spPr>
+          <a:xfrm>
+            <a:off x="692051" y="2343299"/>
+            <a:ext cx="7973389" cy="461963"/>
+          </a:xfrm>
+          <a:prstGeom prst="rect">
+            <a:avLst/>
+          </a:prstGeom>
+          <a:noFill/>
+          <a:ln/>
+        </p:spPr>
+        <p:txBody>
+          <a:bodyPr wrap="square" lIns="0" tIns="0" rIns="0" bIns="0" rtlCol="0" anchor="t"/>
+          <a:lstStyle/>
+          <a:p>
+            <a:pPr algn="l" indent="0" marL="0">
+              <a:lnSpc>
+                <a:spcPts val="1820"/>
+              </a:lnSpc>
+              <a:spcBef>
+                <a:spcPts val="300"/>
+              </a:spcBef>
+              <a:spcAft>
+                <a:spcPts val="300"/>
+              </a:spcAft>
+              <a:buNone/>
+            </a:pPr>
+            <a:r>
+              <a:rPr lang="en-US" sz="1300" b="1" i="1" dirty="0">
+                <a:solidFill>
+                  <a:srgbClr val="1C2833"/>
+                </a:solidFill>
+                <a:latin typeface="Georgia" pitchFamily="34" charset="0"/>
+                <a:ea typeface="Georgia" pitchFamily="34" charset="-122"/>
+                <a:cs typeface="Georgia" pitchFamily="34" charset="-120"/>
+              </a:rPr>
+              <a:t>Reminder:</a:t>
+            </a:r>
+            <a:pPr algn="l" indent="0" marL="0">
+              <a:lnSpc>
+                <a:spcPts val="1820"/>
+              </a:lnSpc>
+              <a:spcBef>
+                <a:spcPts val="300"/>
+              </a:spcBef>
+              <a:spcAft>
+                <a:spcPts val="300"/>
+              </a:spcAft>
+              <a:buNone/>
+            </a:pPr>
+            <a:r>
+              <a:rPr lang="en-US" sz="1300" dirty="0">
+                <a:solidFill>
+                  <a:srgbClr val="1C2833"/>
+                </a:solidFill>
+                <a:latin typeface="Georgia" pitchFamily="34" charset="0"/>
+                <a:ea typeface="Georgia" pitchFamily="34" charset="-122"/>
+                <a:cs typeface="Georgia" pitchFamily="34" charset="-120"/>
+              </a:rPr>
+              <a:t> these are observations about </a:t>
+            </a:r>
+            <a:pPr algn="l" indent="0" marL="0">
+              <a:lnSpc>
+                <a:spcPts val="1820"/>
+              </a:lnSpc>
+              <a:spcBef>
+                <a:spcPts val="300"/>
+              </a:spcBef>
+              <a:spcAft>
+                <a:spcPts val="300"/>
+              </a:spcAft>
+              <a:buNone/>
+            </a:pPr>
+            <a:r>
+              <a:rPr lang="en-US" sz="1300" i="1" dirty="0">
+                <a:solidFill>
+                  <a:srgbClr val="1C2833"/>
+                </a:solidFill>
+                <a:latin typeface="Georgia" pitchFamily="34" charset="0"/>
+                <a:ea typeface="Georgia" pitchFamily="34" charset="-122"/>
+                <a:cs typeface="Georgia" pitchFamily="34" charset="-120"/>
+              </a:rPr>
+              <a:t>qualities of things</a:t>
+            </a:r>
+            <a:pPr algn="l" indent="0" marL="0">
+              <a:lnSpc>
+                <a:spcPts val="1820"/>
+              </a:lnSpc>
+              <a:spcBef>
+                <a:spcPts val="300"/>
+              </a:spcBef>
+              <a:spcAft>
+                <a:spcPts val="300"/>
+              </a:spcAft>
+              <a:buNone/>
+            </a:pPr>
+            <a:r>
+              <a:rPr lang="en-US" sz="1300" dirty="0">
+                <a:solidFill>
+                  <a:srgbClr val="1C2833"/>
+                </a:solidFill>
+                <a:latin typeface="Georgia" pitchFamily="34" charset="0"/>
+                <a:ea typeface="Georgia" pitchFamily="34" charset="-122"/>
+                <a:cs typeface="Georgia" pitchFamily="34" charset="-120"/>
+              </a:rPr>
+              <a:t>, not prescriptions for </a:t>
+            </a:r>
+            <a:pPr algn="l" indent="0" marL="0">
+              <a:lnSpc>
+                <a:spcPts val="1820"/>
+              </a:lnSpc>
+              <a:spcBef>
+                <a:spcPts val="300"/>
+              </a:spcBef>
+              <a:spcAft>
+                <a:spcPts val="300"/>
+              </a:spcAft>
+              <a:buNone/>
+            </a:pPr>
+            <a:r>
+              <a:rPr lang="en-US" sz="1300" i="1" dirty="0">
+                <a:solidFill>
+                  <a:srgbClr val="1C2833"/>
+                </a:solidFill>
+                <a:latin typeface="Georgia" pitchFamily="34" charset="0"/>
+                <a:ea typeface="Georgia" pitchFamily="34" charset="-122"/>
+                <a:cs typeface="Georgia" pitchFamily="34" charset="-120"/>
+              </a:rPr>
+              <a:t>what you should eat</a:t>
+            </a:r>
+            <a:pPr algn="l" indent="0" marL="0">
+              <a:lnSpc>
+                <a:spcPts val="1820"/>
+              </a:lnSpc>
+              <a:spcBef>
+                <a:spcPts val="300"/>
+              </a:spcBef>
+              <a:spcAft>
+                <a:spcPts val="300"/>
+              </a:spcAft>
+              <a:buNone/>
+            </a:pPr>
+            <a:r>
+              <a:rPr lang="en-US" sz="1300" dirty="0">
+                <a:solidFill>
+                  <a:srgbClr val="1C2833"/>
+                </a:solidFill>
+                <a:latin typeface="Georgia" pitchFamily="34" charset="0"/>
+                <a:ea typeface="Georgia" pitchFamily="34" charset="-122"/>
+                <a:cs typeface="Georgia" pitchFamily="34" charset="-120"/>
+              </a:rPr>
+              <a:t>. Modern nutrition still applies.</a:t>
+            </a:r>
+            <a:endParaRPr lang="en-US" sz="1300" dirty="0"/>
+          </a:p>
+        </p:txBody>
+      </p:sp>
+      <p:sp>
+        <p:nvSpPr>
+          <p:cNvPr id="10" name="Text 8"/>
+          <p:cNvSpPr/>
+          <p:nvPr/>
+        </p:nvSpPr>
+        <p:spPr>
+          <a:xfrm>
+            <a:off x="406301" y="4434929"/>
+            <a:ext cx="8498026" cy="213271"/>
+          </a:xfrm>
+          <a:prstGeom prst="rect">
+            <a:avLst/>
+          </a:prstGeom>
+          <a:noFill/>
+          <a:ln/>
+        </p:spPr>
+        <p:txBody>
+          <a:bodyPr wrap="square" lIns="0" tIns="0" rIns="0" bIns="0" rtlCol="0" anchor="t"/>
+          <a:lstStyle/>
+          <a:p>
             <a:pPr algn="l" indent="0" marL="0">
               <a:lnSpc>
                 <a:spcPts val="1680"/>
@@ -3390,6 +5075,182 @@
               <a:buNone/>
             </a:pPr>
             <a:r>
+              <a:rPr lang="en-US" sz="1200" dirty="0">
+                <a:solidFill>
+                  <a:srgbClr val="1C2833"/>
+                </a:solidFill>
+                <a:latin typeface="Arial" pitchFamily="34" charset="0"/>
+                <a:ea typeface="Arial" pitchFamily="34" charset="-122"/>
+                <a:cs typeface="Arial" pitchFamily="34" charset="-120"/>
+              </a:rPr>
+              <a:t>Middle ·  · IKS Curriculum</a:t>
+            </a:r>
+            <a:endParaRPr lang="en-US" sz="1200" dirty="0"/>
+          </a:p>
+        </p:txBody>
+      </p:sp>
+    </p:spTree>
+  </p:cSld>
+  <p:clrMapOvr>
+    <a:masterClrMapping/>
+  </p:clrMapOvr>
+</p:sld>
+</file>
+
+<file path=ppt/slides/slide15.xml><?xml version="1.0" encoding="utf-8"?>
+<p:sld xmlns:a="http://schemas.openxmlformats.org/drawingml/2006/main" xmlns:r="http://schemas.openxmlformats.org/officeDocument/2006/relationships" xmlns:p="http://schemas.openxmlformats.org/presentationml/2006/main">
+  <p:cSld name="Slide 15">
+    <p:bg>
+      <p:bgPr>
+        <a:solidFill>
+          <a:srgbClr val="FFFFFF"/>
+        </a:solidFill>
+      </p:bgPr>
+    </p:bg>
+    <p:spTree>
+      <p:nvGrpSpPr>
+        <p:cNvPr id="1" name=""/>
+        <p:cNvGrpSpPr/>
+        <p:nvPr/>
+      </p:nvGrpSpPr>
+      <p:grpSpPr>
+        <a:xfrm>
+          <a:off x="0" y="0"/>
+          <a:ext cx="0" cy="0"/>
+          <a:chOff x="0" y="0"/>
+          <a:chExt cx="0" cy="0"/>
+        </a:xfrm>
+      </p:grpSpPr>
+      <p:sp>
+        <p:nvSpPr>
+          <p:cNvPr id="2" name="Text 0"/>
+          <p:cNvSpPr/>
+          <p:nvPr/>
+        </p:nvSpPr>
+        <p:spPr>
+          <a:xfrm>
+            <a:off x="0" y="0"/>
+            <a:ext cx="9144000" cy="101501"/>
+          </a:xfrm>
+          <a:prstGeom prst="rect">
+            <a:avLst/>
+          </a:prstGeom>
+          <a:solidFill>
+            <a:srgbClr val="277884"/>
+          </a:solidFill>
+          <a:ln/>
+        </p:spPr>
+        <p:txBody>
+          <a:bodyPr wrap="square" rtlCol="0" anchor="ctr"/>
+          <a:lstStyle/>
+          <a:p>
+            <a:pPr indent="0" marL="0">
+              <a:buNone/>
+            </a:pPr>
+            <a:endParaRPr lang="en-US" dirty="0"/>
+          </a:p>
+        </p:txBody>
+      </p:sp>
+      <p:sp>
+        <p:nvSpPr>
+          <p:cNvPr id="3" name="Text 1"/>
+          <p:cNvSpPr/>
+          <p:nvPr/>
+        </p:nvSpPr>
+        <p:spPr>
+          <a:xfrm>
+            <a:off x="406301" y="457051"/>
+            <a:ext cx="8498026" cy="274290"/>
+          </a:xfrm>
+          <a:prstGeom prst="rect">
+            <a:avLst/>
+          </a:prstGeom>
+          <a:noFill/>
+          <a:ln/>
+        </p:spPr>
+        <p:txBody>
+          <a:bodyPr wrap="square" lIns="0" tIns="0" rIns="0" bIns="0" rtlCol="0" anchor="t"/>
+          <a:lstStyle/>
+          <a:p>
+            <a:pPr algn="l" indent="0" marL="0">
+              <a:lnSpc>
+                <a:spcPts val="2160"/>
+              </a:lnSpc>
+              <a:spcBef>
+                <a:spcPts val="600"/>
+              </a:spcBef>
+              <a:spcAft>
+                <a:spcPts val="800"/>
+              </a:spcAft>
+              <a:buNone/>
+            </a:pPr>
+            <a:r>
+              <a:rPr lang="en-US" sz="1800" b="1" dirty="0">
+                <a:solidFill>
+                  <a:srgbClr val="FE4447"/>
+                </a:solidFill>
+                <a:latin typeface="Georgia" pitchFamily="34" charset="0"/>
+                <a:ea typeface="Georgia" pitchFamily="34" charset="-122"/>
+                <a:cs typeface="Georgia" pitchFamily="34" charset="-120"/>
+              </a:rPr>
+              <a:t>Homework</a:t>
+            </a:r>
+            <a:endParaRPr lang="en-US" sz="1800" dirty="0"/>
+          </a:p>
+        </p:txBody>
+      </p:sp>
+      <p:sp>
+        <p:nvSpPr>
+          <p:cNvPr id="4" name="Text 2"/>
+          <p:cNvSpPr/>
+          <p:nvPr/>
+        </p:nvSpPr>
+        <p:spPr>
+          <a:xfrm>
+            <a:off x="634901" y="883593"/>
+            <a:ext cx="8102798" cy="487561"/>
+          </a:xfrm>
+          <a:prstGeom prst="rect">
+            <a:avLst/>
+          </a:prstGeom>
+          <a:noFill/>
+          <a:ln/>
+        </p:spPr>
+        <p:txBody>
+          <a:bodyPr wrap="square" lIns="0" tIns="0" rIns="0" bIns="0" rtlCol="0" anchor="t"/>
+          <a:lstStyle/>
+          <a:p>
+            <a:pPr algn="l" marL="342900" indent="-342900">
+              <a:lnSpc>
+                <a:spcPts val="1620"/>
+              </a:lnSpc>
+              <a:spcAft>
+                <a:spcPts val="300"/>
+              </a:spcAft>
+              <a:buSzPct val="100000"/>
+              <a:buChar char="•"/>
+            </a:pPr>
+            <a:r>
+              <a:rPr lang="en-US" sz="1200" dirty="0">
+                <a:solidFill>
+                  <a:srgbClr val="1C2833"/>
+                </a:solidFill>
+                <a:latin typeface="Arial" pitchFamily="34" charset="0"/>
+                <a:ea typeface="Arial" pitchFamily="34" charset="-122"/>
+                <a:cs typeface="Arial" pitchFamily="34" charset="-120"/>
+              </a:rPr>
+              <a:t>Write down what you ate at dinner tonight. One line per item describing the </a:t>
+            </a:r>
+            <a:pPr algn="l" indent="0" marL="0">
+              <a:lnSpc>
+                <a:spcPts val="1620"/>
+              </a:lnSpc>
+              <a:spcAft>
+                <a:spcPts val="300"/>
+              </a:spcAft>
+              <a:buNone/>
+            </a:pPr>
+            <a:r>
               <a:rPr lang="en-US" sz="1200" i="1" dirty="0">
                 <a:solidFill>
                   <a:srgbClr val="1C2833"/>
@@ -3398,15 +5259,896 @@
                 <a:ea typeface="Arial" pitchFamily="34" charset="-122"/>
                 <a:cs typeface="Arial" pitchFamily="34" charset="-120"/>
               </a:rPr>
+              <a:t>qualities</a:t>
+            </a:r>
+            <a:pPr algn="l" indent="0" marL="0">
+              <a:lnSpc>
+                <a:spcPts val="1620"/>
+              </a:lnSpc>
+              <a:spcAft>
+                <a:spcPts val="300"/>
+              </a:spcAft>
+              <a:buNone/>
+            </a:pPr>
+            <a:r>
+              <a:rPr lang="en-US" sz="1200" dirty="0">
+                <a:solidFill>
+                  <a:srgbClr val="1C2833"/>
+                </a:solidFill>
+                <a:latin typeface="Arial" pitchFamily="34" charset="0"/>
+                <a:ea typeface="Arial" pitchFamily="34" charset="-122"/>
+                <a:cs typeface="Arial" pitchFamily="34" charset="-120"/>
+              </a:rPr>
+              <a:t> (heavy/light, hot/cold, dry/oily). Don't worry about which </a:t>
+            </a:r>
+            <a:pPr algn="l" indent="0" marL="0">
+              <a:lnSpc>
+                <a:spcPts val="1620"/>
+              </a:lnSpc>
+              <a:spcAft>
+                <a:spcPts val="300"/>
+              </a:spcAft>
+              <a:buNone/>
+            </a:pPr>
+            <a:r>
+              <a:rPr lang="en-US" sz="1200" i="1" dirty="0">
+                <a:solidFill>
+                  <a:srgbClr val="1C2833"/>
+                </a:solidFill>
+                <a:latin typeface="Arial" pitchFamily="34" charset="0"/>
+                <a:ea typeface="Arial" pitchFamily="34" charset="-122"/>
+                <a:cs typeface="Arial" pitchFamily="34" charset="-120"/>
+              </a:rPr>
+              <a:t>doṣa</a:t>
+            </a:r>
+            <a:pPr algn="l" indent="0" marL="0">
+              <a:lnSpc>
+                <a:spcPts val="1620"/>
+              </a:lnSpc>
+              <a:spcAft>
+                <a:spcPts val="300"/>
+              </a:spcAft>
+              <a:buNone/>
+            </a:pPr>
+            <a:r>
+              <a:rPr lang="en-US" sz="1200" dirty="0">
+                <a:solidFill>
+                  <a:srgbClr val="1C2833"/>
+                </a:solidFill>
+                <a:latin typeface="Arial" pitchFamily="34" charset="0"/>
+                <a:ea typeface="Arial" pitchFamily="34" charset="-122"/>
+                <a:cs typeface="Arial" pitchFamily="34" charset="-120"/>
+              </a:rPr>
+              <a:t> — just the qualities.</a:t>
+            </a:r>
+            <a:endParaRPr lang="en-US" sz="1200" dirty="0"/>
+          </a:p>
+        </p:txBody>
+      </p:sp>
+      <p:sp>
+        <p:nvSpPr>
+          <p:cNvPr id="5" name="Text 3"/>
+          <p:cNvSpPr/>
+          <p:nvPr/>
+        </p:nvSpPr>
+        <p:spPr>
+          <a:xfrm>
+            <a:off x="406301" y="4434929"/>
+            <a:ext cx="8498026" cy="213271"/>
+          </a:xfrm>
+          <a:prstGeom prst="rect">
+            <a:avLst/>
+          </a:prstGeom>
+          <a:noFill/>
+          <a:ln/>
+        </p:spPr>
+        <p:txBody>
+          <a:bodyPr wrap="square" lIns="0" tIns="0" rIns="0" bIns="0" rtlCol="0" anchor="t"/>
+          <a:lstStyle/>
+          <a:p>
+            <a:pPr algn="l" indent="0" marL="0">
+              <a:lnSpc>
+                <a:spcPts val="1680"/>
+              </a:lnSpc>
+              <a:spcBef>
+                <a:spcPts val="300"/>
+              </a:spcBef>
+              <a:spcAft>
+                <a:spcPts val="300"/>
+              </a:spcAft>
+              <a:buNone/>
+            </a:pPr>
+            <a:r>
+              <a:rPr lang="en-US" sz="1200" dirty="0">
+                <a:solidFill>
+                  <a:srgbClr val="1C2833"/>
+                </a:solidFill>
+                <a:latin typeface="Arial" pitchFamily="34" charset="0"/>
+                <a:ea typeface="Arial" pitchFamily="34" charset="-122"/>
+                <a:cs typeface="Arial" pitchFamily="34" charset="-120"/>
+              </a:rPr>
+              <a:t>Middle ·  · IKS Curriculum</a:t>
+            </a:r>
+            <a:endParaRPr lang="en-US" sz="1200" dirty="0"/>
+          </a:p>
+        </p:txBody>
+      </p:sp>
+    </p:spTree>
+  </p:cSld>
+  <p:clrMapOvr>
+    <a:masterClrMapping/>
+  </p:clrMapOvr>
+</p:sld>
+</file>
+
+<file path=ppt/slides/slide16.xml><?xml version="1.0" encoding="utf-8"?>
+<p:sld xmlns:a="http://schemas.openxmlformats.org/drawingml/2006/main" xmlns:r="http://schemas.openxmlformats.org/officeDocument/2006/relationships" xmlns:p="http://schemas.openxmlformats.org/presentationml/2006/main">
+  <p:cSld name="Slide 16">
+    <p:bg>
+      <p:bgPr>
+        <a:solidFill>
+          <a:srgbClr val="FFFFFF"/>
+        </a:solidFill>
+      </p:bgPr>
+    </p:bg>
+    <p:spTree>
+      <p:nvGrpSpPr>
+        <p:cNvPr id="1" name=""/>
+        <p:cNvGrpSpPr/>
+        <p:nvPr/>
+      </p:nvGrpSpPr>
+      <p:grpSpPr>
+        <a:xfrm>
+          <a:off x="0" y="0"/>
+          <a:ext cx="0" cy="0"/>
+          <a:chOff x="0" y="0"/>
+          <a:chExt cx="0" cy="0"/>
+        </a:xfrm>
+      </p:grpSpPr>
+      <p:sp>
+        <p:nvSpPr>
+          <p:cNvPr id="2" name="Text 0"/>
+          <p:cNvSpPr/>
+          <p:nvPr/>
+        </p:nvSpPr>
+        <p:spPr>
+          <a:xfrm>
+            <a:off x="0" y="0"/>
+            <a:ext cx="9144000" cy="101501"/>
+          </a:xfrm>
+          <a:prstGeom prst="rect">
+            <a:avLst/>
+          </a:prstGeom>
+          <a:solidFill>
+            <a:srgbClr val="277884"/>
+          </a:solidFill>
+          <a:ln/>
+        </p:spPr>
+        <p:txBody>
+          <a:bodyPr wrap="square" rtlCol="0" anchor="ctr"/>
+          <a:lstStyle/>
+          <a:p>
+            <a:pPr indent="0" marL="0">
+              <a:buNone/>
+            </a:pPr>
+            <a:endParaRPr lang="en-US" dirty="0"/>
+          </a:p>
+        </p:txBody>
+      </p:sp>
+      <p:sp>
+        <p:nvSpPr>
+          <p:cNvPr id="3" name="Text 1"/>
+          <p:cNvSpPr/>
+          <p:nvPr/>
+        </p:nvSpPr>
+        <p:spPr>
+          <a:xfrm>
+            <a:off x="406301" y="457051"/>
+            <a:ext cx="8498026" cy="274290"/>
+          </a:xfrm>
+          <a:prstGeom prst="rect">
+            <a:avLst/>
+          </a:prstGeom>
+          <a:noFill/>
+          <a:ln/>
+        </p:spPr>
+        <p:txBody>
+          <a:bodyPr wrap="square" lIns="0" tIns="0" rIns="0" bIns="0" rtlCol="0" anchor="t"/>
+          <a:lstStyle/>
+          <a:p>
+            <a:pPr algn="l" indent="0" marL="0">
+              <a:lnSpc>
+                <a:spcPts val="2160"/>
+              </a:lnSpc>
+              <a:spcBef>
+                <a:spcPts val="600"/>
+              </a:spcBef>
+              <a:spcAft>
+                <a:spcPts val="800"/>
+              </a:spcAft>
+              <a:buNone/>
+            </a:pPr>
+            <a:r>
+              <a:rPr lang="en-US" sz="1800" b="1" dirty="0">
+                <a:solidFill>
+                  <a:srgbClr val="FE4447"/>
+                </a:solidFill>
+                <a:latin typeface="Georgia" pitchFamily="34" charset="0"/>
+                <a:ea typeface="Georgia" pitchFamily="34" charset="-122"/>
+                <a:cs typeface="Georgia" pitchFamily="34" charset="-120"/>
+              </a:rPr>
+              <a:t>Differentiation</a:t>
+            </a:r>
+            <a:endParaRPr lang="en-US" sz="1800" dirty="0"/>
+          </a:p>
+        </p:txBody>
+      </p:sp>
+      <p:sp>
+        <p:nvSpPr>
+          <p:cNvPr id="4" name="Text 2"/>
+          <p:cNvSpPr/>
+          <p:nvPr/>
+        </p:nvSpPr>
+        <p:spPr>
+          <a:xfrm>
+            <a:off x="634901" y="883593"/>
+            <a:ext cx="8102798" cy="731341"/>
+          </a:xfrm>
+          <a:prstGeom prst="rect">
+            <a:avLst/>
+          </a:prstGeom>
+          <a:noFill/>
+          <a:ln/>
+        </p:spPr>
+        <p:txBody>
+          <a:bodyPr wrap="square" lIns="0" tIns="0" rIns="0" bIns="0" rtlCol="0" anchor="t"/>
+          <a:lstStyle/>
+          <a:p>
+            <a:pPr algn="l" marL="342900" indent="-342900">
+              <a:lnSpc>
+                <a:spcPts val="1620"/>
+              </a:lnSpc>
+              <a:spcAft>
+                <a:spcPts val="300"/>
+              </a:spcAft>
+              <a:buSzPct val="100000"/>
+              <a:buChar char="•"/>
+            </a:pPr>
+            <a:r>
+              <a:rPr lang="en-US" sz="1200" b="1" dirty="0">
+                <a:solidFill>
+                  <a:srgbClr val="1C2833"/>
+                </a:solidFill>
+                <a:latin typeface="Arial" pitchFamily="34" charset="0"/>
+                <a:ea typeface="Arial" pitchFamily="34" charset="-122"/>
+                <a:cs typeface="Arial" pitchFamily="34" charset="-120"/>
+              </a:rPr>
+              <a:t>One tier up:</a:t>
+            </a:r>
+            <a:pPr algn="l" indent="0" marL="0">
+              <a:lnSpc>
+                <a:spcPts val="1620"/>
+              </a:lnSpc>
+              <a:spcAft>
+                <a:spcPts val="300"/>
+              </a:spcAft>
+              <a:buNone/>
+            </a:pPr>
+            <a:r>
+              <a:rPr lang="en-US" sz="1200" dirty="0">
+                <a:solidFill>
+                  <a:srgbClr val="1C2833"/>
+                </a:solidFill>
+                <a:latin typeface="Arial" pitchFamily="34" charset="0"/>
+                <a:ea typeface="Arial" pitchFamily="34" charset="-122"/>
+                <a:cs typeface="Arial" pitchFamily="34" charset="-120"/>
+              </a:rPr>
+              <a:t> Take your dinner from homework and write which </a:t>
+            </a:r>
+            <a:pPr algn="l" indent="0" marL="0">
+              <a:lnSpc>
+                <a:spcPts val="1620"/>
+              </a:lnSpc>
+              <a:spcAft>
+                <a:spcPts val="300"/>
+              </a:spcAft>
+              <a:buNone/>
+            </a:pPr>
+            <a:r>
+              <a:rPr lang="en-US" sz="1200" i="1" dirty="0">
+                <a:solidFill>
+                  <a:srgbClr val="1C2833"/>
+                </a:solidFill>
+                <a:latin typeface="Arial" pitchFamily="34" charset="0"/>
+                <a:ea typeface="Arial" pitchFamily="34" charset="-122"/>
+                <a:cs typeface="Arial" pitchFamily="34" charset="-120"/>
+              </a:rPr>
+              <a:t>doṣa</a:t>
+            </a:r>
+            <a:pPr algn="l" indent="0" marL="0">
+              <a:lnSpc>
+                <a:spcPts val="1620"/>
+              </a:lnSpc>
+              <a:spcAft>
+                <a:spcPts val="300"/>
+              </a:spcAft>
+              <a:buNone/>
+            </a:pPr>
+            <a:r>
+              <a:rPr lang="en-US" sz="1200" dirty="0">
+                <a:solidFill>
+                  <a:srgbClr val="1C2833"/>
+                </a:solidFill>
+                <a:latin typeface="Arial" pitchFamily="34" charset="0"/>
+                <a:ea typeface="Arial" pitchFamily="34" charset="-122"/>
+                <a:cs typeface="Arial" pitchFamily="34" charset="-120"/>
+              </a:rPr>
+              <a:t> each item is likely to increase. Then ask: did your meal </a:t>
+            </a:r>
+            <a:pPr algn="l" indent="0" marL="0">
+              <a:lnSpc>
+                <a:spcPts val="1620"/>
+              </a:lnSpc>
+              <a:spcAft>
+                <a:spcPts val="300"/>
+              </a:spcAft>
+              <a:buNone/>
+            </a:pPr>
+            <a:r>
+              <a:rPr lang="en-US" sz="1200" i="1" dirty="0">
+                <a:solidFill>
+                  <a:srgbClr val="1C2833"/>
+                </a:solidFill>
+                <a:latin typeface="Arial" pitchFamily="34" charset="0"/>
+                <a:ea typeface="Arial" pitchFamily="34" charset="-122"/>
+                <a:cs typeface="Arial" pitchFamily="34" charset="-120"/>
+              </a:rPr>
+              <a:t>balance</a:t>
+            </a:r>
+            <a:pPr algn="l" indent="0" marL="0">
+              <a:lnSpc>
+                <a:spcPts val="1620"/>
+              </a:lnSpc>
+              <a:spcAft>
+                <a:spcPts val="300"/>
+              </a:spcAft>
+              <a:buNone/>
+            </a:pPr>
+            <a:r>
+              <a:rPr lang="en-US" sz="1200" dirty="0">
+                <a:solidFill>
+                  <a:srgbClr val="1C2833"/>
+                </a:solidFill>
+                <a:latin typeface="Arial" pitchFamily="34" charset="0"/>
+                <a:ea typeface="Arial" pitchFamily="34" charset="-122"/>
+                <a:cs typeface="Arial" pitchFamily="34" charset="-120"/>
+              </a:rPr>
+              <a:t> you, or push you one way?</a:t>
+            </a:r>
+            <a:endParaRPr lang="en-US" sz="1200" dirty="0"/>
+          </a:p>
+          <a:p>
+            <a:pPr algn="l" marL="342900" indent="-342900">
+              <a:lnSpc>
+                <a:spcPts val="1620"/>
+              </a:lnSpc>
+              <a:spcAft>
+                <a:spcPts val="300"/>
+              </a:spcAft>
+              <a:buSzPct val="100000"/>
+              <a:buChar char="•"/>
+            </a:pPr>
+            <a:r>
+              <a:rPr lang="en-US" sz="1200" b="1" dirty="0">
+                <a:solidFill>
+                  <a:srgbClr val="1C2833"/>
+                </a:solidFill>
+                <a:latin typeface="Arial" pitchFamily="34" charset="0"/>
+                <a:ea typeface="Arial" pitchFamily="34" charset="-122"/>
+                <a:cs typeface="Arial" pitchFamily="34" charset="-120"/>
+              </a:rPr>
+              <a:t>One tier down:</a:t>
+            </a:r>
+            <a:pPr algn="l" indent="0" marL="0">
+              <a:lnSpc>
+                <a:spcPts val="1620"/>
+              </a:lnSpc>
+              <a:spcAft>
+                <a:spcPts val="300"/>
+              </a:spcAft>
+              <a:buNone/>
+            </a:pPr>
+            <a:r>
+              <a:rPr lang="en-US" sz="1200" dirty="0">
+                <a:solidFill>
+                  <a:srgbClr val="1C2833"/>
+                </a:solidFill>
+                <a:latin typeface="Arial" pitchFamily="34" charset="0"/>
+                <a:ea typeface="Arial" pitchFamily="34" charset="-122"/>
+                <a:cs typeface="Arial" pitchFamily="34" charset="-120"/>
+              </a:rPr>
+              <a:t> Focus on three cards: ice cream (kapha), chili (pitta), windy day (vāta). Just those three patterns.</a:t>
+            </a:r>
+            <a:endParaRPr lang="en-US" sz="1200" dirty="0"/>
+          </a:p>
+        </p:txBody>
+      </p:sp>
+      <p:sp>
+        <p:nvSpPr>
+          <p:cNvPr id="5" name="Text 3"/>
+          <p:cNvSpPr/>
+          <p:nvPr/>
+        </p:nvSpPr>
+        <p:spPr>
+          <a:xfrm>
+            <a:off x="406301" y="4434929"/>
+            <a:ext cx="8498026" cy="213271"/>
+          </a:xfrm>
+          <a:prstGeom prst="rect">
+            <a:avLst/>
+          </a:prstGeom>
+          <a:noFill/>
+          <a:ln/>
+        </p:spPr>
+        <p:txBody>
+          <a:bodyPr wrap="square" lIns="0" tIns="0" rIns="0" bIns="0" rtlCol="0" anchor="t"/>
+          <a:lstStyle/>
+          <a:p>
+            <a:pPr algn="l" indent="0" marL="0">
+              <a:lnSpc>
+                <a:spcPts val="1680"/>
+              </a:lnSpc>
+              <a:spcBef>
+                <a:spcPts val="300"/>
+              </a:spcBef>
+              <a:spcAft>
+                <a:spcPts val="300"/>
+              </a:spcAft>
+              <a:buNone/>
+            </a:pPr>
+            <a:r>
+              <a:rPr lang="en-US" sz="1200" dirty="0">
+                <a:solidFill>
+                  <a:srgbClr val="1C2833"/>
+                </a:solidFill>
+                <a:latin typeface="Arial" pitchFamily="34" charset="0"/>
+                <a:ea typeface="Arial" pitchFamily="34" charset="-122"/>
+                <a:cs typeface="Arial" pitchFamily="34" charset="-120"/>
+              </a:rPr>
+              <a:t>Middle ·  · IKS Curriculum</a:t>
+            </a:r>
+            <a:endParaRPr lang="en-US" sz="1200" dirty="0"/>
+          </a:p>
+        </p:txBody>
+      </p:sp>
+    </p:spTree>
+  </p:cSld>
+  <p:clrMapOvr>
+    <a:masterClrMapping/>
+  </p:clrMapOvr>
+</p:sld>
+</file>
+
+<file path=ppt/slides/slide17.xml><?xml version="1.0" encoding="utf-8"?>
+<p:sld xmlns:a="http://schemas.openxmlformats.org/drawingml/2006/main" xmlns:r="http://schemas.openxmlformats.org/officeDocument/2006/relationships" xmlns:p="http://schemas.openxmlformats.org/presentationml/2006/main">
+  <p:cSld name="Slide 17">
+    <p:bg>
+      <p:bgPr>
+        <a:solidFill>
+          <a:srgbClr val="FFFFFF"/>
+        </a:solidFill>
+      </p:bgPr>
+    </p:bg>
+    <p:spTree>
+      <p:nvGrpSpPr>
+        <p:cNvPr id="1" name=""/>
+        <p:cNvGrpSpPr/>
+        <p:nvPr/>
+      </p:nvGrpSpPr>
+      <p:grpSpPr>
+        <a:xfrm>
+          <a:off x="0" y="0"/>
+          <a:ext cx="0" cy="0"/>
+          <a:chOff x="0" y="0"/>
+          <a:chExt cx="0" cy="0"/>
+        </a:xfrm>
+      </p:grpSpPr>
+      <p:sp>
+        <p:nvSpPr>
+          <p:cNvPr id="2" name="Text 0"/>
+          <p:cNvSpPr/>
+          <p:nvPr/>
+        </p:nvSpPr>
+        <p:spPr>
+          <a:xfrm>
+            <a:off x="0" y="0"/>
+            <a:ext cx="9144000" cy="101501"/>
+          </a:xfrm>
+          <a:prstGeom prst="rect">
+            <a:avLst/>
+          </a:prstGeom>
+          <a:solidFill>
+            <a:srgbClr val="277884"/>
+          </a:solidFill>
+          <a:ln/>
+        </p:spPr>
+        <p:txBody>
+          <a:bodyPr wrap="square" rtlCol="0" anchor="ctr"/>
+          <a:lstStyle/>
+          <a:p>
+            <a:pPr indent="0" marL="0">
+              <a:buNone/>
+            </a:pPr>
+            <a:endParaRPr lang="en-US" dirty="0"/>
+          </a:p>
+        </p:txBody>
+      </p:sp>
+      <p:sp>
+        <p:nvSpPr>
+          <p:cNvPr id="3" name="Text 1"/>
+          <p:cNvSpPr/>
+          <p:nvPr/>
+        </p:nvSpPr>
+        <p:spPr>
+          <a:xfrm>
+            <a:off x="406301" y="457051"/>
+            <a:ext cx="8498026" cy="274290"/>
+          </a:xfrm>
+          <a:prstGeom prst="rect">
+            <a:avLst/>
+          </a:prstGeom>
+          <a:noFill/>
+          <a:ln/>
+        </p:spPr>
+        <p:txBody>
+          <a:bodyPr wrap="square" lIns="0" tIns="0" rIns="0" bIns="0" rtlCol="0" anchor="t"/>
+          <a:lstStyle/>
+          <a:p>
+            <a:pPr algn="l" indent="0" marL="0">
+              <a:lnSpc>
+                <a:spcPts val="2160"/>
+              </a:lnSpc>
+              <a:spcBef>
+                <a:spcPts val="600"/>
+              </a:spcBef>
+              <a:spcAft>
+                <a:spcPts val="800"/>
+              </a:spcAft>
+              <a:buNone/>
+            </a:pPr>
+            <a:r>
+              <a:rPr lang="en-US" sz="1800" b="1" dirty="0">
+                <a:solidFill>
+                  <a:srgbClr val="FE4447"/>
+                </a:solidFill>
+                <a:latin typeface="Georgia" pitchFamily="34" charset="0"/>
+                <a:ea typeface="Georgia" pitchFamily="34" charset="-122"/>
+                <a:cs typeface="Georgia" pitchFamily="34" charset="-120"/>
+              </a:rPr>
+              <a:t>Teacher notes</a:t>
+            </a:r>
+            <a:endParaRPr lang="en-US" sz="1800" dirty="0"/>
+          </a:p>
+        </p:txBody>
+      </p:sp>
+      <p:sp>
+        <p:nvSpPr>
+          <p:cNvPr id="4" name="Text 2"/>
+          <p:cNvSpPr/>
+          <p:nvPr/>
+        </p:nvSpPr>
+        <p:spPr>
+          <a:xfrm>
+            <a:off x="634901" y="883593"/>
+            <a:ext cx="8102798" cy="1180802"/>
+          </a:xfrm>
+          <a:prstGeom prst="rect">
+            <a:avLst/>
+          </a:prstGeom>
+          <a:noFill/>
+          <a:ln/>
+        </p:spPr>
+        <p:txBody>
+          <a:bodyPr wrap="square" lIns="0" tIns="0" rIns="0" bIns="0" rtlCol="0" anchor="t"/>
+          <a:lstStyle/>
+          <a:p>
+            <a:pPr algn="l" marL="342900" indent="-342900">
+              <a:lnSpc>
+                <a:spcPts val="1620"/>
+              </a:lnSpc>
+              <a:spcAft>
+                <a:spcPts val="300"/>
+              </a:spcAft>
+              <a:buSzPct val="100000"/>
+              <a:buChar char="•"/>
+            </a:pPr>
+            <a:r>
+              <a:rPr lang="en-US" sz="1200" dirty="0">
+                <a:solidFill>
+                  <a:srgbClr val="1C2833"/>
+                </a:solidFill>
+                <a:latin typeface="Arial" pitchFamily="34" charset="0"/>
+                <a:ea typeface="Arial" pitchFamily="34" charset="-122"/>
+                <a:cs typeface="Arial" pitchFamily="34" charset="-120"/>
+              </a:rPr>
+              <a:t>The sort activity is high-energy. Set a timer.</a:t>
+            </a:r>
+            <a:endParaRPr lang="en-US" sz="1200" dirty="0"/>
+          </a:p>
+          <a:p>
+            <a:pPr algn="l" marL="342900" indent="-342900">
+              <a:lnSpc>
+                <a:spcPts val="1620"/>
+              </a:lnSpc>
+              <a:spcAft>
+                <a:spcPts val="300"/>
+              </a:spcAft>
+              <a:buSzPct val="100000"/>
+              <a:buChar char="•"/>
+            </a:pPr>
+            <a:r>
+              <a:rPr lang="en-US" sz="1200" dirty="0">
+                <a:solidFill>
+                  <a:srgbClr val="1C2833"/>
+                </a:solidFill>
+                <a:latin typeface="Arial" pitchFamily="34" charset="0"/>
+                <a:ea typeface="Arial" pitchFamily="34" charset="-122"/>
+                <a:cs typeface="Arial" pitchFamily="34" charset="-120"/>
+              </a:rPr>
+              <a:t>Some pairs will park easy cards quickly and avoid the hard ones. Walk around and hand them a hard one ("here — try this").</a:t>
+            </a:r>
+            <a:endParaRPr lang="en-US" sz="1200" dirty="0"/>
+          </a:p>
+          <a:p>
+            <a:pPr algn="l" marL="342900" indent="-342900">
+              <a:lnSpc>
+                <a:spcPts val="1620"/>
+              </a:lnSpc>
+              <a:spcAft>
+                <a:spcPts val="300"/>
+              </a:spcAft>
+              <a:buSzPct val="100000"/>
+              <a:buChar char="•"/>
+            </a:pPr>
+            <a:r>
+              <a:rPr lang="en-US" sz="1200" dirty="0">
+                <a:solidFill>
+                  <a:srgbClr val="1C2833"/>
+                </a:solidFill>
+                <a:latin typeface="Arial" pitchFamily="34" charset="0"/>
+                <a:ea typeface="Arial" pitchFamily="34" charset="-122"/>
+                <a:cs typeface="Arial" pitchFamily="34" charset="-120"/>
+              </a:rPr>
+              <a:t>For cards with genuine ambiguity (e.g. "fresh fruit"), the right answer is "it depends on which fruit, when, and how." Don't force a single placement; let the discussion be the lesson.</a:t>
+            </a:r>
+            <a:endParaRPr lang="en-US" sz="1200" dirty="0"/>
+          </a:p>
+        </p:txBody>
+      </p:sp>
+      <p:sp>
+        <p:nvSpPr>
+          <p:cNvPr id="5" name="Text 3"/>
+          <p:cNvSpPr/>
+          <p:nvPr/>
+        </p:nvSpPr>
+        <p:spPr>
+          <a:xfrm>
+            <a:off x="406301" y="4434929"/>
+            <a:ext cx="8498026" cy="213271"/>
+          </a:xfrm>
+          <a:prstGeom prst="rect">
+            <a:avLst/>
+          </a:prstGeom>
+          <a:noFill/>
+          <a:ln/>
+        </p:spPr>
+        <p:txBody>
+          <a:bodyPr wrap="square" lIns="0" tIns="0" rIns="0" bIns="0" rtlCol="0" anchor="t"/>
+          <a:lstStyle/>
+          <a:p>
+            <a:pPr algn="l" indent="0" marL="0">
+              <a:lnSpc>
+                <a:spcPts val="1680"/>
+              </a:lnSpc>
+              <a:spcBef>
+                <a:spcPts val="300"/>
+              </a:spcBef>
+              <a:spcAft>
+                <a:spcPts val="300"/>
+              </a:spcAft>
+              <a:buNone/>
+            </a:pPr>
+            <a:r>
+              <a:rPr lang="en-US" sz="1200" dirty="0">
+                <a:solidFill>
+                  <a:srgbClr val="1C2833"/>
+                </a:solidFill>
+                <a:latin typeface="Arial" pitchFamily="34" charset="0"/>
+                <a:ea typeface="Arial" pitchFamily="34" charset="-122"/>
+                <a:cs typeface="Arial" pitchFamily="34" charset="-120"/>
+              </a:rPr>
+              <a:t>Middle ·  · IKS Curriculum</a:t>
+            </a:r>
+            <a:endParaRPr lang="en-US" sz="1200" dirty="0"/>
+          </a:p>
+        </p:txBody>
+      </p:sp>
+    </p:spTree>
+  </p:cSld>
+  <p:clrMapOvr>
+    <a:masterClrMapping/>
+  </p:clrMapOvr>
+</p:sld>
+</file>
+
+<file path=ppt/slides/slide18.xml><?xml version="1.0" encoding="utf-8"?>
+<p:sld xmlns:a="http://schemas.openxmlformats.org/drawingml/2006/main" xmlns:r="http://schemas.openxmlformats.org/officeDocument/2006/relationships" xmlns:p="http://schemas.openxmlformats.org/presentationml/2006/main">
+  <p:cSld name="Slide 18">
+    <p:bg>
+      <p:bgPr>
+        <a:solidFill>
+          <a:srgbClr val="FFFFFF"/>
+        </a:solidFill>
+      </p:bgPr>
+    </p:bg>
+    <p:spTree>
+      <p:nvGrpSpPr>
+        <p:cNvPr id="1" name=""/>
+        <p:cNvGrpSpPr/>
+        <p:nvPr/>
+      </p:nvGrpSpPr>
+      <p:grpSpPr>
+        <a:xfrm>
+          <a:off x="0" y="0"/>
+          <a:ext cx="0" cy="0"/>
+          <a:chOff x="0" y="0"/>
+          <a:chExt cx="0" cy="0"/>
+        </a:xfrm>
+      </p:grpSpPr>
+      <p:sp>
+        <p:nvSpPr>
+          <p:cNvPr id="2" name="Text 0"/>
+          <p:cNvSpPr/>
+          <p:nvPr/>
+        </p:nvSpPr>
+        <p:spPr>
+          <a:xfrm>
+            <a:off x="0" y="0"/>
+            <a:ext cx="9144000" cy="101501"/>
+          </a:xfrm>
+          <a:prstGeom prst="rect">
+            <a:avLst/>
+          </a:prstGeom>
+          <a:solidFill>
+            <a:srgbClr val="277884"/>
+          </a:solidFill>
+          <a:ln/>
+        </p:spPr>
+        <p:txBody>
+          <a:bodyPr wrap="square" rtlCol="0" anchor="ctr"/>
+          <a:lstStyle/>
+          <a:p>
+            <a:pPr indent="0" marL="0">
+              <a:buNone/>
+            </a:pPr>
+            <a:endParaRPr lang="en-US" dirty="0"/>
+          </a:p>
+        </p:txBody>
+      </p:sp>
+      <p:sp>
+        <p:nvSpPr>
+          <p:cNvPr id="3" name="Text 1"/>
+          <p:cNvSpPr/>
+          <p:nvPr/>
+        </p:nvSpPr>
+        <p:spPr>
+          <a:xfrm>
+            <a:off x="406301" y="457051"/>
+            <a:ext cx="8498026" cy="274290"/>
+          </a:xfrm>
+          <a:prstGeom prst="rect">
+            <a:avLst/>
+          </a:prstGeom>
+          <a:noFill/>
+          <a:ln/>
+        </p:spPr>
+        <p:txBody>
+          <a:bodyPr wrap="square" lIns="0" tIns="0" rIns="0" bIns="0" rtlCol="0" anchor="t"/>
+          <a:lstStyle/>
+          <a:p>
+            <a:pPr algn="l" indent="0" marL="0">
+              <a:lnSpc>
+                <a:spcPts val="2160"/>
+              </a:lnSpc>
+              <a:spcBef>
+                <a:spcPts val="600"/>
+              </a:spcBef>
+              <a:spcAft>
+                <a:spcPts val="800"/>
+              </a:spcAft>
+              <a:buNone/>
+            </a:pPr>
+            <a:r>
+              <a:rPr lang="en-US" sz="1800" b="1" dirty="0">
+                <a:solidFill>
+                  <a:srgbClr val="FE4447"/>
+                </a:solidFill>
+                <a:latin typeface="Georgia" pitchFamily="34" charset="0"/>
+                <a:ea typeface="Georgia" pitchFamily="34" charset="-122"/>
+                <a:cs typeface="Georgia" pitchFamily="34" charset="-120"/>
+              </a:rPr>
+              <a:t>Citation(s) used in this lesson</a:t>
+            </a:r>
+            <a:endParaRPr lang="en-US" sz="1800" dirty="0"/>
+          </a:p>
+        </p:txBody>
+      </p:sp>
+      <p:sp>
+        <p:nvSpPr>
+          <p:cNvPr id="4" name="Text 2"/>
+          <p:cNvSpPr/>
+          <p:nvPr/>
+        </p:nvSpPr>
+        <p:spPr>
+          <a:xfrm>
+            <a:off x="634901" y="883593"/>
+            <a:ext cx="8102798" cy="506611"/>
+          </a:xfrm>
+          <a:prstGeom prst="rect">
+            <a:avLst/>
+          </a:prstGeom>
+          <a:noFill/>
+          <a:ln/>
+        </p:spPr>
+        <p:txBody>
+          <a:bodyPr wrap="square" lIns="0" tIns="0" rIns="0" bIns="0" rtlCol="0" anchor="t"/>
+          <a:lstStyle/>
+          <a:p>
+            <a:pPr algn="l" marL="342900" indent="-342900">
+              <a:lnSpc>
+                <a:spcPts val="1620"/>
+              </a:lnSpc>
+              <a:spcAft>
+                <a:spcPts val="300"/>
+              </a:spcAft>
+              <a:buSzPct val="100000"/>
+              <a:buChar char="•"/>
+            </a:pPr>
+            <a:r>
+              <a:rPr lang="en-US" sz="1200" dirty="0">
+                <a:solidFill>
+                  <a:srgbClr val="1C2833"/>
+                </a:solidFill>
+                <a:latin typeface="Arial" pitchFamily="34" charset="0"/>
+                <a:ea typeface="Arial" pitchFamily="34" charset="-122"/>
+                <a:cs typeface="Arial" pitchFamily="34" charset="-120"/>
+              </a:rPr>
+              <a:t>Concepts only — no direct citation in this lesson. The </a:t>
+            </a:r>
+            <a:pPr algn="l" indent="0" marL="0">
+              <a:lnSpc>
+                <a:spcPts val="1620"/>
+              </a:lnSpc>
+              <a:spcAft>
+                <a:spcPts val="300"/>
+              </a:spcAft>
+              <a:buNone/>
+            </a:pPr>
+            <a:r>
+              <a:rPr lang="en-US" sz="1200" i="1" dirty="0">
+                <a:solidFill>
+                  <a:srgbClr val="1C2833"/>
+                </a:solidFill>
+                <a:latin typeface="Arial" pitchFamily="34" charset="0"/>
+                <a:ea typeface="Arial" pitchFamily="34" charset="-122"/>
+                <a:cs typeface="Arial" pitchFamily="34" charset="-120"/>
+              </a:rPr>
               <a:t>guṇa</a:t>
             </a:r>
             <a:pPr algn="l" indent="0" marL="0">
               <a:lnSpc>
-                <a:spcPts val="1680"/>
-              </a:lnSpc>
-              <a:spcBef>
-                <a:spcPts val="300"/>
-              </a:spcBef>
+                <a:spcPts val="1620"/>
+              </a:lnSpc>
               <a:spcAft>
                 <a:spcPts val="300"/>
               </a:spcAft>
@@ -3425,11 +6167,8 @@
             </a:r>
             <a:pPr algn="l" indent="0" marL="0">
               <a:lnSpc>
-                <a:spcPts val="1680"/>
-              </a:lnSpc>
-              <a:spcBef>
-                <a:spcPts val="300"/>
-              </a:spcBef>
+                <a:spcPts val="1620"/>
+              </a:lnSpc>
               <a:spcAft>
                 <a:spcPts val="300"/>
               </a:spcAft>
@@ -3448,11 +6187,8 @@
             </a:r>
             <a:pPr algn="l" indent="0" marL="0">
               <a:lnSpc>
-                <a:spcPts val="1680"/>
-              </a:lnSpc>
-              <a:spcBef>
-                <a:spcPts val="300"/>
-              </a:spcBef>
+                <a:spcPts val="1620"/>
+              </a:lnSpc>
               <a:spcAft>
                 <a:spcPts val="300"/>
               </a:spcAft>
@@ -3625,7 +6361,7 @@
                 <a:ea typeface="Georgia" pitchFamily="34" charset="-122"/>
                 <a:cs typeface="Georgia" pitchFamily="34" charset="-120"/>
               </a:rPr>
-              <a:t>Materials</a:t>
+              <a:t>Learning objective</a:t>
             </a:r>
             <a:endParaRPr lang="en-US" sz="1800" dirty="0"/>
           </a:p>
@@ -3673,7 +6409,7 @@
                 <a:ea typeface="Arial" pitchFamily="34" charset="-122"/>
                 <a:cs typeface="Arial" pitchFamily="34" charset="-120"/>
               </a:rPr>
-              <a:t>– 30 prepared cards (one quality, food, or event per card — see activity file) – 3 paper trays / circles on the floor, each labelled with one </a:t>
+              <a:t>By the end of this lesson, students sort 30 qualities/objects/events into the three </a:t>
             </a:r>
             <a:pPr algn="l" indent="0" marL="0">
               <a:lnSpc>
@@ -3719,7 +6455,7 @@
                 <a:ea typeface="Arial" pitchFamily="34" charset="-122"/>
                 <a:cs typeface="Arial" pitchFamily="34" charset="-120"/>
               </a:rPr>
-              <a:t> – Worksheet for the borderline-cases reflection (last 10 min)</a:t>
+              <a:t> buckets with reasoned justification, defending borderline cases.</a:t>
             </a:r>
             <a:endParaRPr lang="en-US" sz="1200" dirty="0"/>
           </a:p>
@@ -3877,7 +6613,7 @@
                 <a:ea typeface="Georgia" pitchFamily="34" charset="-122"/>
                 <a:cs typeface="Georgia" pitchFamily="34" charset="-120"/>
               </a:rPr>
-              <a:t>Vocabulary refreshed</a:t>
+              <a:t>Materials</a:t>
             </a:r>
             <a:endParaRPr lang="en-US" sz="1800" dirty="0"/>
           </a:p>
@@ -3892,7 +6628,7 @@
         <p:spPr>
           <a:xfrm>
             <a:off x="634901" y="883593"/>
-            <a:ext cx="8102798" cy="281880"/>
+            <a:ext cx="8102798" cy="769441"/>
           </a:xfrm>
           <a:prstGeom prst="rect">
             <a:avLst/>
@@ -3915,6 +6651,50 @@
               <a:buChar char="•"/>
             </a:pPr>
             <a:r>
+              <a:rPr lang="en-US" sz="1200" dirty="0">
+                <a:solidFill>
+                  <a:srgbClr val="1C2833"/>
+                </a:solidFill>
+                <a:latin typeface="Arial" pitchFamily="34" charset="0"/>
+                <a:ea typeface="Arial" pitchFamily="34" charset="-122"/>
+                <a:cs typeface="Arial" pitchFamily="34" charset="-120"/>
+              </a:rPr>
+              <a:t>30 prepared cards (one quality, food, or event per card — see activity file)</a:t>
+            </a:r>
+            <a:endParaRPr lang="en-US" sz="1200" dirty="0"/>
+          </a:p>
+          <a:p>
+            <a:pPr algn="l" marL="342900" indent="-342900">
+              <a:lnSpc>
+                <a:spcPts val="1620"/>
+              </a:lnSpc>
+              <a:spcAft>
+                <a:spcPts val="300"/>
+              </a:spcAft>
+              <a:buSzPct val="100000"/>
+              <a:buChar char="•"/>
+            </a:pPr>
+            <a:r>
+              <a:rPr lang="en-US" sz="1200" dirty="0">
+                <a:solidFill>
+                  <a:srgbClr val="1C2833"/>
+                </a:solidFill>
+                <a:latin typeface="Arial" pitchFamily="34" charset="0"/>
+                <a:ea typeface="Arial" pitchFamily="34" charset="-122"/>
+                <a:cs typeface="Arial" pitchFamily="34" charset="-120"/>
+              </a:rPr>
+              <a:t>3 paper trays / circles on the floor, each labelled with one </a:t>
+            </a:r>
+            <a:pPr algn="l" indent="0" marL="0">
+              <a:lnSpc>
+                <a:spcPts val="1620"/>
+              </a:lnSpc>
+              <a:spcAft>
+                <a:spcPts val="300"/>
+              </a:spcAft>
+              <a:buNone/>
+            </a:pPr>
+            <a:r>
               <a:rPr lang="en-US" sz="1200" i="1" dirty="0">
                 <a:solidFill>
                   <a:srgbClr val="1C2833"/>
@@ -3923,16 +6703,20 @@
                 <a:ea typeface="Arial" pitchFamily="34" charset="-122"/>
                 <a:cs typeface="Arial" pitchFamily="34" charset="-120"/>
               </a:rPr>
-              <a:t>vāta, pitta, kapha, guṇa, prakṛti, vikṛti</a:t>
-            </a:r>
-            <a:pPr algn="l" indent="0" marL="0">
+              <a:t>doṣa</a:t>
+            </a:r>
+            <a:endParaRPr lang="en-US" sz="1200" dirty="0"/>
+          </a:p>
+          <a:p>
+            <a:pPr algn="l" marL="342900" indent="-342900">
               <a:lnSpc>
                 <a:spcPts val="1620"/>
               </a:lnSpc>
               <a:spcAft>
                 <a:spcPts val="300"/>
               </a:spcAft>
-              <a:buNone/>
+              <a:buSzPct val="100000"/>
+              <a:buChar char="•"/>
             </a:pPr>
             <a:r>
               <a:rPr lang="en-US" sz="1200" dirty="0">
@@ -3943,7 +6727,7 @@
                 <a:ea typeface="Arial" pitchFamily="34" charset="-122"/>
                 <a:cs typeface="Arial" pitchFamily="34" charset="-120"/>
               </a:rPr>
-              <a:t> — no new vocabulary today; this is consolidation.</a:t>
+              <a:t>Worksheet for the borderline-cases reflection (last 10 min)</a:t>
             </a:r>
             <a:endParaRPr lang="en-US" sz="1200" dirty="0"/>
           </a:p>
@@ -4101,7 +6885,7 @@
                 <a:ea typeface="Georgia" pitchFamily="34" charset="-122"/>
                 <a:cs typeface="Georgia" pitchFamily="34" charset="-120"/>
               </a:rPr>
-              <a:t>Lesson flow</a:t>
+              <a:t>Vocabulary refreshed</a:t>
             </a:r>
             <a:endParaRPr lang="en-US" sz="1800" dirty="0"/>
           </a:p>
@@ -4110,6 +6894,72 @@
       <p:sp>
         <p:nvSpPr>
           <p:cNvPr id="4" name="Text 2"/>
+          <p:cNvSpPr/>
+          <p:nvPr/>
+        </p:nvSpPr>
+        <p:spPr>
+          <a:xfrm>
+            <a:off x="634901" y="883593"/>
+            <a:ext cx="8102798" cy="281880"/>
+          </a:xfrm>
+          <a:prstGeom prst="rect">
+            <a:avLst/>
+          </a:prstGeom>
+          <a:noFill/>
+          <a:ln/>
+        </p:spPr>
+        <p:txBody>
+          <a:bodyPr wrap="square" lIns="0" tIns="0" rIns="0" bIns="0" rtlCol="0" anchor="t"/>
+          <a:lstStyle/>
+          <a:p>
+            <a:pPr algn="l" marL="342900" indent="-342900">
+              <a:lnSpc>
+                <a:spcPts val="1620"/>
+              </a:lnSpc>
+              <a:spcAft>
+                <a:spcPts val="300"/>
+              </a:spcAft>
+              <a:buSzPct val="100000"/>
+              <a:buChar char="•"/>
+            </a:pPr>
+            <a:r>
+              <a:rPr lang="en-US" sz="1200" i="1" dirty="0">
+                <a:solidFill>
+                  <a:srgbClr val="1C2833"/>
+                </a:solidFill>
+                <a:latin typeface="Arial" pitchFamily="34" charset="0"/>
+                <a:ea typeface="Arial" pitchFamily="34" charset="-122"/>
+                <a:cs typeface="Arial" pitchFamily="34" charset="-120"/>
+              </a:rPr>
+              <a:t>vāta, pitta, kapha, guṇa, prakṛti, vikṛti</a:t>
+            </a:r>
+            <a:pPr algn="l" indent="0" marL="0">
+              <a:lnSpc>
+                <a:spcPts val="1620"/>
+              </a:lnSpc>
+              <a:spcAft>
+                <a:spcPts val="300"/>
+              </a:spcAft>
+              <a:buNone/>
+            </a:pPr>
+            <a:r>
+              <a:rPr lang="en-US" sz="1200" dirty="0">
+                <a:solidFill>
+                  <a:srgbClr val="1C2833"/>
+                </a:solidFill>
+                <a:latin typeface="Arial" pitchFamily="34" charset="0"/>
+                <a:ea typeface="Arial" pitchFamily="34" charset="-122"/>
+                <a:cs typeface="Arial" pitchFamily="34" charset="-120"/>
+              </a:rPr>
+              <a:t> — no new vocabulary today; this is consolidation.</a:t>
+            </a:r>
+            <a:endParaRPr lang="en-US" sz="1200" dirty="0"/>
+          </a:p>
+        </p:txBody>
+      </p:sp>
+      <p:sp>
+        <p:nvSpPr>
+          <p:cNvPr id="5" name="Text 3"/>
           <p:cNvSpPr/>
           <p:nvPr/>
         </p:nvSpPr>
@@ -4259,7 +7109,7 @@
                 <a:ea typeface="Georgia" pitchFamily="34" charset="-122"/>
                 <a:cs typeface="Georgia" pitchFamily="34" charset="-120"/>
               </a:rPr>
-              <a:t>Warm-up (5 min)</a:t>
+              <a:t>Lesson flow</a:t>
             </a:r>
             <a:endParaRPr lang="en-US" sz="1800" dirty="0"/>
           </a:p>
@@ -4268,146 +7118,6 @@
       <p:sp>
         <p:nvSpPr>
           <p:cNvPr id="4" name="Text 2"/>
-          <p:cNvSpPr/>
-          <p:nvPr/>
-        </p:nvSpPr>
-        <p:spPr>
-          <a:xfrm>
-            <a:off x="406301" y="870942"/>
-            <a:ext cx="8498026" cy="213271"/>
-          </a:xfrm>
-          <a:prstGeom prst="rect">
-            <a:avLst/>
-          </a:prstGeom>
-          <a:noFill/>
-          <a:ln/>
-        </p:spPr>
-        <p:txBody>
-          <a:bodyPr wrap="square" lIns="0" tIns="0" rIns="0" bIns="0" rtlCol="0" anchor="t"/>
-          <a:lstStyle/>
-          <a:p>
-            <a:pPr algn="l" indent="0" marL="0">
-              <a:lnSpc>
-                <a:spcPts val="1680"/>
-              </a:lnSpc>
-              <a:spcBef>
-                <a:spcPts val="300"/>
-              </a:spcBef>
-              <a:spcAft>
-                <a:spcPts val="300"/>
-              </a:spcAft>
-              <a:buNone/>
-            </a:pPr>
-            <a:r>
-              <a:rPr lang="en-US" sz="1200" dirty="0">
-                <a:solidFill>
-                  <a:srgbClr val="1C2833"/>
-                </a:solidFill>
-                <a:latin typeface="Arial" pitchFamily="34" charset="0"/>
-                <a:ea typeface="Arial" pitchFamily="34" charset="-122"/>
-                <a:cs typeface="Arial" pitchFamily="34" charset="-120"/>
-              </a:rPr>
-              <a:t>– Whole-class chorus: name the three </a:t>
-            </a:r>
-            <a:pPr algn="l" indent="0" marL="0">
-              <a:lnSpc>
-                <a:spcPts val="1680"/>
-              </a:lnSpc>
-              <a:spcBef>
-                <a:spcPts val="300"/>
-              </a:spcBef>
-              <a:spcAft>
-                <a:spcPts val="300"/>
-              </a:spcAft>
-              <a:buNone/>
-            </a:pPr>
-            <a:r>
-              <a:rPr lang="en-US" sz="1200" i="1" dirty="0">
-                <a:solidFill>
-                  <a:srgbClr val="1C2833"/>
-                </a:solidFill>
-                <a:latin typeface="Arial" pitchFamily="34" charset="0"/>
-                <a:ea typeface="Arial" pitchFamily="34" charset="-122"/>
-                <a:cs typeface="Arial" pitchFamily="34" charset="-120"/>
-              </a:rPr>
-              <a:t>doṣa</a:t>
-            </a:r>
-            <a:pPr algn="l" indent="0" marL="0">
-              <a:lnSpc>
-                <a:spcPts val="1680"/>
-              </a:lnSpc>
-              <a:spcBef>
-                <a:spcPts val="300"/>
-              </a:spcBef>
-              <a:spcAft>
-                <a:spcPts val="300"/>
-              </a:spcAft>
-              <a:buNone/>
-            </a:pPr>
-            <a:r>
-              <a:rPr lang="en-US" sz="1200" dirty="0">
-                <a:solidFill>
-                  <a:srgbClr val="1C2833"/>
-                </a:solidFill>
-                <a:latin typeface="Arial" pitchFamily="34" charset="0"/>
-                <a:ea typeface="Arial" pitchFamily="34" charset="-122"/>
-                <a:cs typeface="Arial" pitchFamily="34" charset="-120"/>
-              </a:rPr>
-              <a:t>s + one quality of each.</a:t>
-            </a:r>
-            <a:endParaRPr lang="en-US" sz="1200" dirty="0"/>
-          </a:p>
-        </p:txBody>
-      </p:sp>
-      <p:sp>
-        <p:nvSpPr>
-          <p:cNvPr id="5" name="Text 3"/>
-          <p:cNvSpPr/>
-          <p:nvPr/>
-        </p:nvSpPr>
-        <p:spPr>
-          <a:xfrm>
-            <a:off x="634901" y="1173063"/>
-            <a:ext cx="8102798" cy="281880"/>
-          </a:xfrm>
-          <a:prstGeom prst="rect">
-            <a:avLst/>
-          </a:prstGeom>
-          <a:noFill/>
-          <a:ln/>
-        </p:spPr>
-        <p:txBody>
-          <a:bodyPr wrap="square" lIns="0" tIns="0" rIns="0" bIns="0" rtlCol="0" anchor="t"/>
-          <a:lstStyle/>
-          <a:p>
-            <a:pPr algn="l" marL="342900" indent="-342900">
-              <a:lnSpc>
-                <a:spcPts val="1620"/>
-              </a:lnSpc>
-              <a:spcAft>
-                <a:spcPts val="300"/>
-              </a:spcAft>
-              <a:buSzPct val="100000"/>
-              <a:buChar char="•"/>
-            </a:pPr>
-            <a:r>
-              <a:rPr lang="en-US" sz="1200" i="1" dirty="0">
-                <a:solidFill>
-                  <a:srgbClr val="1C2833"/>
-                </a:solidFill>
-                <a:latin typeface="Arial" pitchFamily="34" charset="0"/>
-                <a:ea typeface="Arial" pitchFamily="34" charset="-122"/>
-                <a:cs typeface="Arial" pitchFamily="34" charset="-120"/>
-              </a:rPr>
-              <a:t>"Today is the day we get fast at this. Cards, trays, 25 minutes. Go."</a:t>
-            </a:r>
-            <a:endParaRPr lang="en-US" sz="1200" dirty="0"/>
-          </a:p>
-        </p:txBody>
-      </p:sp>
-      <p:sp>
-        <p:nvSpPr>
-          <p:cNvPr id="6" name="Text 4"/>
           <p:cNvSpPr/>
           <p:nvPr/>
         </p:nvSpPr>
@@ -4557,7 +7267,7 @@
                 <a:ea typeface="Georgia" pitchFamily="34" charset="-122"/>
                 <a:cs typeface="Georgia" pitchFamily="34" charset="-120"/>
               </a:rPr>
-              <a:t>Activity (25 min) — Qualities sort</a:t>
+              <a:t>Warm-up (5 min)</a:t>
             </a:r>
             <a:endParaRPr lang="en-US" sz="1800" dirty="0"/>
           </a:p>
@@ -4571,8 +7281,8 @@
         </p:nvSpPr>
         <p:spPr>
           <a:xfrm>
-            <a:off x="406301" y="870942"/>
-            <a:ext cx="8498026" cy="222796"/>
+            <a:off x="634901" y="883593"/>
+            <a:ext cx="8102798" cy="525661"/>
           </a:xfrm>
           <a:prstGeom prst="rect">
             <a:avLst/>
@@ -4584,17 +7294,15 @@
           <a:bodyPr wrap="square" lIns="0" tIns="0" rIns="0" bIns="0" rtlCol="0" anchor="t"/>
           <a:lstStyle/>
           <a:p>
-            <a:pPr algn="l" indent="0" marL="0">
-              <a:lnSpc>
-                <a:spcPts val="1680"/>
-              </a:lnSpc>
-              <a:spcBef>
-                <a:spcPts val="300"/>
-              </a:spcBef>
-              <a:spcAft>
-                <a:spcPts val="300"/>
-              </a:spcAft>
-              <a:buNone/>
+            <a:pPr algn="l" marL="342900" indent="-342900">
+              <a:lnSpc>
+                <a:spcPts val="1620"/>
+              </a:lnSpc>
+              <a:spcAft>
+                <a:spcPts val="300"/>
+              </a:spcAft>
+              <a:buSzPct val="100000"/>
+              <a:buChar char="•"/>
             </a:pPr>
             <a:r>
               <a:rPr lang="en-US" sz="1200" dirty="0">
@@ -4605,15 +7313,32 @@
                 <a:ea typeface="Arial" pitchFamily="34" charset="-122"/>
                 <a:cs typeface="Arial" pitchFamily="34" charset="-120"/>
               </a:rPr>
-              <a:t>Full activity in </a:t>
-            </a:r>
-            <a:pPr algn="l" indent="0" marL="0">
-              <a:lnSpc>
-                <a:spcPts val="1680"/>
-              </a:lnSpc>
-              <a:spcBef>
-                <a:spcPts val="300"/>
-              </a:spcBef>
+              <a:t>Whole-class chorus: name the three </a:t>
+            </a:r>
+            <a:pPr algn="l" indent="0" marL="0">
+              <a:lnSpc>
+                <a:spcPts val="1620"/>
+              </a:lnSpc>
+              <a:spcAft>
+                <a:spcPts val="300"/>
+              </a:spcAft>
+              <a:buNone/>
+            </a:pPr>
+            <a:r>
+              <a:rPr lang="en-US" sz="1200" i="1" dirty="0">
+                <a:solidFill>
+                  <a:srgbClr val="1C2833"/>
+                </a:solidFill>
+                <a:latin typeface="Arial" pitchFamily="34" charset="0"/>
+                <a:ea typeface="Arial" pitchFamily="34" charset="-122"/>
+                <a:cs typeface="Arial" pitchFamily="34" charset="-120"/>
+              </a:rPr>
+              <a:t>doṣa</a:t>
+            </a:r>
+            <a:pPr algn="l" indent="0" marL="0">
+              <a:lnSpc>
+                <a:spcPts val="1620"/>
+              </a:lnSpc>
               <a:spcAft>
                 <a:spcPts val="300"/>
               </a:spcAft>
@@ -4628,224 +7353,39 @@
                 <a:ea typeface="Arial" pitchFamily="34" charset="-122"/>
                 <a:cs typeface="Arial" pitchFamily="34" charset="-120"/>
               </a:rPr>
-              <a:t>activities/activity-01-qualities-sort.md</a:t>
-            </a:r>
-            <a:pPr algn="l" indent="0" marL="0">
-              <a:lnSpc>
-                <a:spcPts val="1680"/>
-              </a:lnSpc>
-              <a:spcBef>
-                <a:spcPts val="300"/>
-              </a:spcBef>
-              <a:spcAft>
-                <a:spcPts val="300"/>
-              </a:spcAft>
-              <a:buNone/>
-            </a:pPr>
-            <a:r>
-              <a:rPr lang="en-US" sz="1200" dirty="0">
-                <a:solidFill>
-                  <a:srgbClr val="1C2833"/>
-                </a:solidFill>
-                <a:latin typeface="Arial" pitchFamily="34" charset="0"/>
-                <a:ea typeface="Arial" pitchFamily="34" charset="-122"/>
-                <a:cs typeface="Arial" pitchFamily="34" charset="-120"/>
-              </a:rPr>
-              <a:t>. Summary:</a:t>
+              <a:t>s + one quality of each.</a:t>
             </a:r>
             <a:endParaRPr lang="en-US" sz="1200" dirty="0"/>
           </a:p>
+          <a:p>
+            <a:pPr algn="l" marL="342900" indent="-342900">
+              <a:lnSpc>
+                <a:spcPts val="1620"/>
+              </a:lnSpc>
+              <a:spcAft>
+                <a:spcPts val="300"/>
+              </a:spcAft>
+              <a:buSzPct val="100000"/>
+              <a:buChar char="•"/>
+            </a:pPr>
+            <a:r>
+              <a:rPr lang="en-US" sz="1200" i="1" dirty="0">
+                <a:solidFill>
+                  <a:srgbClr val="1C2833"/>
+                </a:solidFill>
+                <a:latin typeface="Arial" pitchFamily="34" charset="0"/>
+                <a:ea typeface="Arial" pitchFamily="34" charset="-122"/>
+                <a:cs typeface="Arial" pitchFamily="34" charset="-120"/>
+              </a:rPr>
+              <a:t>"Today is the day we get fast at this. Cards, trays, 25 minutes. Go."</a:t>
+            </a:r>
+            <a:endParaRPr lang="en-US" sz="1200" dirty="0"/>
+          </a:p>
         </p:txBody>
       </p:sp>
       <p:sp>
         <p:nvSpPr>
           <p:cNvPr id="5" name="Text 3"/>
-          <p:cNvSpPr/>
-          <p:nvPr/>
-        </p:nvSpPr>
-        <p:spPr>
-          <a:xfrm>
-            <a:off x="406301" y="1169938"/>
-            <a:ext cx="8498026" cy="1066354"/>
-          </a:xfrm>
-          <a:prstGeom prst="rect">
-            <a:avLst/>
-          </a:prstGeom>
-          <a:noFill/>
-          <a:ln/>
-        </p:spPr>
-        <p:txBody>
-          <a:bodyPr wrap="square" lIns="0" tIns="0" rIns="0" bIns="0" rtlCol="0" anchor="t"/>
-          <a:lstStyle/>
-          <a:p>
-            <a:pPr algn="l" indent="0" marL="0">
-              <a:lnSpc>
-                <a:spcPts val="1680"/>
-              </a:lnSpc>
-              <a:spcBef>
-                <a:spcPts val="300"/>
-              </a:spcBef>
-              <a:spcAft>
-                <a:spcPts val="300"/>
-              </a:spcAft>
-              <a:buNone/>
-            </a:pPr>
-            <a:r>
-              <a:rPr lang="en-US" sz="1200" dirty="0">
-                <a:solidFill>
-                  <a:srgbClr val="1C2833"/>
-                </a:solidFill>
-                <a:latin typeface="Arial" pitchFamily="34" charset="0"/>
-                <a:ea typeface="Arial" pitchFamily="34" charset="-122"/>
-                <a:cs typeface="Arial" pitchFamily="34" charset="-120"/>
-              </a:rPr>
-              <a:t>– 3 trays on the floor labelled </a:t>
-            </a:r>
-            <a:pPr algn="l" indent="0" marL="0">
-              <a:lnSpc>
-                <a:spcPts val="1680"/>
-              </a:lnSpc>
-              <a:spcBef>
-                <a:spcPts val="300"/>
-              </a:spcBef>
-              <a:spcAft>
-                <a:spcPts val="300"/>
-              </a:spcAft>
-              <a:buNone/>
-            </a:pPr>
-            <a:r>
-              <a:rPr lang="en-US" sz="1200" i="1" dirty="0">
-                <a:solidFill>
-                  <a:srgbClr val="1C2833"/>
-                </a:solidFill>
-                <a:latin typeface="Arial" pitchFamily="34" charset="0"/>
-                <a:ea typeface="Arial" pitchFamily="34" charset="-122"/>
-                <a:cs typeface="Arial" pitchFamily="34" charset="-120"/>
-              </a:rPr>
-              <a:t>vāta, pitta, kapha</a:t>
-            </a:r>
-            <a:pPr algn="l" indent="0" marL="0">
-              <a:lnSpc>
-                <a:spcPts val="1680"/>
-              </a:lnSpc>
-              <a:spcBef>
-                <a:spcPts val="300"/>
-              </a:spcBef>
-              <a:spcAft>
-                <a:spcPts val="300"/>
-              </a:spcAft>
-              <a:buNone/>
-            </a:pPr>
-            <a:r>
-              <a:rPr lang="en-US" sz="1200" dirty="0">
-                <a:solidFill>
-                  <a:srgbClr val="1C2833"/>
-                </a:solidFill>
-                <a:latin typeface="Arial" pitchFamily="34" charset="0"/>
-                <a:ea typeface="Arial" pitchFamily="34" charset="-122"/>
-                <a:cs typeface="Arial" pitchFamily="34" charset="-120"/>
-              </a:rPr>
-              <a:t>. – 30 cards in a deck. Each card has a single phrase: "ice cream," "running," "dry wind," "stew," "shouting in anger," "deep sleep," etc. – Class works in pairs. Each pair draws 6 cards in turn. They place each card on a tray and write a 1-line </a:t>
-            </a:r>
-            <a:pPr algn="l" indent="0" marL="0">
-              <a:lnSpc>
-                <a:spcPts val="1680"/>
-              </a:lnSpc>
-              <a:spcBef>
-                <a:spcPts val="300"/>
-              </a:spcBef>
-              <a:spcAft>
-                <a:spcPts val="300"/>
-              </a:spcAft>
-              <a:buNone/>
-            </a:pPr>
-            <a:r>
-              <a:rPr lang="en-US" sz="1200" i="1" dirty="0">
-                <a:solidFill>
-                  <a:srgbClr val="1C2833"/>
-                </a:solidFill>
-                <a:latin typeface="Arial" pitchFamily="34" charset="0"/>
-                <a:ea typeface="Arial" pitchFamily="34" charset="-122"/>
-                <a:cs typeface="Arial" pitchFamily="34" charset="-120"/>
-              </a:rPr>
-              <a:t>why</a:t>
-            </a:r>
-            <a:pPr algn="l" indent="0" marL="0">
-              <a:lnSpc>
-                <a:spcPts val="1680"/>
-              </a:lnSpc>
-              <a:spcBef>
-                <a:spcPts val="300"/>
-              </a:spcBef>
-              <a:spcAft>
-                <a:spcPts val="300"/>
-              </a:spcAft>
-              <a:buNone/>
-            </a:pPr>
-            <a:r>
-              <a:rPr lang="en-US" sz="1200" dirty="0">
-                <a:solidFill>
-                  <a:srgbClr val="1C2833"/>
-                </a:solidFill>
-                <a:latin typeface="Arial" pitchFamily="34" charset="0"/>
-                <a:ea typeface="Arial" pitchFamily="34" charset="-122"/>
-                <a:cs typeface="Arial" pitchFamily="34" charset="-120"/>
-              </a:rPr>
-              <a:t> in their notebook. – After 15 min, swap pairs. Each pair reads aloud one card placement that's </a:t>
-            </a:r>
-            <a:pPr algn="l" indent="0" marL="0">
-              <a:lnSpc>
-                <a:spcPts val="1680"/>
-              </a:lnSpc>
-              <a:spcBef>
-                <a:spcPts val="300"/>
-              </a:spcBef>
-              <a:spcAft>
-                <a:spcPts val="300"/>
-              </a:spcAft>
-              <a:buNone/>
-            </a:pPr>
-            <a:r>
-              <a:rPr lang="en-US" sz="1200" i="1" dirty="0">
-                <a:solidFill>
-                  <a:srgbClr val="1C2833"/>
-                </a:solidFill>
-                <a:latin typeface="Arial" pitchFamily="34" charset="0"/>
-                <a:ea typeface="Arial" pitchFamily="34" charset="-122"/>
-                <a:cs typeface="Arial" pitchFamily="34" charset="-120"/>
-              </a:rPr>
-              <a:t>not obvious</a:t>
-            </a:r>
-            <a:pPr algn="l" indent="0" marL="0">
-              <a:lnSpc>
-                <a:spcPts val="1680"/>
-              </a:lnSpc>
-              <a:spcBef>
-                <a:spcPts val="300"/>
-              </a:spcBef>
-              <a:spcAft>
-                <a:spcPts val="300"/>
-              </a:spcAft>
-              <a:buNone/>
-            </a:pPr>
-            <a:r>
-              <a:rPr lang="en-US" sz="1200" dirty="0">
-                <a:solidFill>
-                  <a:srgbClr val="1C2833"/>
-                </a:solidFill>
-                <a:latin typeface="Arial" pitchFamily="34" charset="0"/>
-                <a:ea typeface="Arial" pitchFamily="34" charset="-122"/>
-                <a:cs typeface="Arial" pitchFamily="34" charset="-120"/>
-              </a:rPr>
-              <a:t> and defends it. Other pairs can disagree. – The teacher keeps a tally on the board of cards where pairs disagreed.</a:t>
-            </a:r>
-            <a:endParaRPr lang="en-US" sz="1200" dirty="0"/>
-          </a:p>
-        </p:txBody>
-      </p:sp>
-      <p:sp>
-        <p:nvSpPr>
-          <p:cNvPr id="6" name="Text 4"/>
           <p:cNvSpPr/>
           <p:nvPr/>
         </p:nvSpPr>
@@ -4995,7 +7535,7 @@
                 <a:ea typeface="Georgia" pitchFamily="34" charset="-122"/>
                 <a:cs typeface="Georgia" pitchFamily="34" charset="-120"/>
               </a:rPr>
-              <a:t>Core debrief (10 min)</a:t>
+              <a:t>Activity (25 min) — Qualities sort</a:t>
             </a:r>
             <a:endParaRPr lang="en-US" sz="1800" dirty="0"/>
           </a:p>
@@ -5009,8 +7549,8 @@
         </p:nvSpPr>
         <p:spPr>
           <a:xfrm>
-            <a:off x="634901" y="883593"/>
-            <a:ext cx="8102798" cy="281880"/>
+            <a:off x="406301" y="870942"/>
+            <a:ext cx="8498026" cy="222796"/>
           </a:xfrm>
           <a:prstGeom prst="rect">
             <a:avLst/>
@@ -5022,31 +7562,13 @@
           <a:bodyPr wrap="square" lIns="0" tIns="0" rIns="0" bIns="0" rtlCol="0" anchor="t"/>
           <a:lstStyle/>
           <a:p>
-            <a:pPr algn="l" marL="342900" indent="-342900">
-              <a:lnSpc>
-                <a:spcPts val="1620"/>
-              </a:lnSpc>
-              <a:spcAft>
-                <a:spcPts val="300"/>
-              </a:spcAft>
-              <a:buSzPct val="100000"/>
-              <a:buChar char="•"/>
-            </a:pPr>
-            <a:r>
-              <a:rPr lang="en-US" sz="1200" b="1" dirty="0">
-                <a:solidFill>
-                  <a:srgbClr val="1C2833"/>
-                </a:solidFill>
-                <a:latin typeface="Arial" pitchFamily="34" charset="0"/>
-                <a:ea typeface="Arial" pitchFamily="34" charset="-122"/>
-                <a:cs typeface="Arial" pitchFamily="34" charset="-120"/>
-              </a:rPr>
-              <a:t>Which cards were tricky?</a:t>
-            </a:r>
-            <a:pPr algn="l" indent="0" marL="0">
-              <a:lnSpc>
-                <a:spcPts val="1620"/>
-              </a:lnSpc>
+            <a:pPr algn="l" indent="0" marL="0">
+              <a:lnSpc>
+                <a:spcPts val="1680"/>
+              </a:lnSpc>
+              <a:spcBef>
+                <a:spcPts val="300"/>
+              </a:spcBef>
               <a:spcAft>
                 <a:spcPts val="300"/>
               </a:spcAft>
@@ -5061,7 +7583,53 @@
                 <a:ea typeface="Arial" pitchFamily="34" charset="-122"/>
                 <a:cs typeface="Arial" pitchFamily="34" charset="-120"/>
               </a:rPr>
-              <a:t> Discuss the top 3 disagreed-on cards.</a:t>
+              <a:t>Full activity in </a:t>
+            </a:r>
+            <a:pPr algn="l" indent="0" marL="0">
+              <a:lnSpc>
+                <a:spcPts val="1680"/>
+              </a:lnSpc>
+              <a:spcBef>
+                <a:spcPts val="300"/>
+              </a:spcBef>
+              <a:spcAft>
+                <a:spcPts val="300"/>
+              </a:spcAft>
+              <a:buNone/>
+            </a:pPr>
+            <a:r>
+              <a:rPr lang="en-US" sz="1200" dirty="0">
+                <a:solidFill>
+                  <a:srgbClr val="1C2833"/>
+                </a:solidFill>
+                <a:latin typeface="Arial" pitchFamily="34" charset="0"/>
+                <a:ea typeface="Arial" pitchFamily="34" charset="-122"/>
+                <a:cs typeface="Arial" pitchFamily="34" charset="-120"/>
+              </a:rPr>
+              <a:t>activities/activity-01-qualities-sort.md</a:t>
+            </a:r>
+            <a:pPr algn="l" indent="0" marL="0">
+              <a:lnSpc>
+                <a:spcPts val="1680"/>
+              </a:lnSpc>
+              <a:spcBef>
+                <a:spcPts val="300"/>
+              </a:spcBef>
+              <a:spcAft>
+                <a:spcPts val="300"/>
+              </a:spcAft>
+              <a:buNone/>
+            </a:pPr>
+            <a:r>
+              <a:rPr lang="en-US" sz="1200" dirty="0">
+                <a:solidFill>
+                  <a:srgbClr val="1C2833"/>
+                </a:solidFill>
+                <a:latin typeface="Arial" pitchFamily="34" charset="0"/>
+                <a:ea typeface="Arial" pitchFamily="34" charset="-122"/>
+                <a:cs typeface="Arial" pitchFamily="34" charset="-120"/>
+              </a:rPr>
+              <a:t>. Summary:</a:t>
             </a:r>
             <a:endParaRPr lang="en-US" sz="1200" dirty="0"/>
           </a:p>
@@ -5070,913 +7638,6 @@
       <p:sp>
         <p:nvSpPr>
           <p:cNvPr id="5" name="Text 3"/>
-          <p:cNvSpPr/>
-          <p:nvPr/>
-        </p:nvSpPr>
-        <p:spPr>
-          <a:xfrm>
-            <a:off x="634901" y="1266974"/>
-            <a:ext cx="8102798" cy="487561"/>
-          </a:xfrm>
-          <a:prstGeom prst="rect">
-            <a:avLst/>
-          </a:prstGeom>
-          <a:noFill/>
-          <a:ln/>
-        </p:spPr>
-        <p:txBody>
-          <a:bodyPr wrap="square" lIns="0" tIns="0" rIns="0" bIns="0" rtlCol="0" anchor="t"/>
-          <a:lstStyle/>
-          <a:p>
-            <a:pPr algn="l" marL="342900" indent="-342900">
-              <a:lnSpc>
-                <a:spcPts val="1620"/>
-              </a:lnSpc>
-              <a:spcAft>
-                <a:spcPts val="300"/>
-              </a:spcAft>
-              <a:buSzPct val="100000"/>
-              <a:buChar char="•"/>
-            </a:pPr>
-            <a:r>
-              <a:rPr lang="en-US" sz="1200" b="1" dirty="0">
-                <a:solidFill>
-                  <a:srgbClr val="1C2833"/>
-                </a:solidFill>
-                <a:latin typeface="Arial" pitchFamily="34" charset="0"/>
-                <a:ea typeface="Arial" pitchFamily="34" charset="-122"/>
-                <a:cs typeface="Arial" pitchFamily="34" charset="-120"/>
-              </a:rPr>
-              <a:t>The framework's limits.</a:t>
-            </a:r>
-            <a:pPr algn="l" indent="0" marL="0">
-              <a:lnSpc>
-                <a:spcPts val="1620"/>
-              </a:lnSpc>
-              <a:spcAft>
-                <a:spcPts val="300"/>
-              </a:spcAft>
-              <a:buNone/>
-            </a:pPr>
-            <a:r>
-              <a:rPr lang="en-US" sz="1200" dirty="0">
-                <a:solidFill>
-                  <a:srgbClr val="1C2833"/>
-                </a:solidFill>
-                <a:latin typeface="Arial" pitchFamily="34" charset="0"/>
-                <a:ea typeface="Arial" pitchFamily="34" charset="-122"/>
-                <a:cs typeface="Arial" pitchFamily="34" charset="-120"/>
-              </a:rPr>
-              <a:t> Some objects are </a:t>
-            </a:r>
-            <a:pPr algn="l" indent="0" marL="0">
-              <a:lnSpc>
-                <a:spcPts val="1620"/>
-              </a:lnSpc>
-              <a:spcAft>
-                <a:spcPts val="300"/>
-              </a:spcAft>
-              <a:buNone/>
-            </a:pPr>
-            <a:r>
-              <a:rPr lang="en-US" sz="1200" i="1" dirty="0">
-                <a:solidFill>
-                  <a:srgbClr val="1C2833"/>
-                </a:solidFill>
-                <a:latin typeface="Arial" pitchFamily="34" charset="0"/>
-                <a:ea typeface="Arial" pitchFamily="34" charset="-122"/>
-                <a:cs typeface="Arial" pitchFamily="34" charset="-120"/>
-              </a:rPr>
-              <a:t>multiple</a:t>
-            </a:r>
-            <a:pPr algn="l" indent="0" marL="0">
-              <a:lnSpc>
-                <a:spcPts val="1620"/>
-              </a:lnSpc>
-              <a:spcAft>
-                <a:spcPts val="300"/>
-              </a:spcAft>
-              <a:buNone/>
-            </a:pPr>
-            <a:r>
-              <a:rPr lang="en-US" sz="1200" dirty="0">
-                <a:solidFill>
-                  <a:srgbClr val="1C2833"/>
-                </a:solidFill>
-                <a:latin typeface="Arial" pitchFamily="34" charset="0"/>
-                <a:ea typeface="Arial" pitchFamily="34" charset="-122"/>
-                <a:cs typeface="Arial" pitchFamily="34" charset="-120"/>
-              </a:rPr>
-              <a:t> — a hot chocolate is </a:t>
-            </a:r>
-            <a:pPr algn="l" indent="0" marL="0">
-              <a:lnSpc>
-                <a:spcPts val="1620"/>
-              </a:lnSpc>
-              <a:spcAft>
-                <a:spcPts val="300"/>
-              </a:spcAft>
-              <a:buNone/>
-            </a:pPr>
-            <a:r>
-              <a:rPr lang="en-US" sz="1200" i="1" dirty="0">
-                <a:solidFill>
-                  <a:srgbClr val="1C2833"/>
-                </a:solidFill>
-                <a:latin typeface="Arial" pitchFamily="34" charset="0"/>
-                <a:ea typeface="Arial" pitchFamily="34" charset="-122"/>
-                <a:cs typeface="Arial" pitchFamily="34" charset="-120"/>
-              </a:rPr>
-              <a:t>pitta</a:t>
-            </a:r>
-            <a:pPr algn="l" indent="0" marL="0">
-              <a:lnSpc>
-                <a:spcPts val="1620"/>
-              </a:lnSpc>
-              <a:spcAft>
-                <a:spcPts val="300"/>
-              </a:spcAft>
-              <a:buNone/>
-            </a:pPr>
-            <a:r>
-              <a:rPr lang="en-US" sz="1200" dirty="0">
-                <a:solidFill>
-                  <a:srgbClr val="1C2833"/>
-                </a:solidFill>
-                <a:latin typeface="Arial" pitchFamily="34" charset="0"/>
-                <a:ea typeface="Arial" pitchFamily="34" charset="-122"/>
-                <a:cs typeface="Arial" pitchFamily="34" charset="-120"/>
-              </a:rPr>
-              <a:t> (hot) AND </a:t>
-            </a:r>
-            <a:pPr algn="l" indent="0" marL="0">
-              <a:lnSpc>
-                <a:spcPts val="1620"/>
-              </a:lnSpc>
-              <a:spcAft>
-                <a:spcPts val="300"/>
-              </a:spcAft>
-              <a:buNone/>
-            </a:pPr>
-            <a:r>
-              <a:rPr lang="en-US" sz="1200" i="1" dirty="0">
-                <a:solidFill>
-                  <a:srgbClr val="1C2833"/>
-                </a:solidFill>
-                <a:latin typeface="Arial" pitchFamily="34" charset="0"/>
-                <a:ea typeface="Arial" pitchFamily="34" charset="-122"/>
-                <a:cs typeface="Arial" pitchFamily="34" charset="-120"/>
-              </a:rPr>
-              <a:t>kapha</a:t>
-            </a:r>
-            <a:pPr algn="l" indent="0" marL="0">
-              <a:lnSpc>
-                <a:spcPts val="1620"/>
-              </a:lnSpc>
-              <a:spcAft>
-                <a:spcPts val="300"/>
-              </a:spcAft>
-              <a:buNone/>
-            </a:pPr>
-            <a:r>
-              <a:rPr lang="en-US" sz="1200" dirty="0">
-                <a:solidFill>
-                  <a:srgbClr val="1C2833"/>
-                </a:solidFill>
-                <a:latin typeface="Arial" pitchFamily="34" charset="0"/>
-                <a:ea typeface="Arial" pitchFamily="34" charset="-122"/>
-                <a:cs typeface="Arial" pitchFamily="34" charset="-120"/>
-              </a:rPr>
-              <a:t> (heavy, milky, sweet). That's fine. The framework doesn't claim a clean one-to-one match. Most real things are mixes.</a:t>
-            </a:r>
-            <a:endParaRPr lang="en-US" sz="1200" dirty="0"/>
-          </a:p>
-        </p:txBody>
-      </p:sp>
-      <p:sp>
-        <p:nvSpPr>
-          <p:cNvPr id="6" name="Text 4"/>
-          <p:cNvSpPr/>
-          <p:nvPr/>
-        </p:nvSpPr>
-        <p:spPr>
-          <a:xfrm>
-            <a:off x="634901" y="1856036"/>
-            <a:ext cx="8102798" cy="281880"/>
-          </a:xfrm>
-          <a:prstGeom prst="rect">
-            <a:avLst/>
-          </a:prstGeom>
-          <a:noFill/>
-          <a:ln/>
-        </p:spPr>
-        <p:txBody>
-          <a:bodyPr wrap="square" lIns="0" tIns="0" rIns="0" bIns="0" rtlCol="0" anchor="t"/>
-          <a:lstStyle/>
-          <a:p>
-            <a:pPr algn="l" marL="342900" indent="-342900">
-              <a:lnSpc>
-                <a:spcPts val="1620"/>
-              </a:lnSpc>
-              <a:spcAft>
-                <a:spcPts val="300"/>
-              </a:spcAft>
-              <a:buSzPct val="100000"/>
-              <a:buChar char="•"/>
-            </a:pPr>
-            <a:pPr algn="l" indent="0" marL="0">
-              <a:lnSpc>
-                <a:spcPts val="1620"/>
-              </a:lnSpc>
-              <a:spcAft>
-                <a:spcPts val="300"/>
-              </a:spcAft>
-              <a:buNone/>
-            </a:pPr>
-            <a:r>
-              <a:rPr lang="en-US" sz="1200" i="1" dirty="0">
-                <a:solidFill>
-                  <a:srgbClr val="1C2833"/>
-                </a:solidFill>
-                <a:latin typeface="Arial" pitchFamily="34" charset="0"/>
-                <a:ea typeface="Arial" pitchFamily="34" charset="-122"/>
-                <a:cs typeface="Arial" pitchFamily="34" charset="-120"/>
-              </a:rPr>
-              <a:t>The</a:t>
-            </a:r>
-            <a:pPr algn="l" indent="0" marL="0">
-              <a:lnSpc>
-                <a:spcPts val="1620"/>
-              </a:lnSpc>
-              <a:spcAft>
-                <a:spcPts val="300"/>
-              </a:spcAft>
-              <a:buNone/>
-            </a:pPr>
-            <a:r>
-              <a:rPr lang="en-US" sz="1200" dirty="0">
-                <a:solidFill>
-                  <a:srgbClr val="1C2833"/>
-                </a:solidFill>
-                <a:latin typeface="Arial" pitchFamily="34" charset="0"/>
-                <a:ea typeface="Arial" pitchFamily="34" charset="-122"/>
-                <a:cs typeface="Arial" pitchFamily="34" charset="-120"/>
-              </a:rPr>
-              <a:t>guṇa</a:t>
-            </a:r>
-            <a:pPr algn="l" indent="0" marL="0">
-              <a:lnSpc>
-                <a:spcPts val="1620"/>
-              </a:lnSpc>
-              <a:spcAft>
-                <a:spcPts val="300"/>
-              </a:spcAft>
-              <a:buNone/>
-            </a:pPr>
-            <a:r>
-              <a:rPr lang="en-US" sz="1200" i="1" dirty="0">
-                <a:solidFill>
-                  <a:srgbClr val="1C2833"/>
-                </a:solidFill>
-                <a:latin typeface="Arial" pitchFamily="34" charset="0"/>
-                <a:ea typeface="Arial" pitchFamily="34" charset="-122"/>
-                <a:cs typeface="Arial" pitchFamily="34" charset="-120"/>
-              </a:rPr>
-              <a:t> principle</a:t>
-            </a:r>
-            <a:pPr algn="l" indent="0" marL="0">
-              <a:lnSpc>
-                <a:spcPts val="1620"/>
-              </a:lnSpc>
-              <a:spcAft>
-                <a:spcPts val="300"/>
-              </a:spcAft>
-              <a:buNone/>
-            </a:pPr>
-            <a:r>
-              <a:rPr lang="en-US" sz="1200" dirty="0">
-                <a:solidFill>
-                  <a:srgbClr val="1C2833"/>
-                </a:solidFill>
-                <a:latin typeface="Arial" pitchFamily="34" charset="0"/>
-                <a:ea typeface="Arial" pitchFamily="34" charset="-122"/>
-                <a:cs typeface="Arial" pitchFamily="34" charset="-120"/>
-              </a:rPr>
-              <a:t>* (state the rule):</a:t>
-            </a:r>
-            <a:endParaRPr lang="en-US" sz="1200" dirty="0"/>
-          </a:p>
-        </p:txBody>
-      </p:sp>
-      <p:sp>
-        <p:nvSpPr>
-          <p:cNvPr id="7" name="Text 5"/>
-          <p:cNvSpPr/>
-          <p:nvPr/>
-        </p:nvSpPr>
-        <p:spPr>
-          <a:xfrm>
-            <a:off x="406301" y="2226766"/>
-            <a:ext cx="8498026" cy="213271"/>
-          </a:xfrm>
-          <a:prstGeom prst="rect">
-            <a:avLst/>
-          </a:prstGeom>
-          <a:noFill/>
-          <a:ln/>
-        </p:spPr>
-        <p:txBody>
-          <a:bodyPr wrap="square" lIns="0" tIns="0" rIns="0" bIns="0" rtlCol="0" anchor="t"/>
-          <a:lstStyle/>
-          <a:p>
-            <a:pPr algn="l" indent="0" marL="0">
-              <a:lnSpc>
-                <a:spcPts val="1680"/>
-              </a:lnSpc>
-              <a:spcBef>
-                <a:spcPts val="300"/>
-              </a:spcBef>
-              <a:spcAft>
-                <a:spcPts val="300"/>
-              </a:spcAft>
-              <a:buNone/>
-            </a:pPr>
-            <a:r>
-              <a:rPr lang="en-US" sz="1200" dirty="0">
-                <a:solidFill>
-                  <a:srgbClr val="1C2833"/>
-                </a:solidFill>
-                <a:latin typeface="Arial" pitchFamily="34" charset="0"/>
-                <a:ea typeface="Arial" pitchFamily="34" charset="-122"/>
-                <a:cs typeface="Arial" pitchFamily="34" charset="-120"/>
-              </a:rPr>
-              <a:t>&gt; Like increases like. To </a:t>
-            </a:r>
-            <a:pPr algn="l" indent="0" marL="0">
-              <a:lnSpc>
-                <a:spcPts val="1680"/>
-              </a:lnSpc>
-              <a:spcBef>
-                <a:spcPts val="300"/>
-              </a:spcBef>
-              <a:spcAft>
-                <a:spcPts val="300"/>
-              </a:spcAft>
-              <a:buNone/>
-            </a:pPr>
-            <a:r>
-              <a:rPr lang="en-US" sz="1200" i="1" dirty="0">
-                <a:solidFill>
-                  <a:srgbClr val="1C2833"/>
-                </a:solidFill>
-                <a:latin typeface="Arial" pitchFamily="34" charset="0"/>
-                <a:ea typeface="Arial" pitchFamily="34" charset="-122"/>
-                <a:cs typeface="Arial" pitchFamily="34" charset="-120"/>
-              </a:rPr>
-              <a:t>balance</a:t>
-            </a:r>
-            <a:pPr algn="l" indent="0" marL="0">
-              <a:lnSpc>
-                <a:spcPts val="1680"/>
-              </a:lnSpc>
-              <a:spcBef>
-                <a:spcPts val="300"/>
-              </a:spcBef>
-              <a:spcAft>
-                <a:spcPts val="300"/>
-              </a:spcAft>
-              <a:buNone/>
-            </a:pPr>
-            <a:r>
-              <a:rPr lang="en-US" sz="1200" dirty="0">
-                <a:solidFill>
-                  <a:srgbClr val="1C2833"/>
-                </a:solidFill>
-                <a:latin typeface="Arial" pitchFamily="34" charset="0"/>
-                <a:ea typeface="Arial" pitchFamily="34" charset="-122"/>
-                <a:cs typeface="Arial" pitchFamily="34" charset="-120"/>
-              </a:rPr>
-              <a:t> a doṣa, use the </a:t>
-            </a:r>
-            <a:pPr algn="l" indent="0" marL="0">
-              <a:lnSpc>
-                <a:spcPts val="1680"/>
-              </a:lnSpc>
-              <a:spcBef>
-                <a:spcPts val="300"/>
-              </a:spcBef>
-              <a:spcAft>
-                <a:spcPts val="300"/>
-              </a:spcAft>
-              <a:buNone/>
-            </a:pPr>
-            <a:r>
-              <a:rPr lang="en-US" sz="1200" i="1" dirty="0">
-                <a:solidFill>
-                  <a:srgbClr val="1C2833"/>
-                </a:solidFill>
-                <a:latin typeface="Arial" pitchFamily="34" charset="0"/>
-                <a:ea typeface="Arial" pitchFamily="34" charset="-122"/>
-                <a:cs typeface="Arial" pitchFamily="34" charset="-120"/>
-              </a:rPr>
-              <a:t>opposite</a:t>
-            </a:r>
-            <a:pPr algn="l" indent="0" marL="0">
-              <a:lnSpc>
-                <a:spcPts val="1680"/>
-              </a:lnSpc>
-              <a:spcBef>
-                <a:spcPts val="300"/>
-              </a:spcBef>
-              <a:spcAft>
-                <a:spcPts val="300"/>
-              </a:spcAft>
-              <a:buNone/>
-            </a:pPr>
-            <a:r>
-              <a:rPr lang="en-US" sz="1200" dirty="0">
-                <a:solidFill>
-                  <a:srgbClr val="1C2833"/>
-                </a:solidFill>
-                <a:latin typeface="Arial" pitchFamily="34" charset="0"/>
-                <a:ea typeface="Arial" pitchFamily="34" charset="-122"/>
-                <a:cs typeface="Arial" pitchFamily="34" charset="-120"/>
-              </a:rPr>
-              <a:t> quality.</a:t>
-            </a:r>
-            <a:endParaRPr lang="en-US" sz="1200" dirty="0"/>
-          </a:p>
-        </p:txBody>
-      </p:sp>
-      <p:sp>
-        <p:nvSpPr>
-          <p:cNvPr id="8" name="Text 6"/>
-          <p:cNvSpPr/>
-          <p:nvPr/>
-        </p:nvSpPr>
-        <p:spPr>
-          <a:xfrm>
-            <a:off x="406301" y="2516237"/>
-            <a:ext cx="8498026" cy="639812"/>
-          </a:xfrm>
-          <a:prstGeom prst="rect">
-            <a:avLst/>
-          </a:prstGeom>
-          <a:noFill/>
-          <a:ln/>
-        </p:spPr>
-        <p:txBody>
-          <a:bodyPr wrap="square" lIns="0" tIns="0" rIns="0" bIns="0" rtlCol="0" anchor="t"/>
-          <a:lstStyle/>
-          <a:p>
-            <a:pPr algn="l" indent="0" marL="0">
-              <a:lnSpc>
-                <a:spcPts val="1680"/>
-              </a:lnSpc>
-              <a:spcBef>
-                <a:spcPts val="300"/>
-              </a:spcBef>
-              <a:spcAft>
-                <a:spcPts val="300"/>
-              </a:spcAft>
-              <a:buNone/>
-            </a:pPr>
-            <a:r>
-              <a:rPr lang="en-US" sz="1200" dirty="0">
-                <a:solidFill>
-                  <a:srgbClr val="1C2833"/>
-                </a:solidFill>
-                <a:latin typeface="Arial" pitchFamily="34" charset="0"/>
-                <a:ea typeface="Arial" pitchFamily="34" charset="-122"/>
-                <a:cs typeface="Arial" pitchFamily="34" charset="-120"/>
-              </a:rPr>
-              <a:t>Examples: - </a:t>
-            </a:r>
-            <a:pPr algn="l" indent="0" marL="0">
-              <a:lnSpc>
-                <a:spcPts val="1680"/>
-              </a:lnSpc>
-              <a:spcBef>
-                <a:spcPts val="300"/>
-              </a:spcBef>
-              <a:spcAft>
-                <a:spcPts val="300"/>
-              </a:spcAft>
-              <a:buNone/>
-            </a:pPr>
-            <a:r>
-              <a:rPr lang="en-US" sz="1200" i="1" dirty="0">
-                <a:solidFill>
-                  <a:srgbClr val="1C2833"/>
-                </a:solidFill>
-                <a:latin typeface="Arial" pitchFamily="34" charset="0"/>
-                <a:ea typeface="Arial" pitchFamily="34" charset="-122"/>
-                <a:cs typeface="Arial" pitchFamily="34" charset="-120"/>
-              </a:rPr>
-              <a:t>Vāta</a:t>
-            </a:r>
-            <a:pPr algn="l" indent="0" marL="0">
-              <a:lnSpc>
-                <a:spcPts val="1680"/>
-              </a:lnSpc>
-              <a:spcBef>
-                <a:spcPts val="300"/>
-              </a:spcBef>
-              <a:spcAft>
-                <a:spcPts val="300"/>
-              </a:spcAft>
-              <a:buNone/>
-            </a:pPr>
-            <a:r>
-              <a:rPr lang="en-US" sz="1200" dirty="0">
-                <a:solidFill>
-                  <a:srgbClr val="1C2833"/>
-                </a:solidFill>
-                <a:latin typeface="Arial" pitchFamily="34" charset="0"/>
-                <a:ea typeface="Arial" pitchFamily="34" charset="-122"/>
-                <a:cs typeface="Arial" pitchFamily="34" charset="-120"/>
-              </a:rPr>
-              <a:t> (dry, cold) is increased by dry crackers and cold weather. Calmed by warm soup and oil massage. - </a:t>
-            </a:r>
-            <a:pPr algn="l" indent="0" marL="0">
-              <a:lnSpc>
-                <a:spcPts val="1680"/>
-              </a:lnSpc>
-              <a:spcBef>
-                <a:spcPts val="300"/>
-              </a:spcBef>
-              <a:spcAft>
-                <a:spcPts val="300"/>
-              </a:spcAft>
-              <a:buNone/>
-            </a:pPr>
-            <a:r>
-              <a:rPr lang="en-US" sz="1200" i="1" dirty="0">
-                <a:solidFill>
-                  <a:srgbClr val="1C2833"/>
-                </a:solidFill>
-                <a:latin typeface="Arial" pitchFamily="34" charset="0"/>
-                <a:ea typeface="Arial" pitchFamily="34" charset="-122"/>
-                <a:cs typeface="Arial" pitchFamily="34" charset="-120"/>
-              </a:rPr>
-              <a:t>Pitta</a:t>
-            </a:r>
-            <a:pPr algn="l" indent="0" marL="0">
-              <a:lnSpc>
-                <a:spcPts val="1680"/>
-              </a:lnSpc>
-              <a:spcBef>
-                <a:spcPts val="300"/>
-              </a:spcBef>
-              <a:spcAft>
-                <a:spcPts val="300"/>
-              </a:spcAft>
-              <a:buNone/>
-            </a:pPr>
-            <a:r>
-              <a:rPr lang="en-US" sz="1200" dirty="0">
-                <a:solidFill>
-                  <a:srgbClr val="1C2833"/>
-                </a:solidFill>
-                <a:latin typeface="Arial" pitchFamily="34" charset="0"/>
-                <a:ea typeface="Arial" pitchFamily="34" charset="-122"/>
-                <a:cs typeface="Arial" pitchFamily="34" charset="-120"/>
-              </a:rPr>
-              <a:t> (hot, sharp) is increased by spicy food and arguments. Calmed by cool milk and a walk in shade. - </a:t>
-            </a:r>
-            <a:pPr algn="l" indent="0" marL="0">
-              <a:lnSpc>
-                <a:spcPts val="1680"/>
-              </a:lnSpc>
-              <a:spcBef>
-                <a:spcPts val="300"/>
-              </a:spcBef>
-              <a:spcAft>
-                <a:spcPts val="300"/>
-              </a:spcAft>
-              <a:buNone/>
-            </a:pPr>
-            <a:r>
-              <a:rPr lang="en-US" sz="1200" i="1" dirty="0">
-                <a:solidFill>
-                  <a:srgbClr val="1C2833"/>
-                </a:solidFill>
-                <a:latin typeface="Arial" pitchFamily="34" charset="0"/>
-                <a:ea typeface="Arial" pitchFamily="34" charset="-122"/>
-                <a:cs typeface="Arial" pitchFamily="34" charset="-120"/>
-              </a:rPr>
-              <a:t>Kapha</a:t>
-            </a:r>
-            <a:pPr algn="l" indent="0" marL="0">
-              <a:lnSpc>
-                <a:spcPts val="1680"/>
-              </a:lnSpc>
-              <a:spcBef>
-                <a:spcPts val="300"/>
-              </a:spcBef>
-              <a:spcAft>
-                <a:spcPts val="300"/>
-              </a:spcAft>
-              <a:buNone/>
-            </a:pPr>
-            <a:r>
-              <a:rPr lang="en-US" sz="1200" dirty="0">
-                <a:solidFill>
-                  <a:srgbClr val="1C2833"/>
-                </a:solidFill>
-                <a:latin typeface="Arial" pitchFamily="34" charset="0"/>
-                <a:ea typeface="Arial" pitchFamily="34" charset="-122"/>
-                <a:cs typeface="Arial" pitchFamily="34" charset="-120"/>
-              </a:rPr>
-              <a:t> (heavy, slow) is increased by heavy oily meals and naps. Calmed by brisk walking and light food.</a:t>
-            </a:r>
-            <a:endParaRPr lang="en-US" sz="1200" dirty="0"/>
-          </a:p>
-        </p:txBody>
-      </p:sp>
-      <p:sp>
-        <p:nvSpPr>
-          <p:cNvPr id="9" name="Text 7"/>
-          <p:cNvSpPr/>
-          <p:nvPr/>
-        </p:nvSpPr>
-        <p:spPr>
-          <a:xfrm>
-            <a:off x="406301" y="3232249"/>
-            <a:ext cx="8498026" cy="213271"/>
-          </a:xfrm>
-          <a:prstGeom prst="rect">
-            <a:avLst/>
-          </a:prstGeom>
-          <a:noFill/>
-          <a:ln/>
-        </p:spPr>
-        <p:txBody>
-          <a:bodyPr wrap="square" lIns="0" tIns="0" rIns="0" bIns="0" rtlCol="0" anchor="t"/>
-          <a:lstStyle/>
-          <a:p>
-            <a:pPr algn="l" indent="0" marL="0">
-              <a:lnSpc>
-                <a:spcPts val="1680"/>
-              </a:lnSpc>
-              <a:spcBef>
-                <a:spcPts val="300"/>
-              </a:spcBef>
-              <a:spcAft>
-                <a:spcPts val="300"/>
-              </a:spcAft>
-              <a:buNone/>
-            </a:pPr>
-            <a:r>
-              <a:rPr lang="en-US" sz="1200" dirty="0">
-                <a:solidFill>
-                  <a:srgbClr val="1C2833"/>
-                </a:solidFill>
-                <a:latin typeface="Arial" pitchFamily="34" charset="0"/>
-                <a:ea typeface="Arial" pitchFamily="34" charset="-122"/>
-                <a:cs typeface="Arial" pitchFamily="34" charset="-120"/>
-              </a:rPr>
-              <a:t>This is the </a:t>
-            </a:r>
-            <a:pPr algn="l" indent="0" marL="0">
-              <a:lnSpc>
-                <a:spcPts val="1680"/>
-              </a:lnSpc>
-              <a:spcBef>
-                <a:spcPts val="300"/>
-              </a:spcBef>
-              <a:spcAft>
-                <a:spcPts val="300"/>
-              </a:spcAft>
-              <a:buNone/>
-            </a:pPr>
-            <a:r>
-              <a:rPr lang="en-US" sz="1200" i="1" dirty="0">
-                <a:solidFill>
-                  <a:srgbClr val="1C2833"/>
-                </a:solidFill>
-                <a:latin typeface="Arial" pitchFamily="34" charset="0"/>
-                <a:ea typeface="Arial" pitchFamily="34" charset="-122"/>
-                <a:cs typeface="Arial" pitchFamily="34" charset="-120"/>
-              </a:rPr>
-              <a:t>guṇa</a:t>
-            </a:r>
-            <a:pPr algn="l" indent="0" marL="0">
-              <a:lnSpc>
-                <a:spcPts val="1680"/>
-              </a:lnSpc>
-              <a:spcBef>
-                <a:spcPts val="300"/>
-              </a:spcBef>
-              <a:spcAft>
-                <a:spcPts val="300"/>
-              </a:spcAft>
-              <a:buNone/>
-            </a:pPr>
-            <a:r>
-              <a:rPr lang="en-US" sz="1200" dirty="0">
-                <a:solidFill>
-                  <a:srgbClr val="1C2833"/>
-                </a:solidFill>
-                <a:latin typeface="Arial" pitchFamily="34" charset="0"/>
-                <a:ea typeface="Arial" pitchFamily="34" charset="-122"/>
-                <a:cs typeface="Arial" pitchFamily="34" charset="-120"/>
-              </a:rPr>
-              <a:t> principle the rest of Ayurveda is built on.</a:t>
-            </a:r>
-            <a:endParaRPr lang="en-US" sz="1200" dirty="0"/>
-          </a:p>
-        </p:txBody>
-      </p:sp>
-      <p:sp>
-        <p:nvSpPr>
-          <p:cNvPr id="10" name="Text 8"/>
-          <p:cNvSpPr/>
-          <p:nvPr/>
-        </p:nvSpPr>
-        <p:spPr>
-          <a:xfrm>
-            <a:off x="634901" y="3534370"/>
-            <a:ext cx="8102798" cy="487561"/>
-          </a:xfrm>
-          <a:prstGeom prst="rect">
-            <a:avLst/>
-          </a:prstGeom>
-          <a:noFill/>
-          <a:ln/>
-        </p:spPr>
-        <p:txBody>
-          <a:bodyPr wrap="square" lIns="0" tIns="0" rIns="0" bIns="0" rtlCol="0" anchor="t"/>
-          <a:lstStyle/>
-          <a:p>
-            <a:pPr algn="l" marL="342900" indent="-342900">
-              <a:lnSpc>
-                <a:spcPts val="1620"/>
-              </a:lnSpc>
-              <a:spcAft>
-                <a:spcPts val="300"/>
-              </a:spcAft>
-              <a:buSzPct val="100000"/>
-              <a:buChar char="•"/>
-            </a:pPr>
-            <a:r>
-              <a:rPr lang="en-US" sz="1200" b="1" dirty="0">
-                <a:solidFill>
-                  <a:srgbClr val="1C2833"/>
-                </a:solidFill>
-                <a:latin typeface="Arial" pitchFamily="34" charset="0"/>
-                <a:ea typeface="Arial" pitchFamily="34" charset="-122"/>
-                <a:cs typeface="Arial" pitchFamily="34" charset="-120"/>
-              </a:rPr>
-              <a:t>What this is NOT.</a:t>
-            </a:r>
-            <a:pPr algn="l" indent="0" marL="0">
-              <a:lnSpc>
-                <a:spcPts val="1620"/>
-              </a:lnSpc>
-              <a:spcAft>
-                <a:spcPts val="300"/>
-              </a:spcAft>
-              <a:buNone/>
-            </a:pPr>
-            <a:r>
-              <a:rPr lang="en-US" sz="1200" dirty="0">
-                <a:solidFill>
-                  <a:srgbClr val="1C2833"/>
-                </a:solidFill>
-                <a:latin typeface="Arial" pitchFamily="34" charset="0"/>
-                <a:ea typeface="Arial" pitchFamily="34" charset="-122"/>
-                <a:cs typeface="Arial" pitchFamily="34" charset="-120"/>
-              </a:rPr>
-              <a:t> It is </a:t>
-            </a:r>
-            <a:pPr algn="l" indent="0" marL="0">
-              <a:lnSpc>
-                <a:spcPts val="1620"/>
-              </a:lnSpc>
-              <a:spcAft>
-                <a:spcPts val="300"/>
-              </a:spcAft>
-              <a:buNone/>
-            </a:pPr>
-            <a:r>
-              <a:rPr lang="en-US" sz="1200" b="1" dirty="0">
-                <a:solidFill>
-                  <a:srgbClr val="1C2833"/>
-                </a:solidFill>
-                <a:latin typeface="Arial" pitchFamily="34" charset="0"/>
-                <a:ea typeface="Arial" pitchFamily="34" charset="-122"/>
-                <a:cs typeface="Arial" pitchFamily="34" charset="-120"/>
-              </a:rPr>
-              <a:t>not</a:t>
-            </a:r>
-            <a:pPr algn="l" indent="0" marL="0">
-              <a:lnSpc>
-                <a:spcPts val="1620"/>
-              </a:lnSpc>
-              <a:spcAft>
-                <a:spcPts val="300"/>
-              </a:spcAft>
-              <a:buNone/>
-            </a:pPr>
-            <a:r>
-              <a:rPr lang="en-US" sz="1200" dirty="0">
-                <a:solidFill>
-                  <a:srgbClr val="1C2833"/>
-                </a:solidFill>
-                <a:latin typeface="Arial" pitchFamily="34" charset="0"/>
-                <a:ea typeface="Arial" pitchFamily="34" charset="-122"/>
-                <a:cs typeface="Arial" pitchFamily="34" charset="-120"/>
-              </a:rPr>
-              <a:t> a prescription for what </a:t>
-            </a:r>
-            <a:pPr algn="l" indent="0" marL="0">
-              <a:lnSpc>
-                <a:spcPts val="1620"/>
-              </a:lnSpc>
-              <a:spcAft>
-                <a:spcPts val="300"/>
-              </a:spcAft>
-              <a:buNone/>
-            </a:pPr>
-            <a:r>
-              <a:rPr lang="en-US" sz="1200" i="1" dirty="0">
-                <a:solidFill>
-                  <a:srgbClr val="1C2833"/>
-                </a:solidFill>
-                <a:latin typeface="Arial" pitchFamily="34" charset="0"/>
-                <a:ea typeface="Arial" pitchFamily="34" charset="-122"/>
-                <a:cs typeface="Arial" pitchFamily="34" charset="-120"/>
-              </a:rPr>
-              <a:t>you</a:t>
-            </a:r>
-            <a:pPr algn="l" indent="0" marL="0">
-              <a:lnSpc>
-                <a:spcPts val="1620"/>
-              </a:lnSpc>
-              <a:spcAft>
-                <a:spcPts val="300"/>
-              </a:spcAft>
-              <a:buNone/>
-            </a:pPr>
-            <a:r>
-              <a:rPr lang="en-US" sz="1200" dirty="0">
-                <a:solidFill>
-                  <a:srgbClr val="1C2833"/>
-                </a:solidFill>
-                <a:latin typeface="Arial" pitchFamily="34" charset="0"/>
-                <a:ea typeface="Arial" pitchFamily="34" charset="-122"/>
-                <a:cs typeface="Arial" pitchFamily="34" charset="-120"/>
-              </a:rPr>
-              <a:t> should eat. Modern nutrition still applies (protein, vitamins, calories). </a:t>
-            </a:r>
-            <a:pPr algn="l" indent="0" marL="0">
-              <a:lnSpc>
-                <a:spcPts val="1620"/>
-              </a:lnSpc>
-              <a:spcAft>
-                <a:spcPts val="300"/>
-              </a:spcAft>
-              <a:buNone/>
-            </a:pPr>
-            <a:r>
-              <a:rPr lang="en-US" sz="1200" i="1" dirty="0">
-                <a:solidFill>
-                  <a:srgbClr val="1C2833"/>
-                </a:solidFill>
-                <a:latin typeface="Arial" pitchFamily="34" charset="0"/>
-                <a:ea typeface="Arial" pitchFamily="34" charset="-122"/>
-                <a:cs typeface="Arial" pitchFamily="34" charset="-120"/>
-              </a:rPr>
-              <a:t>Doṣa</a:t>
-            </a:r>
-            <a:pPr algn="l" indent="0" marL="0">
-              <a:lnSpc>
-                <a:spcPts val="1620"/>
-              </a:lnSpc>
-              <a:spcAft>
-                <a:spcPts val="300"/>
-              </a:spcAft>
-              <a:buNone/>
-            </a:pPr>
-            <a:r>
-              <a:rPr lang="en-US" sz="1200" dirty="0">
-                <a:solidFill>
-                  <a:srgbClr val="1C2833"/>
-                </a:solidFill>
-                <a:latin typeface="Arial" pitchFamily="34" charset="0"/>
-                <a:ea typeface="Arial" pitchFamily="34" charset="-122"/>
-                <a:cs typeface="Arial" pitchFamily="34" charset="-120"/>
-              </a:rPr>
-              <a:t>-aware adjustment is a small overlay on top.</a:t>
-            </a:r>
-            <a:endParaRPr lang="en-US" sz="1200" dirty="0"/>
-          </a:p>
-        </p:txBody>
-      </p:sp>
-      <p:sp>
-        <p:nvSpPr>
-          <p:cNvPr id="11" name="Text 9"/>
           <p:cNvSpPr/>
           <p:nvPr/>
         </p:nvSpPr>
@@ -6126,7 +7787,7 @@
                 <a:ea typeface="Georgia" pitchFamily="34" charset="-122"/>
                 <a:cs typeface="Georgia" pitchFamily="34" charset="-120"/>
               </a:rPr>
-              <a:t>Wrap-up (5 min)</a:t>
+              <a:t>Activity (25 min) — Qualities sort (cont.)</a:t>
             </a:r>
             <a:endParaRPr lang="en-US" sz="1800" dirty="0"/>
           </a:p>
@@ -6140,8 +7801,8 @@
         </p:nvSpPr>
         <p:spPr>
           <a:xfrm>
-            <a:off x="406301" y="870942"/>
-            <a:ext cx="8498026" cy="426541"/>
+            <a:off x="634901" y="883593"/>
+            <a:ext cx="8102798" cy="1874044"/>
           </a:xfrm>
           <a:prstGeom prst="rect">
             <a:avLst/>
@@ -6153,17 +7814,15 @@
           <a:bodyPr wrap="square" lIns="0" tIns="0" rIns="0" bIns="0" rtlCol="0" anchor="t"/>
           <a:lstStyle/>
           <a:p>
-            <a:pPr algn="l" indent="0" marL="0">
-              <a:lnSpc>
-                <a:spcPts val="1680"/>
-              </a:lnSpc>
-              <a:spcBef>
-                <a:spcPts val="300"/>
-              </a:spcBef>
-              <a:spcAft>
-                <a:spcPts val="300"/>
-              </a:spcAft>
-              <a:buNone/>
+            <a:pPr algn="l" marL="342900" indent="-342900">
+              <a:lnSpc>
+                <a:spcPts val="1620"/>
+              </a:lnSpc>
+              <a:spcAft>
+                <a:spcPts val="300"/>
+              </a:spcAft>
+              <a:buSzPct val="100000"/>
+              <a:buChar char="•"/>
             </a:pPr>
             <a:r>
               <a:rPr lang="en-US" sz="1200" dirty="0">
@@ -6174,15 +7833,12 @@
                 <a:ea typeface="Arial" pitchFamily="34" charset="-122"/>
                 <a:cs typeface="Arial" pitchFamily="34" charset="-120"/>
               </a:rPr>
-              <a:t>– One-word exit: </a:t>
-            </a:r>
-            <a:pPr algn="l" indent="0" marL="0">
-              <a:lnSpc>
-                <a:spcPts val="1680"/>
-              </a:lnSpc>
-              <a:spcBef>
-                <a:spcPts val="300"/>
-              </a:spcBef>
+              <a:t>3 trays on the floor labelled </a:t>
+            </a:r>
+            <a:pPr algn="l" indent="0" marL="0">
+              <a:lnSpc>
+                <a:spcPts val="1620"/>
+              </a:lnSpc>
               <a:spcAft>
                 <a:spcPts val="300"/>
               </a:spcAft>
@@ -6197,15 +7853,12 @@
                 <a:ea typeface="Arial" pitchFamily="34" charset="-122"/>
                 <a:cs typeface="Arial" pitchFamily="34" charset="-120"/>
               </a:rPr>
-              <a:t>"Which doṣa do you think you've been most around this week — in the room you're in most, the food you've eaten most, the weather?"</a:t>
-            </a:r>
-            <a:pPr algn="l" indent="0" marL="0">
-              <a:lnSpc>
-                <a:spcPts val="1680"/>
-              </a:lnSpc>
-              <a:spcBef>
-                <a:spcPts val="300"/>
-              </a:spcBef>
+              <a:t>vāta, pitta, kapha</a:t>
+            </a:r>
+            <a:pPr algn="l" indent="0" marL="0">
+              <a:lnSpc>
+                <a:spcPts val="1620"/>
+              </a:lnSpc>
               <a:spcAft>
                 <a:spcPts val="300"/>
               </a:spcAft>
@@ -6220,15 +7873,60 @@
                 <a:ea typeface="Arial" pitchFamily="34" charset="-122"/>
                 <a:cs typeface="Arial" pitchFamily="34" charset="-120"/>
               </a:rPr>
-              <a:t> Sticky note. – Preview Day 5: </a:t>
-            </a:r>
-            <a:pPr algn="l" indent="0" marL="0">
-              <a:lnSpc>
-                <a:spcPts val="1680"/>
-              </a:lnSpc>
-              <a:spcBef>
-                <a:spcPts val="300"/>
-              </a:spcBef>
+              <a:t>.</a:t>
+            </a:r>
+            <a:endParaRPr lang="en-US" sz="1200" dirty="0"/>
+          </a:p>
+          <a:p>
+            <a:pPr algn="l" marL="342900" indent="-342900">
+              <a:lnSpc>
+                <a:spcPts val="1620"/>
+              </a:lnSpc>
+              <a:spcAft>
+                <a:spcPts val="300"/>
+              </a:spcAft>
+              <a:buSzPct val="100000"/>
+              <a:buChar char="•"/>
+            </a:pPr>
+            <a:r>
+              <a:rPr lang="en-US" sz="1200" dirty="0">
+                <a:solidFill>
+                  <a:srgbClr val="1C2833"/>
+                </a:solidFill>
+                <a:latin typeface="Arial" pitchFamily="34" charset="0"/>
+                <a:ea typeface="Arial" pitchFamily="34" charset="-122"/>
+                <a:cs typeface="Arial" pitchFamily="34" charset="-120"/>
+              </a:rPr>
+              <a:t>30 cards in a deck. Each card has a single phrase: "ice cream," "running," "dry wind," "stew," "shouting in anger," "deep sleep," etc.</a:t>
+            </a:r>
+            <a:endParaRPr lang="en-US" sz="1200" dirty="0"/>
+          </a:p>
+          <a:p>
+            <a:pPr algn="l" marL="342900" indent="-342900">
+              <a:lnSpc>
+                <a:spcPts val="1620"/>
+              </a:lnSpc>
+              <a:spcAft>
+                <a:spcPts val="300"/>
+              </a:spcAft>
+              <a:buSzPct val="100000"/>
+              <a:buChar char="•"/>
+            </a:pPr>
+            <a:r>
+              <a:rPr lang="en-US" sz="1200" dirty="0">
+                <a:solidFill>
+                  <a:srgbClr val="1C2833"/>
+                </a:solidFill>
+                <a:latin typeface="Arial" pitchFamily="34" charset="0"/>
+                <a:ea typeface="Arial" pitchFamily="34" charset="-122"/>
+                <a:cs typeface="Arial" pitchFamily="34" charset="-120"/>
+              </a:rPr>
+              <a:t>Class works in pairs. Each pair draws 6 cards in turn. They place each card on a tray and write a 1-line </a:t>
+            </a:r>
+            <a:pPr algn="l" indent="0" marL="0">
+              <a:lnSpc>
+                <a:spcPts val="1620"/>
+              </a:lnSpc>
               <a:spcAft>
                 <a:spcPts val="300"/>
               </a:spcAft>
@@ -6243,7 +7941,115 @@
                 <a:ea typeface="Arial" pitchFamily="34" charset="-122"/>
                 <a:cs typeface="Arial" pitchFamily="34" charset="-120"/>
               </a:rPr>
-              <a:t>"Tomorrow — the day-clock. Which doṣa runs when."</a:t>
+              <a:t>why</a:t>
+            </a:r>
+            <a:pPr algn="l" indent="0" marL="0">
+              <a:lnSpc>
+                <a:spcPts val="1620"/>
+              </a:lnSpc>
+              <a:spcAft>
+                <a:spcPts val="300"/>
+              </a:spcAft>
+              <a:buNone/>
+            </a:pPr>
+            <a:r>
+              <a:rPr lang="en-US" sz="1200" dirty="0">
+                <a:solidFill>
+                  <a:srgbClr val="1C2833"/>
+                </a:solidFill>
+                <a:latin typeface="Arial" pitchFamily="34" charset="0"/>
+                <a:ea typeface="Arial" pitchFamily="34" charset="-122"/>
+                <a:cs typeface="Arial" pitchFamily="34" charset="-120"/>
+              </a:rPr>
+              <a:t> in their notebook.</a:t>
+            </a:r>
+            <a:endParaRPr lang="en-US" sz="1200" dirty="0"/>
+          </a:p>
+          <a:p>
+            <a:pPr algn="l" marL="342900" indent="-342900">
+              <a:lnSpc>
+                <a:spcPts val="1620"/>
+              </a:lnSpc>
+              <a:spcAft>
+                <a:spcPts val="300"/>
+              </a:spcAft>
+              <a:buSzPct val="100000"/>
+              <a:buChar char="•"/>
+            </a:pPr>
+            <a:r>
+              <a:rPr lang="en-US" sz="1200" dirty="0">
+                <a:solidFill>
+                  <a:srgbClr val="1C2833"/>
+                </a:solidFill>
+                <a:latin typeface="Arial" pitchFamily="34" charset="0"/>
+                <a:ea typeface="Arial" pitchFamily="34" charset="-122"/>
+                <a:cs typeface="Arial" pitchFamily="34" charset="-120"/>
+              </a:rPr>
+              <a:t>After 15 min, swap pairs. Each pair reads aloud one card placement that's </a:t>
+            </a:r>
+            <a:pPr algn="l" indent="0" marL="0">
+              <a:lnSpc>
+                <a:spcPts val="1620"/>
+              </a:lnSpc>
+              <a:spcAft>
+                <a:spcPts val="300"/>
+              </a:spcAft>
+              <a:buNone/>
+            </a:pPr>
+            <a:r>
+              <a:rPr lang="en-US" sz="1200" i="1" dirty="0">
+                <a:solidFill>
+                  <a:srgbClr val="1C2833"/>
+                </a:solidFill>
+                <a:latin typeface="Arial" pitchFamily="34" charset="0"/>
+                <a:ea typeface="Arial" pitchFamily="34" charset="-122"/>
+                <a:cs typeface="Arial" pitchFamily="34" charset="-120"/>
+              </a:rPr>
+              <a:t>not obvious</a:t>
+            </a:r>
+            <a:pPr algn="l" indent="0" marL="0">
+              <a:lnSpc>
+                <a:spcPts val="1620"/>
+              </a:lnSpc>
+              <a:spcAft>
+                <a:spcPts val="300"/>
+              </a:spcAft>
+              <a:buNone/>
+            </a:pPr>
+            <a:r>
+              <a:rPr lang="en-US" sz="1200" dirty="0">
+                <a:solidFill>
+                  <a:srgbClr val="1C2833"/>
+                </a:solidFill>
+                <a:latin typeface="Arial" pitchFamily="34" charset="0"/>
+                <a:ea typeface="Arial" pitchFamily="34" charset="-122"/>
+                <a:cs typeface="Arial" pitchFamily="34" charset="-120"/>
+              </a:rPr>
+              <a:t> and defends it. Other pairs can disagree.</a:t>
+            </a:r>
+            <a:endParaRPr lang="en-US" sz="1200" dirty="0"/>
+          </a:p>
+          <a:p>
+            <a:pPr algn="l" marL="342900" indent="-342900">
+              <a:lnSpc>
+                <a:spcPts val="1620"/>
+              </a:lnSpc>
+              <a:spcAft>
+                <a:spcPts val="300"/>
+              </a:spcAft>
+              <a:buSzPct val="100000"/>
+              <a:buChar char="•"/>
+            </a:pPr>
+            <a:r>
+              <a:rPr lang="en-US" sz="1200" dirty="0">
+                <a:solidFill>
+                  <a:srgbClr val="1C2833"/>
+                </a:solidFill>
+                <a:latin typeface="Arial" pitchFamily="34" charset="0"/>
+                <a:ea typeface="Arial" pitchFamily="34" charset="-122"/>
+                <a:cs typeface="Arial" pitchFamily="34" charset="-120"/>
+              </a:rPr>
+              <a:t>The teacher keeps a tally on the board of cards where pairs disagreed.</a:t>
             </a:r>
             <a:endParaRPr lang="en-US" sz="1200" dirty="0"/>
           </a:p>
@@ -6401,7 +8207,7 @@
                 <a:ea typeface="Georgia" pitchFamily="34" charset="-122"/>
                 <a:cs typeface="Georgia" pitchFamily="34" charset="-120"/>
               </a:rPr>
-              <a:t>Student-facing content</a:t>
+              <a:t>Core debrief (10 min)</a:t>
             </a:r>
             <a:endParaRPr lang="en-US" sz="1800" dirty="0"/>
           </a:p>
@@ -6415,61 +8221,8 @@
         </p:nvSpPr>
         <p:spPr>
           <a:xfrm>
-            <a:off x="406301" y="883593"/>
-            <a:ext cx="8331398" cy="2112169"/>
-          </a:xfrm>
-          <a:prstGeom prst="rect">
-            <a:avLst/>
-          </a:prstGeom>
-          <a:solidFill>
-            <a:srgbClr val="F4F8F9"/>
-          </a:solidFill>
-          <a:ln/>
-        </p:spPr>
-        <p:txBody>
-          <a:bodyPr wrap="square" rtlCol="0" anchor="ctr"/>
-          <a:lstStyle/>
-          <a:p>
-            <a:pPr indent="0" marL="0">
-              <a:buNone/>
-            </a:pPr>
-            <a:endParaRPr lang="en-US" dirty="0"/>
-          </a:p>
-        </p:txBody>
-      </p:sp>
-      <p:sp>
-        <p:nvSpPr>
-          <p:cNvPr id="5" name="Shape 3"/>
-          <p:cNvSpPr/>
-          <p:nvPr/>
-        </p:nvSpPr>
-        <p:spPr>
-          <a:xfrm>
-            <a:off x="434876" y="883593"/>
-            <a:ext cx="0" cy="2112169"/>
-          </a:xfrm>
-          <a:prstGeom prst="line">
-            <a:avLst/>
-          </a:prstGeom>
-          <a:noFill/>
-          <a:ln w="57150">
-            <a:solidFill>
-              <a:srgbClr val="FE4447"/>
-            </a:solidFill>
-            <a:prstDash val="solid"/>
-          </a:ln>
-        </p:spPr>
-      </p:sp>
-      <p:sp>
-        <p:nvSpPr>
-          <p:cNvPr id="6" name="Text 4"/>
-          <p:cNvSpPr/>
-          <p:nvPr/>
-        </p:nvSpPr>
-        <p:spPr>
-          <a:xfrm>
-            <a:off x="692051" y="1074093"/>
-            <a:ext cx="7973389" cy="230981"/>
+            <a:off x="634901" y="883593"/>
+            <a:ext cx="8102798" cy="281880"/>
           </a:xfrm>
           <a:prstGeom prst="rect">
             <a:avLst/>
@@ -6481,135 +8234,61 @@
           <a:bodyPr wrap="square" lIns="0" tIns="0" rIns="0" bIns="0" rtlCol="0" anchor="t"/>
           <a:lstStyle/>
           <a:p>
-            <a:pPr algn="l" indent="0" marL="0">
-              <a:lnSpc>
-                <a:spcPts val="1820"/>
-              </a:lnSpc>
-              <a:spcBef>
-                <a:spcPts val="300"/>
-              </a:spcBef>
-              <a:spcAft>
-                <a:spcPts val="300"/>
-              </a:spcAft>
-              <a:buNone/>
-            </a:pPr>
-            <a:r>
-              <a:rPr lang="en-US" sz="1300" dirty="0">
-                <a:solidFill>
-                  <a:srgbClr val="1C2833"/>
-                </a:solidFill>
-                <a:latin typeface="Georgia" pitchFamily="34" charset="0"/>
-                <a:ea typeface="Georgia" pitchFamily="34" charset="-122"/>
-                <a:cs typeface="Georgia" pitchFamily="34" charset="-120"/>
-              </a:rPr>
-              <a:t>*</a:t>
-            </a:r>
-            <a:pPr algn="l" indent="0" marL="0">
-              <a:lnSpc>
-                <a:spcPts val="1820"/>
-              </a:lnSpc>
-              <a:spcBef>
-                <a:spcPts val="300"/>
-              </a:spcBef>
-              <a:spcAft>
-                <a:spcPts val="300"/>
-              </a:spcAft>
-              <a:buNone/>
-            </a:pPr>
-            <a:r>
-              <a:rPr lang="en-US" sz="1300" i="1" dirty="0">
-                <a:solidFill>
-                  <a:srgbClr val="1C2833"/>
-                </a:solidFill>
-                <a:latin typeface="Georgia" pitchFamily="34" charset="0"/>
-                <a:ea typeface="Georgia" pitchFamily="34" charset="-122"/>
-                <a:cs typeface="Georgia" pitchFamily="34" charset="-120"/>
-              </a:rPr>
-              <a:t>The</a:t>
-            </a:r>
-            <a:pPr algn="l" indent="0" marL="0">
-              <a:lnSpc>
-                <a:spcPts val="1820"/>
-              </a:lnSpc>
-              <a:spcBef>
-                <a:spcPts val="300"/>
-              </a:spcBef>
-              <a:spcAft>
-                <a:spcPts val="300"/>
-              </a:spcAft>
-              <a:buNone/>
-            </a:pPr>
-            <a:r>
-              <a:rPr lang="en-US" sz="1300" dirty="0">
-                <a:solidFill>
-                  <a:srgbClr val="1C2833"/>
-                </a:solidFill>
-                <a:latin typeface="Georgia" pitchFamily="34" charset="0"/>
-                <a:ea typeface="Georgia" pitchFamily="34" charset="-122"/>
-                <a:cs typeface="Georgia" pitchFamily="34" charset="-120"/>
-              </a:rPr>
-              <a:t>guṇa</a:t>
-            </a:r>
-            <a:pPr algn="l" indent="0" marL="0">
-              <a:lnSpc>
-                <a:spcPts val="1820"/>
-              </a:lnSpc>
-              <a:spcBef>
-                <a:spcPts val="300"/>
-              </a:spcBef>
-              <a:spcAft>
-                <a:spcPts val="300"/>
-              </a:spcAft>
-              <a:buNone/>
-            </a:pPr>
-            <a:r>
-              <a:rPr lang="en-US" sz="1300" i="1" dirty="0">
-                <a:solidFill>
-                  <a:srgbClr val="1C2833"/>
-                </a:solidFill>
-                <a:latin typeface="Georgia" pitchFamily="34" charset="0"/>
-                <a:ea typeface="Georgia" pitchFamily="34" charset="-122"/>
-                <a:cs typeface="Georgia" pitchFamily="34" charset="-120"/>
-              </a:rPr>
-              <a:t> principle: like increases like.</a:t>
-            </a:r>
-            <a:pPr algn="l" indent="0" marL="0">
-              <a:lnSpc>
-                <a:spcPts val="1820"/>
-              </a:lnSpc>
-              <a:spcBef>
-                <a:spcPts val="300"/>
-              </a:spcBef>
-              <a:spcAft>
-                <a:spcPts val="300"/>
-              </a:spcAft>
-              <a:buNone/>
-            </a:pPr>
-            <a:r>
-              <a:rPr lang="en-US" sz="1300" dirty="0">
-                <a:solidFill>
-                  <a:srgbClr val="1C2833"/>
-                </a:solidFill>
-                <a:latin typeface="Georgia" pitchFamily="34" charset="0"/>
-                <a:ea typeface="Georgia" pitchFamily="34" charset="-122"/>
-                <a:cs typeface="Georgia" pitchFamily="34" charset="-120"/>
-              </a:rPr>
-              <a:t>*</a:t>
-            </a:r>
-            <a:endParaRPr lang="en-US" sz="1300" dirty="0"/>
-          </a:p>
-        </p:txBody>
-      </p:sp>
-      <p:sp>
-        <p:nvSpPr>
-          <p:cNvPr id="7" name="Text 5"/>
+            <a:pPr algn="l" marL="342900" indent="-342900">
+              <a:lnSpc>
+                <a:spcPts val="1620"/>
+              </a:lnSpc>
+              <a:spcAft>
+                <a:spcPts val="300"/>
+              </a:spcAft>
+              <a:buSzPct val="100000"/>
+              <a:buChar char="•"/>
+            </a:pPr>
+            <a:r>
+              <a:rPr lang="en-US" sz="1200" b="1" dirty="0">
+                <a:solidFill>
+                  <a:srgbClr val="1C2833"/>
+                </a:solidFill>
+                <a:latin typeface="Arial" pitchFamily="34" charset="0"/>
+                <a:ea typeface="Arial" pitchFamily="34" charset="-122"/>
+                <a:cs typeface="Arial" pitchFamily="34" charset="-120"/>
+              </a:rPr>
+              <a:t>Which cards were tricky?</a:t>
+            </a:r>
+            <a:pPr algn="l" indent="0" marL="0">
+              <a:lnSpc>
+                <a:spcPts val="1620"/>
+              </a:lnSpc>
+              <a:spcAft>
+                <a:spcPts val="300"/>
+              </a:spcAft>
+              <a:buNone/>
+            </a:pPr>
+            <a:r>
+              <a:rPr lang="en-US" sz="1200" dirty="0">
+                <a:solidFill>
+                  <a:srgbClr val="1C2833"/>
+                </a:solidFill>
+                <a:latin typeface="Arial" pitchFamily="34" charset="0"/>
+                <a:ea typeface="Arial" pitchFamily="34" charset="-122"/>
+                <a:cs typeface="Arial" pitchFamily="34" charset="-120"/>
+              </a:rPr>
+              <a:t> Discuss the top 3 disagreed-on cards.</a:t>
+            </a:r>
+            <a:endParaRPr lang="en-US" sz="1200" dirty="0"/>
+          </a:p>
+        </p:txBody>
+      </p:sp>
+      <p:sp>
+        <p:nvSpPr>
+          <p:cNvPr id="5" name="Text 3"/>
           <p:cNvSpPr/>
           <p:nvPr/>
         </p:nvSpPr>
         <p:spPr>
           <a:xfrm>
-            <a:off x="692051" y="1343174"/>
-            <a:ext cx="7973389" cy="230981"/>
+            <a:off x="634901" y="1266974"/>
+            <a:ext cx="8102798" cy="487561"/>
           </a:xfrm>
           <a:prstGeom prst="rect">
             <a:avLst/>
@@ -6621,273 +8300,181 @@
           <a:bodyPr wrap="square" lIns="0" tIns="0" rIns="0" bIns="0" rtlCol="0" anchor="t"/>
           <a:lstStyle/>
           <a:p>
-            <a:pPr algn="l" indent="0" marL="0">
-              <a:lnSpc>
-                <a:spcPts val="1820"/>
-              </a:lnSpc>
-              <a:spcBef>
-                <a:spcPts val="300"/>
-              </a:spcBef>
-              <a:spcAft>
-                <a:spcPts val="300"/>
-              </a:spcAft>
-              <a:buNone/>
-            </a:pPr>
-            <a:r>
-              <a:rPr lang="en-US" sz="1300" dirty="0">
-                <a:solidFill>
-                  <a:srgbClr val="1C2833"/>
-                </a:solidFill>
-                <a:latin typeface="Georgia" pitchFamily="34" charset="0"/>
-                <a:ea typeface="Georgia" pitchFamily="34" charset="-122"/>
-                <a:cs typeface="Georgia" pitchFamily="34" charset="-120"/>
-              </a:rPr>
-              <a:t>If you want to </a:t>
-            </a:r>
-            <a:pPr algn="l" indent="0" marL="0">
-              <a:lnSpc>
-                <a:spcPts val="1820"/>
-              </a:lnSpc>
-              <a:spcBef>
-                <a:spcPts val="300"/>
-              </a:spcBef>
-              <a:spcAft>
-                <a:spcPts val="300"/>
-              </a:spcAft>
-              <a:buNone/>
-            </a:pPr>
-            <a:r>
-              <a:rPr lang="en-US" sz="1300" i="1" dirty="0">
-                <a:solidFill>
-                  <a:srgbClr val="1C2833"/>
-                </a:solidFill>
-                <a:latin typeface="Georgia" pitchFamily="34" charset="0"/>
-                <a:ea typeface="Georgia" pitchFamily="34" charset="-122"/>
-                <a:cs typeface="Georgia" pitchFamily="34" charset="-120"/>
-              </a:rPr>
-              <a:t>increase</a:t>
-            </a:r>
-            <a:pPr algn="l" indent="0" marL="0">
-              <a:lnSpc>
-                <a:spcPts val="1820"/>
-              </a:lnSpc>
-              <a:spcBef>
-                <a:spcPts val="300"/>
-              </a:spcBef>
-              <a:spcAft>
-                <a:spcPts val="300"/>
-              </a:spcAft>
-              <a:buNone/>
-            </a:pPr>
-            <a:r>
-              <a:rPr lang="en-US" sz="1300" dirty="0">
-                <a:solidFill>
-                  <a:srgbClr val="1C2833"/>
-                </a:solidFill>
-                <a:latin typeface="Georgia" pitchFamily="34" charset="0"/>
-                <a:ea typeface="Georgia" pitchFamily="34" charset="-122"/>
-                <a:cs typeface="Georgia" pitchFamily="34" charset="-120"/>
-              </a:rPr>
-              <a:t> a </a:t>
-            </a:r>
-            <a:pPr algn="l" indent="0" marL="0">
-              <a:lnSpc>
-                <a:spcPts val="1820"/>
-              </a:lnSpc>
-              <a:spcBef>
-                <a:spcPts val="300"/>
-              </a:spcBef>
-              <a:spcAft>
-                <a:spcPts val="300"/>
-              </a:spcAft>
-              <a:buNone/>
-            </a:pPr>
-            <a:r>
-              <a:rPr lang="en-US" sz="1300" i="1" dirty="0">
-                <a:solidFill>
-                  <a:srgbClr val="1C2833"/>
-                </a:solidFill>
-                <a:latin typeface="Georgia" pitchFamily="34" charset="0"/>
-                <a:ea typeface="Georgia" pitchFamily="34" charset="-122"/>
-                <a:cs typeface="Georgia" pitchFamily="34" charset="-120"/>
-              </a:rPr>
-              <a:t>doṣa</a:t>
-            </a:r>
-            <a:pPr algn="l" indent="0" marL="0">
-              <a:lnSpc>
-                <a:spcPts val="1820"/>
-              </a:lnSpc>
-              <a:spcBef>
-                <a:spcPts val="300"/>
-              </a:spcBef>
-              <a:spcAft>
-                <a:spcPts val="300"/>
-              </a:spcAft>
-              <a:buNone/>
-            </a:pPr>
-            <a:r>
-              <a:rPr lang="en-US" sz="1300" dirty="0">
-                <a:solidFill>
-                  <a:srgbClr val="1C2833"/>
-                </a:solidFill>
-                <a:latin typeface="Georgia" pitchFamily="34" charset="0"/>
-                <a:ea typeface="Georgia" pitchFamily="34" charset="-122"/>
-                <a:cs typeface="Georgia" pitchFamily="34" charset="-120"/>
-              </a:rPr>
-              <a:t>, use its qualities. If you want to </a:t>
-            </a:r>
-            <a:pPr algn="l" indent="0" marL="0">
-              <a:lnSpc>
-                <a:spcPts val="1820"/>
-              </a:lnSpc>
-              <a:spcBef>
-                <a:spcPts val="300"/>
-              </a:spcBef>
-              <a:spcAft>
-                <a:spcPts val="300"/>
-              </a:spcAft>
-              <a:buNone/>
-            </a:pPr>
-            <a:r>
-              <a:rPr lang="en-US" sz="1300" i="1" dirty="0">
-                <a:solidFill>
-                  <a:srgbClr val="1C2833"/>
-                </a:solidFill>
-                <a:latin typeface="Georgia" pitchFamily="34" charset="0"/>
-                <a:ea typeface="Georgia" pitchFamily="34" charset="-122"/>
-                <a:cs typeface="Georgia" pitchFamily="34" charset="-120"/>
-              </a:rPr>
-              <a:t>calm</a:t>
-            </a:r>
-            <a:pPr algn="l" indent="0" marL="0">
-              <a:lnSpc>
-                <a:spcPts val="1820"/>
-              </a:lnSpc>
-              <a:spcBef>
-                <a:spcPts val="300"/>
-              </a:spcBef>
-              <a:spcAft>
-                <a:spcPts val="300"/>
-              </a:spcAft>
-              <a:buNone/>
-            </a:pPr>
-            <a:r>
-              <a:rPr lang="en-US" sz="1300" dirty="0">
-                <a:solidFill>
-                  <a:srgbClr val="1C2833"/>
-                </a:solidFill>
-                <a:latin typeface="Georgia" pitchFamily="34" charset="0"/>
-                <a:ea typeface="Georgia" pitchFamily="34" charset="-122"/>
-                <a:cs typeface="Georgia" pitchFamily="34" charset="-120"/>
-              </a:rPr>
-              <a:t> a </a:t>
-            </a:r>
-            <a:pPr algn="l" indent="0" marL="0">
-              <a:lnSpc>
-                <a:spcPts val="1820"/>
-              </a:lnSpc>
-              <a:spcBef>
-                <a:spcPts val="300"/>
-              </a:spcBef>
-              <a:spcAft>
-                <a:spcPts val="300"/>
-              </a:spcAft>
-              <a:buNone/>
-            </a:pPr>
-            <a:r>
-              <a:rPr lang="en-US" sz="1300" i="1" dirty="0">
-                <a:solidFill>
-                  <a:srgbClr val="1C2833"/>
-                </a:solidFill>
-                <a:latin typeface="Georgia" pitchFamily="34" charset="0"/>
-                <a:ea typeface="Georgia" pitchFamily="34" charset="-122"/>
-                <a:cs typeface="Georgia" pitchFamily="34" charset="-120"/>
-              </a:rPr>
-              <a:t>doṣa</a:t>
-            </a:r>
-            <a:pPr algn="l" indent="0" marL="0">
-              <a:lnSpc>
-                <a:spcPts val="1820"/>
-              </a:lnSpc>
-              <a:spcBef>
-                <a:spcPts val="300"/>
-              </a:spcBef>
-              <a:spcAft>
-                <a:spcPts val="300"/>
-              </a:spcAft>
-              <a:buNone/>
-            </a:pPr>
-            <a:r>
-              <a:rPr lang="en-US" sz="1300" dirty="0">
-                <a:solidFill>
-                  <a:srgbClr val="1C2833"/>
-                </a:solidFill>
-                <a:latin typeface="Georgia" pitchFamily="34" charset="0"/>
-                <a:ea typeface="Georgia" pitchFamily="34" charset="-122"/>
-                <a:cs typeface="Georgia" pitchFamily="34" charset="-120"/>
-              </a:rPr>
-              <a:t>, use the </a:t>
-            </a:r>
-            <a:pPr algn="l" indent="0" marL="0">
-              <a:lnSpc>
-                <a:spcPts val="1820"/>
-              </a:lnSpc>
-              <a:spcBef>
-                <a:spcPts val="300"/>
-              </a:spcBef>
-              <a:spcAft>
-                <a:spcPts val="300"/>
-              </a:spcAft>
-              <a:buNone/>
-            </a:pPr>
-            <a:r>
-              <a:rPr lang="en-US" sz="1300" i="1" dirty="0">
-                <a:solidFill>
-                  <a:srgbClr val="1C2833"/>
-                </a:solidFill>
-                <a:latin typeface="Georgia" pitchFamily="34" charset="0"/>
-                <a:ea typeface="Georgia" pitchFamily="34" charset="-122"/>
-                <a:cs typeface="Georgia" pitchFamily="34" charset="-120"/>
-              </a:rPr>
-              <a:t>opposite</a:t>
-            </a:r>
-            <a:pPr algn="l" indent="0" marL="0">
-              <a:lnSpc>
-                <a:spcPts val="1820"/>
-              </a:lnSpc>
-              <a:spcBef>
-                <a:spcPts val="300"/>
-              </a:spcBef>
-              <a:spcAft>
-                <a:spcPts val="300"/>
-              </a:spcAft>
-              <a:buNone/>
-            </a:pPr>
-            <a:r>
-              <a:rPr lang="en-US" sz="1300" dirty="0">
-                <a:solidFill>
-                  <a:srgbClr val="1C2833"/>
-                </a:solidFill>
-                <a:latin typeface="Georgia" pitchFamily="34" charset="0"/>
-                <a:ea typeface="Georgia" pitchFamily="34" charset="-122"/>
-                <a:cs typeface="Georgia" pitchFamily="34" charset="-120"/>
-              </a:rPr>
-              <a:t> qualities.</a:t>
-            </a:r>
-            <a:endParaRPr lang="en-US" sz="1300" dirty="0"/>
-          </a:p>
-        </p:txBody>
-      </p:sp>
-      <p:sp>
-        <p:nvSpPr>
-          <p:cNvPr id="8" name="Text 6"/>
+            <a:pPr algn="l" marL="342900" indent="-342900">
+              <a:lnSpc>
+                <a:spcPts val="1620"/>
+              </a:lnSpc>
+              <a:spcAft>
+                <a:spcPts val="300"/>
+              </a:spcAft>
+              <a:buSzPct val="100000"/>
+              <a:buChar char="•"/>
+            </a:pPr>
+            <a:r>
+              <a:rPr lang="en-US" sz="1200" b="1" dirty="0">
+                <a:solidFill>
+                  <a:srgbClr val="1C2833"/>
+                </a:solidFill>
+                <a:latin typeface="Arial" pitchFamily="34" charset="0"/>
+                <a:ea typeface="Arial" pitchFamily="34" charset="-122"/>
+                <a:cs typeface="Arial" pitchFamily="34" charset="-120"/>
+              </a:rPr>
+              <a:t>The framework's limits.</a:t>
+            </a:r>
+            <a:pPr algn="l" indent="0" marL="0">
+              <a:lnSpc>
+                <a:spcPts val="1620"/>
+              </a:lnSpc>
+              <a:spcAft>
+                <a:spcPts val="300"/>
+              </a:spcAft>
+              <a:buNone/>
+            </a:pPr>
+            <a:r>
+              <a:rPr lang="en-US" sz="1200" dirty="0">
+                <a:solidFill>
+                  <a:srgbClr val="1C2833"/>
+                </a:solidFill>
+                <a:latin typeface="Arial" pitchFamily="34" charset="0"/>
+                <a:ea typeface="Arial" pitchFamily="34" charset="-122"/>
+                <a:cs typeface="Arial" pitchFamily="34" charset="-120"/>
+              </a:rPr>
+              <a:t> Some objects are </a:t>
+            </a:r>
+            <a:pPr algn="l" indent="0" marL="0">
+              <a:lnSpc>
+                <a:spcPts val="1620"/>
+              </a:lnSpc>
+              <a:spcAft>
+                <a:spcPts val="300"/>
+              </a:spcAft>
+              <a:buNone/>
+            </a:pPr>
+            <a:r>
+              <a:rPr lang="en-US" sz="1200" i="1" dirty="0">
+                <a:solidFill>
+                  <a:srgbClr val="1C2833"/>
+                </a:solidFill>
+                <a:latin typeface="Arial" pitchFamily="34" charset="0"/>
+                <a:ea typeface="Arial" pitchFamily="34" charset="-122"/>
+                <a:cs typeface="Arial" pitchFamily="34" charset="-120"/>
+              </a:rPr>
+              <a:t>multiple</a:t>
+            </a:r>
+            <a:pPr algn="l" indent="0" marL="0">
+              <a:lnSpc>
+                <a:spcPts val="1620"/>
+              </a:lnSpc>
+              <a:spcAft>
+                <a:spcPts val="300"/>
+              </a:spcAft>
+              <a:buNone/>
+            </a:pPr>
+            <a:r>
+              <a:rPr lang="en-US" sz="1200" dirty="0">
+                <a:solidFill>
+                  <a:srgbClr val="1C2833"/>
+                </a:solidFill>
+                <a:latin typeface="Arial" pitchFamily="34" charset="0"/>
+                <a:ea typeface="Arial" pitchFamily="34" charset="-122"/>
+                <a:cs typeface="Arial" pitchFamily="34" charset="-120"/>
+              </a:rPr>
+              <a:t> — a hot chocolate is </a:t>
+            </a:r>
+            <a:pPr algn="l" indent="0" marL="0">
+              <a:lnSpc>
+                <a:spcPts val="1620"/>
+              </a:lnSpc>
+              <a:spcAft>
+                <a:spcPts val="300"/>
+              </a:spcAft>
+              <a:buNone/>
+            </a:pPr>
+            <a:r>
+              <a:rPr lang="en-US" sz="1200" i="1" dirty="0">
+                <a:solidFill>
+                  <a:srgbClr val="1C2833"/>
+                </a:solidFill>
+                <a:latin typeface="Arial" pitchFamily="34" charset="0"/>
+                <a:ea typeface="Arial" pitchFamily="34" charset="-122"/>
+                <a:cs typeface="Arial" pitchFamily="34" charset="-120"/>
+              </a:rPr>
+              <a:t>pitta</a:t>
+            </a:r>
+            <a:pPr algn="l" indent="0" marL="0">
+              <a:lnSpc>
+                <a:spcPts val="1620"/>
+              </a:lnSpc>
+              <a:spcAft>
+                <a:spcPts val="300"/>
+              </a:spcAft>
+              <a:buNone/>
+            </a:pPr>
+            <a:r>
+              <a:rPr lang="en-US" sz="1200" dirty="0">
+                <a:solidFill>
+                  <a:srgbClr val="1C2833"/>
+                </a:solidFill>
+                <a:latin typeface="Arial" pitchFamily="34" charset="0"/>
+                <a:ea typeface="Arial" pitchFamily="34" charset="-122"/>
+                <a:cs typeface="Arial" pitchFamily="34" charset="-120"/>
+              </a:rPr>
+              <a:t> (hot) AND </a:t>
+            </a:r>
+            <a:pPr algn="l" indent="0" marL="0">
+              <a:lnSpc>
+                <a:spcPts val="1620"/>
+              </a:lnSpc>
+              <a:spcAft>
+                <a:spcPts val="300"/>
+              </a:spcAft>
+              <a:buNone/>
+            </a:pPr>
+            <a:r>
+              <a:rPr lang="en-US" sz="1200" i="1" dirty="0">
+                <a:solidFill>
+                  <a:srgbClr val="1C2833"/>
+                </a:solidFill>
+                <a:latin typeface="Arial" pitchFamily="34" charset="0"/>
+                <a:ea typeface="Arial" pitchFamily="34" charset="-122"/>
+                <a:cs typeface="Arial" pitchFamily="34" charset="-120"/>
+              </a:rPr>
+              <a:t>kapha</a:t>
+            </a:r>
+            <a:pPr algn="l" indent="0" marL="0">
+              <a:lnSpc>
+                <a:spcPts val="1620"/>
+              </a:lnSpc>
+              <a:spcAft>
+                <a:spcPts val="300"/>
+              </a:spcAft>
+              <a:buNone/>
+            </a:pPr>
+            <a:r>
+              <a:rPr lang="en-US" sz="1200" dirty="0">
+                <a:solidFill>
+                  <a:srgbClr val="1C2833"/>
+                </a:solidFill>
+                <a:latin typeface="Arial" pitchFamily="34" charset="0"/>
+                <a:ea typeface="Arial" pitchFamily="34" charset="-122"/>
+                <a:cs typeface="Arial" pitchFamily="34" charset="-120"/>
+              </a:rPr>
+              <a:t> (heavy, milky, sweet). That's fine. The framework doesn't claim a clean one-to-one match. Most real things are mixes.</a:t>
+            </a:r>
+            <a:endParaRPr lang="en-US" sz="1200" dirty="0"/>
+          </a:p>
+        </p:txBody>
+      </p:sp>
+      <p:sp>
+        <p:nvSpPr>
+          <p:cNvPr id="6" name="Text 4"/>
           <p:cNvSpPr/>
           <p:nvPr/>
         </p:nvSpPr>
         <p:spPr>
           <a:xfrm>
-            <a:off x="692051" y="1612255"/>
-            <a:ext cx="7973389" cy="692944"/>
+            <a:off x="634901" y="1856036"/>
+            <a:ext cx="8102798" cy="281880"/>
           </a:xfrm>
           <a:prstGeom prst="rect">
             <a:avLst/>
@@ -6899,337 +8486,103 @@
           <a:bodyPr wrap="square" lIns="0" tIns="0" rIns="0" bIns="0" rtlCol="0" anchor="t"/>
           <a:lstStyle/>
           <a:p>
-            <a:pPr algn="l" indent="0" marL="0">
-              <a:lnSpc>
-                <a:spcPts val="1820"/>
-              </a:lnSpc>
-              <a:spcBef>
-                <a:spcPts val="300"/>
-              </a:spcBef>
-              <a:spcAft>
-                <a:spcPts val="300"/>
-              </a:spcAft>
-              <a:buNone/>
-            </a:pPr>
-            <a:r>
-              <a:rPr lang="en-US" sz="1300" dirty="0">
-                <a:solidFill>
-                  <a:srgbClr val="1C2833"/>
-                </a:solidFill>
-                <a:latin typeface="Georgia" pitchFamily="34" charset="0"/>
-                <a:ea typeface="Georgia" pitchFamily="34" charset="-122"/>
-                <a:cs typeface="Georgia" pitchFamily="34" charset="-120"/>
-              </a:rPr>
-              <a:t>| Doṣa | Qualities | Calmed by | |------|-----------|-----------| | </a:t>
-            </a:r>
-            <a:pPr algn="l" indent="0" marL="0">
-              <a:lnSpc>
-                <a:spcPts val="1820"/>
-              </a:lnSpc>
-              <a:spcBef>
-                <a:spcPts val="300"/>
-              </a:spcBef>
-              <a:spcAft>
-                <a:spcPts val="300"/>
-              </a:spcAft>
-              <a:buNone/>
-            </a:pPr>
-            <a:r>
-              <a:rPr lang="en-US" sz="1300" i="1" dirty="0">
-                <a:solidFill>
-                  <a:srgbClr val="1C2833"/>
-                </a:solidFill>
-                <a:latin typeface="Georgia" pitchFamily="34" charset="0"/>
-                <a:ea typeface="Georgia" pitchFamily="34" charset="-122"/>
-                <a:cs typeface="Georgia" pitchFamily="34" charset="-120"/>
-              </a:rPr>
-              <a:t>vāta</a:t>
-            </a:r>
-            <a:pPr algn="l" indent="0" marL="0">
-              <a:lnSpc>
-                <a:spcPts val="1820"/>
-              </a:lnSpc>
-              <a:spcBef>
-                <a:spcPts val="300"/>
-              </a:spcBef>
-              <a:spcAft>
-                <a:spcPts val="300"/>
-              </a:spcAft>
-              <a:buNone/>
-            </a:pPr>
-            <a:r>
-              <a:rPr lang="en-US" sz="1300" dirty="0">
-                <a:solidFill>
-                  <a:srgbClr val="1C2833"/>
-                </a:solidFill>
-                <a:latin typeface="Georgia" pitchFamily="34" charset="0"/>
-                <a:ea typeface="Georgia" pitchFamily="34" charset="-122"/>
-                <a:cs typeface="Georgia" pitchFamily="34" charset="-120"/>
-              </a:rPr>
-              <a:t> | dry, cold, mobile | warm, moist, steady — warm soup, oil, rest | | </a:t>
-            </a:r>
-            <a:pPr algn="l" indent="0" marL="0">
-              <a:lnSpc>
-                <a:spcPts val="1820"/>
-              </a:lnSpc>
-              <a:spcBef>
-                <a:spcPts val="300"/>
-              </a:spcBef>
-              <a:spcAft>
-                <a:spcPts val="300"/>
-              </a:spcAft>
-              <a:buNone/>
-            </a:pPr>
-            <a:r>
-              <a:rPr lang="en-US" sz="1300" i="1" dirty="0">
-                <a:solidFill>
-                  <a:srgbClr val="1C2833"/>
-                </a:solidFill>
-                <a:latin typeface="Georgia" pitchFamily="34" charset="0"/>
-                <a:ea typeface="Georgia" pitchFamily="34" charset="-122"/>
-                <a:cs typeface="Georgia" pitchFamily="34" charset="-120"/>
-              </a:rPr>
-              <a:t>pitta</a:t>
-            </a:r>
-            <a:pPr algn="l" indent="0" marL="0">
-              <a:lnSpc>
-                <a:spcPts val="1820"/>
-              </a:lnSpc>
-              <a:spcBef>
-                <a:spcPts val="300"/>
-              </a:spcBef>
-              <a:spcAft>
-                <a:spcPts val="300"/>
-              </a:spcAft>
-              <a:buNone/>
-            </a:pPr>
-            <a:r>
-              <a:rPr lang="en-US" sz="1300" dirty="0">
-                <a:solidFill>
-                  <a:srgbClr val="1C2833"/>
-                </a:solidFill>
-                <a:latin typeface="Georgia" pitchFamily="34" charset="0"/>
-                <a:ea typeface="Georgia" pitchFamily="34" charset="-122"/>
-                <a:cs typeface="Georgia" pitchFamily="34" charset="-120"/>
-              </a:rPr>
-              <a:t> | hot, sharp, oily | cool, mild, sweet — milk, coriander, walk in shade | | </a:t>
-            </a:r>
-            <a:pPr algn="l" indent="0" marL="0">
-              <a:lnSpc>
-                <a:spcPts val="1820"/>
-              </a:lnSpc>
-              <a:spcBef>
-                <a:spcPts val="300"/>
-              </a:spcBef>
-              <a:spcAft>
-                <a:spcPts val="300"/>
-              </a:spcAft>
-              <a:buNone/>
-            </a:pPr>
-            <a:r>
-              <a:rPr lang="en-US" sz="1300" i="1" dirty="0">
-                <a:solidFill>
-                  <a:srgbClr val="1C2833"/>
-                </a:solidFill>
-                <a:latin typeface="Georgia" pitchFamily="34" charset="0"/>
-                <a:ea typeface="Georgia" pitchFamily="34" charset="-122"/>
-                <a:cs typeface="Georgia" pitchFamily="34" charset="-120"/>
-              </a:rPr>
-              <a:t>kapha</a:t>
-            </a:r>
-            <a:pPr algn="l" indent="0" marL="0">
-              <a:lnSpc>
-                <a:spcPts val="1820"/>
-              </a:lnSpc>
-              <a:spcBef>
-                <a:spcPts val="300"/>
-              </a:spcBef>
-              <a:spcAft>
-                <a:spcPts val="300"/>
-              </a:spcAft>
-              <a:buNone/>
-            </a:pPr>
-            <a:r>
-              <a:rPr lang="en-US" sz="1300" dirty="0">
-                <a:solidFill>
-                  <a:srgbClr val="1C2833"/>
-                </a:solidFill>
-                <a:latin typeface="Georgia" pitchFamily="34" charset="0"/>
-                <a:ea typeface="Georgia" pitchFamily="34" charset="-122"/>
-                <a:cs typeface="Georgia" pitchFamily="34" charset="-120"/>
-              </a:rPr>
-              <a:t> | heavy, slow, cool | light, dry, warm — ginger tea, brisk walk |</a:t>
-            </a:r>
-            <a:endParaRPr lang="en-US" sz="1300" dirty="0"/>
-          </a:p>
-        </p:txBody>
-      </p:sp>
-      <p:sp>
-        <p:nvSpPr>
-          <p:cNvPr id="9" name="Text 7"/>
-          <p:cNvSpPr/>
-          <p:nvPr/>
-        </p:nvSpPr>
-        <p:spPr>
-          <a:xfrm>
-            <a:off x="692051" y="2343299"/>
-            <a:ext cx="7973389" cy="461963"/>
-          </a:xfrm>
-          <a:prstGeom prst="rect">
-            <a:avLst/>
-          </a:prstGeom>
-          <a:noFill/>
-          <a:ln/>
-        </p:spPr>
-        <p:txBody>
-          <a:bodyPr wrap="square" lIns="0" tIns="0" rIns="0" bIns="0" rtlCol="0" anchor="t"/>
-          <a:lstStyle/>
-          <a:p>
-            <a:pPr algn="l" indent="0" marL="0">
-              <a:lnSpc>
-                <a:spcPts val="1820"/>
-              </a:lnSpc>
-              <a:spcBef>
-                <a:spcPts val="300"/>
-              </a:spcBef>
-              <a:spcAft>
-                <a:spcPts val="300"/>
-              </a:spcAft>
-              <a:buNone/>
-            </a:pPr>
-            <a:r>
-              <a:rPr lang="en-US" sz="1300" b="1" i="1" dirty="0">
-                <a:solidFill>
-                  <a:srgbClr val="1C2833"/>
-                </a:solidFill>
-                <a:latin typeface="Georgia" pitchFamily="34" charset="0"/>
-                <a:ea typeface="Georgia" pitchFamily="34" charset="-122"/>
-                <a:cs typeface="Georgia" pitchFamily="34" charset="-120"/>
-              </a:rPr>
-              <a:t>Reminder:</a:t>
-            </a:r>
-            <a:pPr algn="l" indent="0" marL="0">
-              <a:lnSpc>
-                <a:spcPts val="1820"/>
-              </a:lnSpc>
-              <a:spcBef>
-                <a:spcPts val="300"/>
-              </a:spcBef>
-              <a:spcAft>
-                <a:spcPts val="300"/>
-              </a:spcAft>
-              <a:buNone/>
-            </a:pPr>
-            <a:r>
-              <a:rPr lang="en-US" sz="1300" dirty="0">
-                <a:solidFill>
-                  <a:srgbClr val="1C2833"/>
-                </a:solidFill>
-                <a:latin typeface="Georgia" pitchFamily="34" charset="0"/>
-                <a:ea typeface="Georgia" pitchFamily="34" charset="-122"/>
-                <a:cs typeface="Georgia" pitchFamily="34" charset="-120"/>
-              </a:rPr>
-              <a:t> these are observations about </a:t>
-            </a:r>
-            <a:pPr algn="l" indent="0" marL="0">
-              <a:lnSpc>
-                <a:spcPts val="1820"/>
-              </a:lnSpc>
-              <a:spcBef>
-                <a:spcPts val="300"/>
-              </a:spcBef>
-              <a:spcAft>
-                <a:spcPts val="300"/>
-              </a:spcAft>
-              <a:buNone/>
-            </a:pPr>
-            <a:r>
-              <a:rPr lang="en-US" sz="1300" i="1" dirty="0">
-                <a:solidFill>
-                  <a:srgbClr val="1C2833"/>
-                </a:solidFill>
-                <a:latin typeface="Georgia" pitchFamily="34" charset="0"/>
-                <a:ea typeface="Georgia" pitchFamily="34" charset="-122"/>
-                <a:cs typeface="Georgia" pitchFamily="34" charset="-120"/>
-              </a:rPr>
-              <a:t>qualities of things</a:t>
-            </a:r>
-            <a:pPr algn="l" indent="0" marL="0">
-              <a:lnSpc>
-                <a:spcPts val="1820"/>
-              </a:lnSpc>
-              <a:spcBef>
-                <a:spcPts val="300"/>
-              </a:spcBef>
-              <a:spcAft>
-                <a:spcPts val="300"/>
-              </a:spcAft>
-              <a:buNone/>
-            </a:pPr>
-            <a:r>
-              <a:rPr lang="en-US" sz="1300" dirty="0">
-                <a:solidFill>
-                  <a:srgbClr val="1C2833"/>
-                </a:solidFill>
-                <a:latin typeface="Georgia" pitchFamily="34" charset="0"/>
-                <a:ea typeface="Georgia" pitchFamily="34" charset="-122"/>
-                <a:cs typeface="Georgia" pitchFamily="34" charset="-120"/>
-              </a:rPr>
-              <a:t>, not prescriptions for </a:t>
-            </a:r>
-            <a:pPr algn="l" indent="0" marL="0">
-              <a:lnSpc>
-                <a:spcPts val="1820"/>
-              </a:lnSpc>
-              <a:spcBef>
-                <a:spcPts val="300"/>
-              </a:spcBef>
-              <a:spcAft>
-                <a:spcPts val="300"/>
-              </a:spcAft>
-              <a:buNone/>
-            </a:pPr>
-            <a:r>
-              <a:rPr lang="en-US" sz="1300" i="1" dirty="0">
-                <a:solidFill>
-                  <a:srgbClr val="1C2833"/>
-                </a:solidFill>
-                <a:latin typeface="Georgia" pitchFamily="34" charset="0"/>
-                <a:ea typeface="Georgia" pitchFamily="34" charset="-122"/>
-                <a:cs typeface="Georgia" pitchFamily="34" charset="-120"/>
-              </a:rPr>
-              <a:t>what you should eat</a:t>
-            </a:r>
-            <a:pPr algn="l" indent="0" marL="0">
-              <a:lnSpc>
-                <a:spcPts val="1820"/>
-              </a:lnSpc>
-              <a:spcBef>
-                <a:spcPts val="300"/>
-              </a:spcBef>
-              <a:spcAft>
-                <a:spcPts val="300"/>
-              </a:spcAft>
-              <a:buNone/>
-            </a:pPr>
-            <a:r>
-              <a:rPr lang="en-US" sz="1300" dirty="0">
-                <a:solidFill>
-                  <a:srgbClr val="1C2833"/>
-                </a:solidFill>
-                <a:latin typeface="Georgia" pitchFamily="34" charset="0"/>
-                <a:ea typeface="Georgia" pitchFamily="34" charset="-122"/>
-                <a:cs typeface="Georgia" pitchFamily="34" charset="-120"/>
-              </a:rPr>
-              <a:t>. Modern nutrition still applies.</a:t>
-            </a:r>
-            <a:endParaRPr lang="en-US" sz="1300" dirty="0"/>
-          </a:p>
-        </p:txBody>
-      </p:sp>
-      <p:sp>
-        <p:nvSpPr>
-          <p:cNvPr id="10" name="Text 8"/>
+            <a:pPr algn="l" marL="342900" indent="-342900">
+              <a:lnSpc>
+                <a:spcPts val="1620"/>
+              </a:lnSpc>
+              <a:spcAft>
+                <a:spcPts val="300"/>
+              </a:spcAft>
+              <a:buSzPct val="100000"/>
+              <a:buChar char="•"/>
+            </a:pPr>
+            <a:pPr algn="l" indent="0" marL="0">
+              <a:lnSpc>
+                <a:spcPts val="1620"/>
+              </a:lnSpc>
+              <a:spcAft>
+                <a:spcPts val="300"/>
+              </a:spcAft>
+              <a:buNone/>
+            </a:pPr>
+            <a:r>
+              <a:rPr lang="en-US" sz="1200" i="1" dirty="0">
+                <a:solidFill>
+                  <a:srgbClr val="1C2833"/>
+                </a:solidFill>
+                <a:latin typeface="Arial" pitchFamily="34" charset="0"/>
+                <a:ea typeface="Arial" pitchFamily="34" charset="-122"/>
+                <a:cs typeface="Arial" pitchFamily="34" charset="-120"/>
+              </a:rPr>
+              <a:t>The</a:t>
+            </a:r>
+            <a:pPr algn="l" indent="0" marL="0">
+              <a:lnSpc>
+                <a:spcPts val="1620"/>
+              </a:lnSpc>
+              <a:spcAft>
+                <a:spcPts val="300"/>
+              </a:spcAft>
+              <a:buNone/>
+            </a:pPr>
+            <a:r>
+              <a:rPr lang="en-US" sz="1200" dirty="0">
+                <a:solidFill>
+                  <a:srgbClr val="1C2833"/>
+                </a:solidFill>
+                <a:latin typeface="Arial" pitchFamily="34" charset="0"/>
+                <a:ea typeface="Arial" pitchFamily="34" charset="-122"/>
+                <a:cs typeface="Arial" pitchFamily="34" charset="-120"/>
+              </a:rPr>
+              <a:t>guṇa</a:t>
+            </a:r>
+            <a:pPr algn="l" indent="0" marL="0">
+              <a:lnSpc>
+                <a:spcPts val="1620"/>
+              </a:lnSpc>
+              <a:spcAft>
+                <a:spcPts val="300"/>
+              </a:spcAft>
+              <a:buNone/>
+            </a:pPr>
+            <a:r>
+              <a:rPr lang="en-US" sz="1200" i="1" dirty="0">
+                <a:solidFill>
+                  <a:srgbClr val="1C2833"/>
+                </a:solidFill>
+                <a:latin typeface="Arial" pitchFamily="34" charset="0"/>
+                <a:ea typeface="Arial" pitchFamily="34" charset="-122"/>
+                <a:cs typeface="Arial" pitchFamily="34" charset="-120"/>
+              </a:rPr>
+              <a:t> principle</a:t>
+            </a:r>
+            <a:pPr algn="l" indent="0" marL="0">
+              <a:lnSpc>
+                <a:spcPts val="1620"/>
+              </a:lnSpc>
+              <a:spcAft>
+                <a:spcPts val="300"/>
+              </a:spcAft>
+              <a:buNone/>
+            </a:pPr>
+            <a:r>
+              <a:rPr lang="en-US" sz="1200" dirty="0">
+                <a:solidFill>
+                  <a:srgbClr val="1C2833"/>
+                </a:solidFill>
+                <a:latin typeface="Arial" pitchFamily="34" charset="0"/>
+                <a:ea typeface="Arial" pitchFamily="34" charset="-122"/>
+                <a:cs typeface="Arial" pitchFamily="34" charset="-120"/>
+              </a:rPr>
+              <a:t>* (state the rule):</a:t>
+            </a:r>
+            <a:endParaRPr lang="en-US" sz="1200" dirty="0"/>
+          </a:p>
+        </p:txBody>
+      </p:sp>
+      <p:sp>
+        <p:nvSpPr>
+          <p:cNvPr id="7" name="Text 5"/>
           <p:cNvSpPr/>
           <p:nvPr/>
         </p:nvSpPr>
